--- a/network.pptx
+++ b/network.pptx
@@ -5338,8 +5338,8 @@
             </p:txBody>
           </p:sp>
         </p:grpSp>
-        <mc:AlternateContent xmlns:mc="http://schemas.openxmlformats.org/markup-compatibility/2006">
-          <mc:Choice xmlns:a14="http://schemas.microsoft.com/office/drawing/2010/main" Requires="a14">
+        <mc:AlternateContent xmlns:mc="http://schemas.openxmlformats.org/markup-compatibility/2006" xmlns:a14="http://schemas.microsoft.com/office/drawing/2010/main">
+          <mc:Choice Requires="a14">
             <p:sp>
               <p:nvSpPr>
                 <p:cNvPr id="4" name="TextBox 3">
@@ -5409,7 +5409,7 @@
               </p:txBody>
             </p:sp>
           </mc:Choice>
-          <mc:Fallback>
+          <mc:Fallback xmlns="">
             <p:sp>
               <p:nvSpPr>
                 <p:cNvPr id="4" name="TextBox 3">
@@ -5534,8 +5534,8 @@
               </a:prstGeom>
             </p:spPr>
           </p:pic>
-          <mc:AlternateContent xmlns:mc="http://schemas.openxmlformats.org/markup-compatibility/2006">
-            <mc:Choice xmlns:a14="http://schemas.microsoft.com/office/drawing/2010/main" Requires="a14">
+          <mc:AlternateContent xmlns:mc="http://schemas.openxmlformats.org/markup-compatibility/2006" xmlns:a14="http://schemas.microsoft.com/office/drawing/2010/main">
+            <mc:Choice Requires="a14">
               <p:sp>
                 <p:nvSpPr>
                   <p:cNvPr id="8" name="TextBox 7">
@@ -5585,7 +5585,7 @@
                 </p:txBody>
               </p:sp>
             </mc:Choice>
-            <mc:Fallback>
+            <mc:Fallback xmlns="">
               <p:sp>
                 <p:nvSpPr>
                   <p:cNvPr id="8" name="TextBox 7">
@@ -5750,8 +5750,8 @@
               </a:prstGeom>
             </p:spPr>
           </p:pic>
-          <mc:AlternateContent xmlns:mc="http://schemas.openxmlformats.org/markup-compatibility/2006">
-            <mc:Choice xmlns:a14="http://schemas.microsoft.com/office/drawing/2010/main" Requires="a14">
+          <mc:AlternateContent xmlns:mc="http://schemas.openxmlformats.org/markup-compatibility/2006" xmlns:a14="http://schemas.microsoft.com/office/drawing/2010/main">
+            <mc:Choice Requires="a14">
               <p:sp>
                 <p:nvSpPr>
                   <p:cNvPr id="6" name="TextBox 5">
@@ -5821,7 +5821,7 @@
                 </p:txBody>
               </p:sp>
             </mc:Choice>
-            <mc:Fallback>
+            <mc:Fallback xmlns="">
               <p:sp>
                 <p:nvSpPr>
                   <p:cNvPr id="6" name="TextBox 5">
@@ -9609,10 +9609,10 @@
       </p:grpSpPr>
       <p:grpSp>
         <p:nvGrpSpPr>
-          <p:cNvPr id="43" name="Group 42">
+          <p:cNvPr id="22" name="Group 21">
             <a:extLst>
               <a:ext uri="{FF2B5EF4-FFF2-40B4-BE49-F238E27FC236}">
-                <a16:creationId xmlns:a16="http://schemas.microsoft.com/office/drawing/2014/main" id="{11E11800-AF2B-5FFB-2AF1-D54CF5A74A3E}"/>
+                <a16:creationId xmlns:a16="http://schemas.microsoft.com/office/drawing/2014/main" id="{2EA8A50F-FCBB-838B-786D-B6D913F3E808}"/>
               </a:ext>
             </a:extLst>
           </p:cNvPr>
@@ -9622,17 +9622,17 @@
         <p:grpSpPr>
           <a:xfrm>
             <a:off x="43106" y="1686625"/>
-            <a:ext cx="11928830" cy="2508561"/>
+            <a:ext cx="11927058" cy="2508561"/>
             <a:chOff x="43106" y="1686625"/>
-            <a:chExt cx="11928830" cy="2508561"/>
+            <a:chExt cx="11927058" cy="2508561"/>
           </a:xfrm>
         </p:grpSpPr>
         <p:grpSp>
           <p:nvGrpSpPr>
-            <p:cNvPr id="6" name="Group 5">
+            <p:cNvPr id="146" name="Group 145">
               <a:extLst>
                 <a:ext uri="{FF2B5EF4-FFF2-40B4-BE49-F238E27FC236}">
-                  <a16:creationId xmlns:a16="http://schemas.microsoft.com/office/drawing/2014/main" id="{072852F7-C966-B156-E883-80F1A4736ADC}"/>
+                  <a16:creationId xmlns:a16="http://schemas.microsoft.com/office/drawing/2014/main" id="{668D01E8-3FB0-86D5-F519-1020316BD615}"/>
                 </a:ext>
               </a:extLst>
             </p:cNvPr>
@@ -9642,101 +9642,424 @@
           <p:grpSpPr>
             <a:xfrm>
               <a:off x="1100106" y="1686625"/>
-              <a:ext cx="10871830" cy="2508561"/>
+              <a:ext cx="10428538" cy="2508561"/>
               <a:chOff x="1100106" y="1686625"/>
-              <a:chExt cx="10871830" cy="2508561"/>
+              <a:chExt cx="10428538" cy="2508561"/>
             </a:xfrm>
           </p:grpSpPr>
-          <p:pic>
-            <p:nvPicPr>
-              <p:cNvPr id="5" name="Picture 4">
+          <p:cxnSp>
+            <p:nvCxnSpPr>
+              <p:cNvPr id="86" name="Connector: Elbow 33">
                 <a:extLst>
                   <a:ext uri="{FF2B5EF4-FFF2-40B4-BE49-F238E27FC236}">
-                    <a16:creationId xmlns:a16="http://schemas.microsoft.com/office/drawing/2014/main" id="{07028C01-9A0E-C94B-1A74-A4027F114C2F}"/>
+                    <a16:creationId xmlns:a16="http://schemas.microsoft.com/office/drawing/2014/main" id="{A2BF321D-BF8F-17D3-6879-546CD6557B13}"/>
                   </a:ext>
                 </a:extLst>
               </p:cNvPr>
-              <p:cNvPicPr>
-                <a:picLocks noChangeAspect="1"/>
-              </p:cNvPicPr>
+              <p:cNvCxnSpPr>
+                <a:cxnSpLocks/>
+                <a:stCxn id="20" idx="3"/>
+              </p:cNvCxnSpPr>
               <p:nvPr/>
-            </p:nvPicPr>
-            <p:blipFill>
-              <a:blip r:embed="rId2">
+            </p:nvCxnSpPr>
+            <p:spPr>
+              <a:xfrm>
+                <a:off x="5240965" y="2511480"/>
+                <a:ext cx="449095" cy="375407"/>
+              </a:xfrm>
+              <a:prstGeom prst="bentConnector3">
+                <a:avLst>
+                  <a:gd name="adj1" fmla="val 50000"/>
+                </a:avLst>
+              </a:prstGeom>
+              <a:ln w="3175">
+                <a:solidFill>
+                  <a:schemeClr val="tx1"/>
+                </a:solidFill>
+                <a:tailEnd type="triangle"/>
+              </a:ln>
+            </p:spPr>
+            <p:style>
+              <a:lnRef idx="2">
+                <a:schemeClr val="accent1"/>
+              </a:lnRef>
+              <a:fillRef idx="0">
+                <a:schemeClr val="accent1"/>
+              </a:fillRef>
+              <a:effectRef idx="1">
+                <a:schemeClr val="accent1"/>
+              </a:effectRef>
+              <a:fontRef idx="minor">
+                <a:schemeClr val="tx1"/>
+              </a:fontRef>
+            </p:style>
+          </p:cxnSp>
+          <p:sp>
+            <p:nvSpPr>
+              <p:cNvPr id="7" name="Rectangle 6">
                 <a:extLst>
-                  <a:ext uri="{BEBA8EAE-BF5A-486C-A8C5-ECC9F3942E4B}">
-                    <a14:imgProps xmlns:a14="http://schemas.microsoft.com/office/drawing/2010/main">
-                      <a14:imgLayer r:embed="rId3">
-                        <a14:imgEffect>
-                          <a14:brightnessContrast bright="30000" contrast="20000"/>
-                        </a14:imgEffect>
-                      </a14:imgLayer>
-                    </a14:imgProps>
+                  <a:ext uri="{FF2B5EF4-FFF2-40B4-BE49-F238E27FC236}">
+                    <a16:creationId xmlns:a16="http://schemas.microsoft.com/office/drawing/2014/main" id="{D38757E0-3385-8674-5CB3-09EC5235E6B8}"/>
                   </a:ext>
                 </a:extLst>
-              </a:blip>
-              <a:stretch>
-                <a:fillRect/>
-              </a:stretch>
-            </p:blipFill>
+              </p:cNvPr>
+              <p:cNvSpPr/>
+              <p:nvPr/>
+            </p:nvSpPr>
             <p:spPr>
               <a:xfrm>
-                <a:off x="11064400" y="2522860"/>
-                <a:ext cx="907536" cy="694944"/>
+                <a:off x="1549467" y="2309919"/>
+                <a:ext cx="2199108" cy="1412865"/>
               </a:xfrm>
               <a:prstGeom prst="rect">
                 <a:avLst/>
               </a:prstGeom>
+              <a:solidFill>
+                <a:schemeClr val="accent2">
+                  <a:lumMod val="40000"/>
+                  <a:lumOff val="60000"/>
+                </a:schemeClr>
+              </a:solidFill>
+              <a:ln w="3175">
+                <a:solidFill>
+                  <a:schemeClr val="accent1"/>
+                </a:solidFill>
+              </a:ln>
             </p:spPr>
-          </p:pic>
-          <p:pic>
-            <p:nvPicPr>
-              <p:cNvPr id="4" name="Picture 3">
+            <p:style>
+              <a:lnRef idx="2">
+                <a:schemeClr val="accent1">
+                  <a:shade val="15000"/>
+                </a:schemeClr>
+              </a:lnRef>
+              <a:fillRef idx="1">
+                <a:schemeClr val="accent1"/>
+              </a:fillRef>
+              <a:effectRef idx="0">
+                <a:schemeClr val="accent1"/>
+              </a:effectRef>
+              <a:fontRef idx="minor">
+                <a:schemeClr val="lt1"/>
+              </a:fontRef>
+            </p:style>
+            <p:txBody>
+              <a:bodyPr vert="horz" rtlCol="0" anchor="ctr"/>
+              <a:lstStyle/>
+              <a:p>
+                <a:pPr algn="ctr"/>
+                <a:r>
+                  <a:rPr lang="en-US" sz="1600" dirty="0">
+                    <a:solidFill>
+                      <a:schemeClr val="tx1"/>
+                    </a:solidFill>
+                  </a:rPr>
+                  <a:t>Decomposition Network</a:t>
+                </a:r>
+              </a:p>
+            </p:txBody>
+          </p:sp>
+          <p:sp>
+            <p:nvSpPr>
+              <p:cNvPr id="10" name="Rectangle 9">
                 <a:extLst>
                   <a:ext uri="{FF2B5EF4-FFF2-40B4-BE49-F238E27FC236}">
-                    <a16:creationId xmlns:a16="http://schemas.microsoft.com/office/drawing/2014/main" id="{A10ACB33-0D99-6089-18D7-90A8801E8658}"/>
+                    <a16:creationId xmlns:a16="http://schemas.microsoft.com/office/drawing/2014/main" id="{8B2C4985-7FC6-4FEF-CAC3-1340D008D47F}"/>
                   </a:ext>
                 </a:extLst>
               </p:cNvPr>
-              <p:cNvPicPr>
-                <a:picLocks noChangeAspect="1"/>
-              </p:cNvPicPr>
+              <p:cNvSpPr/>
               <p:nvPr/>
-            </p:nvPicPr>
-            <p:blipFill>
-              <a:blip r:embed="rId2">
-                <a:extLst>
-                  <a:ext uri="{BEBA8EAE-BF5A-486C-A8C5-ECC9F3942E4B}">
-                    <a14:imgProps xmlns:a14="http://schemas.microsoft.com/office/drawing/2010/main">
-                      <a14:imgLayer r:embed="rId3">
-                        <a14:imgEffect>
-                          <a14:brightnessContrast bright="30000" contrast="20000"/>
-                        </a14:imgEffect>
-                      </a14:imgLayer>
-                    </a14:imgProps>
-                  </a:ext>
-                </a:extLst>
-              </a:blip>
-              <a:stretch>
-                <a:fillRect/>
-              </a:stretch>
-            </p:blipFill>
+            </p:nvSpPr>
             <p:spPr>
               <a:xfrm>
-                <a:off x="10963678" y="2603312"/>
-                <a:ext cx="907536" cy="694944"/>
+                <a:off x="5690060" y="2326313"/>
+                <a:ext cx="2199108" cy="1417320"/>
               </a:xfrm>
               <a:prstGeom prst="rect">
                 <a:avLst/>
               </a:prstGeom>
+              <a:solidFill>
+                <a:schemeClr val="accent1">
+                  <a:lumMod val="20000"/>
+                  <a:lumOff val="80000"/>
+                </a:schemeClr>
+              </a:solidFill>
+              <a:ln w="3175">
+                <a:solidFill>
+                  <a:schemeClr val="accent1"/>
+                </a:solidFill>
+              </a:ln>
             </p:spPr>
-          </p:pic>
+            <p:style>
+              <a:lnRef idx="2">
+                <a:schemeClr val="accent1">
+                  <a:shade val="15000"/>
+                </a:schemeClr>
+              </a:lnRef>
+              <a:fillRef idx="1">
+                <a:schemeClr val="accent1"/>
+              </a:fillRef>
+              <a:effectRef idx="0">
+                <a:schemeClr val="accent1"/>
+              </a:effectRef>
+              <a:fontRef idx="minor">
+                <a:schemeClr val="lt1"/>
+              </a:fontRef>
+            </p:style>
+            <p:txBody>
+              <a:bodyPr vert="horz" rtlCol="0" anchor="ctr"/>
+              <a:lstStyle/>
+              <a:p>
+                <a:pPr algn="ctr"/>
+                <a:r>
+                  <a:rPr lang="en-US" sz="1600" dirty="0">
+                    <a:solidFill>
+                      <a:schemeClr val="tx1"/>
+                    </a:solidFill>
+                  </a:rPr>
+                  <a:t>Illumination Adjustment Network</a:t>
+                </a:r>
+              </a:p>
+            </p:txBody>
+          </p:sp>
+          <mc:AlternateContent xmlns:mc="http://schemas.openxmlformats.org/markup-compatibility/2006" xmlns:a14="http://schemas.microsoft.com/office/drawing/2010/main">
+            <mc:Choice Requires="a14">
+              <p:sp>
+                <p:nvSpPr>
+                  <p:cNvPr id="26" name="TextBox 25">
+                    <a:extLst>
+                      <a:ext uri="{FF2B5EF4-FFF2-40B4-BE49-F238E27FC236}">
+                        <a16:creationId xmlns:a16="http://schemas.microsoft.com/office/drawing/2014/main" id="{5AF1F5DD-7A9E-E53B-C7A5-4F153349558F}"/>
+                      </a:ext>
+                    </a:extLst>
+                  </p:cNvPr>
+                  <p:cNvSpPr txBox="1"/>
+                  <p:nvPr/>
+                </p:nvSpPr>
+                <p:spPr>
+                  <a:xfrm>
+                    <a:off x="4253355" y="3918187"/>
+                    <a:ext cx="431528" cy="276999"/>
+                  </a:xfrm>
+                  <a:prstGeom prst="rect">
+                    <a:avLst/>
+                  </a:prstGeom>
+                  <a:noFill/>
+                </p:spPr>
+                <p:txBody>
+                  <a:bodyPr wrap="none" lIns="0" tIns="0" rIns="0" bIns="0" rtlCol="0">
+                    <a:spAutoFit/>
+                  </a:bodyPr>
+                  <a:lstStyle/>
+                  <a:p>
+                    <a:pPr/>
+                    <a14:m>
+                      <m:oMathPara xmlns:m="http://schemas.openxmlformats.org/officeDocument/2006/math">
+                        <m:oMathParaPr>
+                          <m:jc m:val="centerGroup"/>
+                        </m:oMathParaPr>
+                        <m:oMath xmlns:m="http://schemas.openxmlformats.org/officeDocument/2006/math">
+                          <m:sSub>
+                            <m:sSubPr>
+                              <m:ctrlPr>
+                                <a:rPr lang="en-US" i="1" smtClean="0">
+                                  <a:latin typeface="Cambria Math" panose="02040503050406030204" pitchFamily="18" charset="0"/>
+                                </a:rPr>
+                              </m:ctrlPr>
+                            </m:sSubPr>
+                            <m:e>
+                              <m:r>
+                                <a:rPr lang="en-US" b="0" i="1" smtClean="0">
+                                  <a:latin typeface="Cambria Math" panose="02040503050406030204" pitchFamily="18" charset="0"/>
+                                </a:rPr>
+                                <m:t>𝐼</m:t>
+                              </m:r>
+                            </m:e>
+                            <m:sub>
+                              <m:r>
+                                <a:rPr lang="en-US" b="0" i="1" smtClean="0">
+                                  <a:latin typeface="Cambria Math" panose="02040503050406030204" pitchFamily="18" charset="0"/>
+                                  <a:ea typeface="Cambria Math" panose="02040503050406030204" pitchFamily="18" charset="0"/>
+                                </a:rPr>
+                                <m:t>𝑙𝑜𝑤</m:t>
+                              </m:r>
+                            </m:sub>
+                          </m:sSub>
+                        </m:oMath>
+                      </m:oMathPara>
+                    </a14:m>
+                    <a:endParaRPr lang="en-US" dirty="0"/>
+                  </a:p>
+                </p:txBody>
+              </p:sp>
+            </mc:Choice>
+            <mc:Fallback xmlns="">
+              <p:sp>
+                <p:nvSpPr>
+                  <p:cNvPr id="26" name="TextBox 25">
+                    <a:extLst>
+                      <a:ext uri="{FF2B5EF4-FFF2-40B4-BE49-F238E27FC236}">
+                        <a16:creationId xmlns:a16="http://schemas.microsoft.com/office/drawing/2014/main" id="{5AF1F5DD-7A9E-E53B-C7A5-4F153349558F}"/>
+                      </a:ext>
+                    </a:extLst>
+                  </p:cNvPr>
+                  <p:cNvSpPr txBox="1">
+                    <a:spLocks noRot="1" noChangeAspect="1" noMove="1" noResize="1" noEditPoints="1" noAdjustHandles="1" noChangeArrowheads="1" noChangeShapeType="1" noTextEdit="1"/>
+                  </p:cNvSpPr>
+                  <p:nvPr/>
+                </p:nvSpPr>
+                <p:spPr>
+                  <a:xfrm>
+                    <a:off x="4253355" y="3918187"/>
+                    <a:ext cx="431528" cy="276999"/>
+                  </a:xfrm>
+                  <a:prstGeom prst="rect">
+                    <a:avLst/>
+                  </a:prstGeom>
+                  <a:blipFill>
+                    <a:blip r:embed="rId4"/>
+                    <a:stretch>
+                      <a:fillRect l="-14085" r="-5634" b="-17778"/>
+                    </a:stretch>
+                  </a:blipFill>
+                </p:spPr>
+                <p:txBody>
+                  <a:bodyPr/>
+                  <a:lstStyle/>
+                  <a:p>
+                    <a:r>
+                      <a:rPr lang="en-US">
+                        <a:noFill/>
+                      </a:rPr>
+                      <a:t> </a:t>
+                    </a:r>
+                  </a:p>
+                </p:txBody>
+              </p:sp>
+            </mc:Fallback>
+          </mc:AlternateContent>
+          <mc:AlternateContent xmlns:mc="http://schemas.openxmlformats.org/markup-compatibility/2006" xmlns:a14="http://schemas.microsoft.com/office/drawing/2010/main">
+            <mc:Choice Requires="a14">
+              <p:sp>
+                <p:nvSpPr>
+                  <p:cNvPr id="27" name="TextBox 26">
+                    <a:extLst>
+                      <a:ext uri="{FF2B5EF4-FFF2-40B4-BE49-F238E27FC236}">
+                        <a16:creationId xmlns:a16="http://schemas.microsoft.com/office/drawing/2014/main" id="{3B17B387-D242-3E8D-F128-A2F350139111}"/>
+                      </a:ext>
+                    </a:extLst>
+                  </p:cNvPr>
+                  <p:cNvSpPr txBox="1"/>
+                  <p:nvPr/>
+                </p:nvSpPr>
+                <p:spPr>
+                  <a:xfrm>
+                    <a:off x="4265075" y="1686625"/>
+                    <a:ext cx="500393" cy="276999"/>
+                  </a:xfrm>
+                  <a:prstGeom prst="rect">
+                    <a:avLst/>
+                  </a:prstGeom>
+                  <a:noFill/>
+                </p:spPr>
+                <p:txBody>
+                  <a:bodyPr wrap="none" lIns="0" tIns="0" rIns="0" bIns="0" rtlCol="0">
+                    <a:spAutoFit/>
+                  </a:bodyPr>
+                  <a:lstStyle/>
+                  <a:p>
+                    <a:pPr/>
+                    <a14:m>
+                      <m:oMathPara xmlns:m="http://schemas.openxmlformats.org/officeDocument/2006/math">
+                        <m:oMathParaPr>
+                          <m:jc m:val="centerGroup"/>
+                        </m:oMathParaPr>
+                        <m:oMath xmlns:m="http://schemas.openxmlformats.org/officeDocument/2006/math">
+                          <m:sSub>
+                            <m:sSubPr>
+                              <m:ctrlPr>
+                                <a:rPr lang="en-US" i="1" smtClean="0">
+                                  <a:latin typeface="Cambria Math" panose="02040503050406030204" pitchFamily="18" charset="0"/>
+                                </a:rPr>
+                              </m:ctrlPr>
+                            </m:sSubPr>
+                            <m:e>
+                              <m:r>
+                                <a:rPr lang="en-US" b="0" i="1" smtClean="0">
+                                  <a:latin typeface="Cambria Math" panose="02040503050406030204" pitchFamily="18" charset="0"/>
+                                </a:rPr>
+                                <m:t>𝑅</m:t>
+                              </m:r>
+                            </m:e>
+                            <m:sub>
+                              <m:r>
+                                <a:rPr lang="en-US" b="0" i="1" smtClean="0">
+                                  <a:latin typeface="Cambria Math" panose="02040503050406030204" pitchFamily="18" charset="0"/>
+                                  <a:ea typeface="Cambria Math" panose="02040503050406030204" pitchFamily="18" charset="0"/>
+                                </a:rPr>
+                                <m:t>𝑙𝑜𝑤</m:t>
+                              </m:r>
+                            </m:sub>
+                          </m:sSub>
+                        </m:oMath>
+                      </m:oMathPara>
+                    </a14:m>
+                    <a:endParaRPr lang="en-US" dirty="0"/>
+                  </a:p>
+                </p:txBody>
+              </p:sp>
+            </mc:Choice>
+            <mc:Fallback xmlns="">
+              <p:sp>
+                <p:nvSpPr>
+                  <p:cNvPr id="27" name="TextBox 26">
+                    <a:extLst>
+                      <a:ext uri="{FF2B5EF4-FFF2-40B4-BE49-F238E27FC236}">
+                        <a16:creationId xmlns:a16="http://schemas.microsoft.com/office/drawing/2014/main" id="{3B17B387-D242-3E8D-F128-A2F350139111}"/>
+                      </a:ext>
+                    </a:extLst>
+                  </p:cNvPr>
+                  <p:cNvSpPr txBox="1">
+                    <a:spLocks noRot="1" noChangeAspect="1" noMove="1" noResize="1" noEditPoints="1" noAdjustHandles="1" noChangeArrowheads="1" noChangeShapeType="1" noTextEdit="1"/>
+                  </p:cNvSpPr>
+                  <p:nvPr/>
+                </p:nvSpPr>
+                <p:spPr>
+                  <a:xfrm>
+                    <a:off x="4265075" y="1686625"/>
+                    <a:ext cx="500393" cy="276999"/>
+                  </a:xfrm>
+                  <a:prstGeom prst="rect">
+                    <a:avLst/>
+                  </a:prstGeom>
+                  <a:blipFill>
+                    <a:blip r:embed="rId5"/>
+                    <a:stretch>
+                      <a:fillRect l="-12195" r="-4878" b="-17778"/>
+                    </a:stretch>
+                  </a:blipFill>
+                </p:spPr>
+                <p:txBody>
+                  <a:bodyPr/>
+                  <a:lstStyle/>
+                  <a:p>
+                    <a:r>
+                      <a:rPr lang="en-US">
+                        <a:noFill/>
+                      </a:rPr>
+                      <a:t> </a:t>
+                    </a:r>
+                  </a:p>
+                </p:txBody>
+              </p:sp>
+            </mc:Fallback>
+          </mc:AlternateContent>
           <p:grpSp>
             <p:nvGrpSpPr>
-              <p:cNvPr id="146" name="Group 145">
+              <p:cNvPr id="111" name="Group 110">
                 <a:extLst>
                   <a:ext uri="{FF2B5EF4-FFF2-40B4-BE49-F238E27FC236}">
-                    <a16:creationId xmlns:a16="http://schemas.microsoft.com/office/drawing/2014/main" id="{668D01E8-3FB0-86D5-F519-1020316BD615}"/>
+                    <a16:creationId xmlns:a16="http://schemas.microsoft.com/office/drawing/2014/main" id="{FDA3245B-CF0A-D788-3ED3-38A319F29F15}"/>
                   </a:ext>
                 </a:extLst>
               </p:cNvPr>
@@ -9745,195 +10068,50 @@
             </p:nvGrpSpPr>
             <p:grpSpPr>
               <a:xfrm>
-                <a:off x="1100106" y="1686625"/>
-                <a:ext cx="10376918" cy="2508561"/>
-                <a:chOff x="1100106" y="1686625"/>
-                <a:chExt cx="10376918" cy="2508561"/>
+                <a:off x="8406617" y="2272859"/>
+                <a:ext cx="907536" cy="1109855"/>
+                <a:chOff x="8406617" y="2252221"/>
+                <a:chExt cx="907536" cy="1109855"/>
               </a:xfrm>
             </p:grpSpPr>
-            <p:cxnSp>
-              <p:nvCxnSpPr>
-                <p:cNvPr id="86" name="Connector: Elbow 33">
+            <p:pic>
+              <p:nvPicPr>
+                <p:cNvPr id="30" name="Picture 29">
                   <a:extLst>
                     <a:ext uri="{FF2B5EF4-FFF2-40B4-BE49-F238E27FC236}">
-                      <a16:creationId xmlns:a16="http://schemas.microsoft.com/office/drawing/2014/main" id="{A2BF321D-BF8F-17D3-6879-546CD6557B13}"/>
+                      <a16:creationId xmlns:a16="http://schemas.microsoft.com/office/drawing/2014/main" id="{32C5B79E-9A19-5BC5-A852-79CE9D0991DB}"/>
                     </a:ext>
                   </a:extLst>
                 </p:cNvPr>
-                <p:cNvCxnSpPr>
-                  <a:cxnSpLocks/>
-                  <a:stCxn id="20" idx="3"/>
-                </p:cNvCxnSpPr>
+                <p:cNvPicPr>
+                  <a:picLocks noChangeAspect="1"/>
+                </p:cNvPicPr>
                 <p:nvPr/>
-              </p:nvCxnSpPr>
+              </p:nvPicPr>
+              <p:blipFill>
+                <a:blip r:embed="rId6"/>
+                <a:stretch>
+                  <a:fillRect/>
+                </a:stretch>
+              </p:blipFill>
               <p:spPr>
                 <a:xfrm>
-                  <a:off x="5240965" y="2511480"/>
-                  <a:ext cx="449095" cy="375407"/>
-                </a:xfrm>
-                <a:prstGeom prst="bentConnector3">
-                  <a:avLst>
-                    <a:gd name="adj1" fmla="val 50000"/>
-                  </a:avLst>
-                </a:prstGeom>
-                <a:ln w="3175">
-                  <a:solidFill>
-                    <a:schemeClr val="tx1"/>
-                  </a:solidFill>
-                  <a:tailEnd type="triangle"/>
-                </a:ln>
-              </p:spPr>
-              <p:style>
-                <a:lnRef idx="2">
-                  <a:schemeClr val="accent1"/>
-                </a:lnRef>
-                <a:fillRef idx="0">
-                  <a:schemeClr val="accent1"/>
-                </a:fillRef>
-                <a:effectRef idx="1">
-                  <a:schemeClr val="accent1"/>
-                </a:effectRef>
-                <a:fontRef idx="minor">
-                  <a:schemeClr val="tx1"/>
-                </a:fontRef>
-              </p:style>
-            </p:cxnSp>
-            <p:sp>
-              <p:nvSpPr>
-                <p:cNvPr id="7" name="Rectangle 6">
-                  <a:extLst>
-                    <a:ext uri="{FF2B5EF4-FFF2-40B4-BE49-F238E27FC236}">
-                      <a16:creationId xmlns:a16="http://schemas.microsoft.com/office/drawing/2014/main" id="{D38757E0-3385-8674-5CB3-09EC5235E6B8}"/>
-                    </a:ext>
-                  </a:extLst>
-                </p:cNvPr>
-                <p:cNvSpPr/>
-                <p:nvPr/>
-              </p:nvSpPr>
-              <p:spPr>
-                <a:xfrm>
-                  <a:off x="1549467" y="2309919"/>
-                  <a:ext cx="2199108" cy="1412865"/>
+                  <a:off x="8406617" y="2667132"/>
+                  <a:ext cx="907536" cy="694944"/>
                 </a:xfrm>
                 <a:prstGeom prst="rect">
                   <a:avLst/>
                 </a:prstGeom>
-                <a:solidFill>
-                  <a:schemeClr val="accent2">
-                    <a:lumMod val="40000"/>
-                    <a:lumOff val="60000"/>
-                  </a:schemeClr>
-                </a:solidFill>
-                <a:ln w="3175">
-                  <a:solidFill>
-                    <a:schemeClr val="accent1"/>
-                  </a:solidFill>
-                </a:ln>
               </p:spPr>
-              <p:style>
-                <a:lnRef idx="2">
-                  <a:schemeClr val="accent1">
-                    <a:shade val="15000"/>
-                  </a:schemeClr>
-                </a:lnRef>
-                <a:fillRef idx="1">
-                  <a:schemeClr val="accent1"/>
-                </a:fillRef>
-                <a:effectRef idx="0">
-                  <a:schemeClr val="accent1"/>
-                </a:effectRef>
-                <a:fontRef idx="minor">
-                  <a:schemeClr val="lt1"/>
-                </a:fontRef>
-              </p:style>
-              <p:txBody>
-                <a:bodyPr vert="horz" rtlCol="0" anchor="ctr"/>
-                <a:lstStyle/>
-                <a:p>
-                  <a:pPr algn="ctr"/>
-                  <a:r>
-                    <a:rPr lang="en-US" sz="1600" dirty="0">
-                      <a:solidFill>
-                        <a:schemeClr val="tx1"/>
-                      </a:solidFill>
-                    </a:rPr>
-                    <a:t>Decomposition Network</a:t>
-                  </a:r>
-                </a:p>
-              </p:txBody>
-            </p:sp>
-            <p:sp>
-              <p:nvSpPr>
-                <p:cNvPr id="10" name="Rectangle 9">
-                  <a:extLst>
-                    <a:ext uri="{FF2B5EF4-FFF2-40B4-BE49-F238E27FC236}">
-                      <a16:creationId xmlns:a16="http://schemas.microsoft.com/office/drawing/2014/main" id="{8B2C4985-7FC6-4FEF-CAC3-1340D008D47F}"/>
-                    </a:ext>
-                  </a:extLst>
-                </p:cNvPr>
-                <p:cNvSpPr/>
-                <p:nvPr/>
-              </p:nvSpPr>
-              <p:spPr>
-                <a:xfrm>
-                  <a:off x="5690060" y="2326313"/>
-                  <a:ext cx="2199108" cy="1417320"/>
-                </a:xfrm>
-                <a:prstGeom prst="rect">
-                  <a:avLst/>
-                </a:prstGeom>
-                <a:solidFill>
-                  <a:schemeClr val="accent1">
-                    <a:lumMod val="20000"/>
-                    <a:lumOff val="80000"/>
-                  </a:schemeClr>
-                </a:solidFill>
-                <a:ln w="3175">
-                  <a:solidFill>
-                    <a:schemeClr val="accent1"/>
-                  </a:solidFill>
-                </a:ln>
-              </p:spPr>
-              <p:style>
-                <a:lnRef idx="2">
-                  <a:schemeClr val="accent1">
-                    <a:shade val="15000"/>
-                  </a:schemeClr>
-                </a:lnRef>
-                <a:fillRef idx="1">
-                  <a:schemeClr val="accent1"/>
-                </a:fillRef>
-                <a:effectRef idx="0">
-                  <a:schemeClr val="accent1"/>
-                </a:effectRef>
-                <a:fontRef idx="minor">
-                  <a:schemeClr val="lt1"/>
-                </a:fontRef>
-              </p:style>
-              <p:txBody>
-                <a:bodyPr vert="horz" rtlCol="0" anchor="ctr"/>
-                <a:lstStyle/>
-                <a:p>
-                  <a:pPr algn="ctr"/>
-                  <a:r>
-                    <a:rPr lang="en-US" sz="1600" dirty="0">
-                      <a:solidFill>
-                        <a:schemeClr val="tx1"/>
-                      </a:solidFill>
-                    </a:rPr>
-                    <a:t>Illumination Adjustment Network</a:t>
-                  </a:r>
-                </a:p>
-              </p:txBody>
-            </p:sp>
-            <mc:AlternateContent xmlns:mc="http://schemas.openxmlformats.org/markup-compatibility/2006">
-              <mc:Choice xmlns:a14="http://schemas.microsoft.com/office/drawing/2010/main" Requires="a14">
+            </p:pic>
+            <mc:AlternateContent xmlns:mc="http://schemas.openxmlformats.org/markup-compatibility/2006" xmlns:a14="http://schemas.microsoft.com/office/drawing/2010/main">
+              <mc:Choice Requires="a14">
                 <p:sp>
                   <p:nvSpPr>
-                    <p:cNvPr id="26" name="TextBox 25">
+                    <p:cNvPr id="31" name="TextBox 30">
                       <a:extLst>
                         <a:ext uri="{FF2B5EF4-FFF2-40B4-BE49-F238E27FC236}">
-                          <a16:creationId xmlns:a16="http://schemas.microsoft.com/office/drawing/2014/main" id="{5AF1F5DD-7A9E-E53B-C7A5-4F153349558F}"/>
+                          <a16:creationId xmlns:a16="http://schemas.microsoft.com/office/drawing/2014/main" id="{6CE69668-21D4-500A-62B0-44FA492612F3}"/>
                         </a:ext>
                       </a:extLst>
                     </p:cNvPr>
@@ -9942,8 +10120,8 @@
                   </p:nvSpPr>
                   <p:spPr>
                     <a:xfrm>
-                      <a:off x="4253355" y="3918187"/>
-                      <a:ext cx="431528" cy="276999"/>
+                      <a:off x="8741282" y="2252221"/>
+                      <a:ext cx="238206" cy="276999"/>
                     </a:xfrm>
                     <a:prstGeom prst="rect">
                       <a:avLst/>
@@ -9981,11 +10159,11 @@
                               </m:e>
                               <m:sub>
                                 <m:r>
-                                  <a:rPr lang="en-US" b="0" i="1" smtClean="0">
+                                  <a:rPr lang="en-US" i="1" smtClean="0">
                                     <a:latin typeface="Cambria Math" panose="02040503050406030204" pitchFamily="18" charset="0"/>
                                     <a:ea typeface="Cambria Math" panose="02040503050406030204" pitchFamily="18" charset="0"/>
                                   </a:rPr>
-                                  <m:t>𝑙𝑜𝑤</m:t>
+                                  <m:t>𝛿</m:t>
                                 </m:r>
                               </m:sub>
                             </m:sSub>
@@ -9997,13 +10175,13 @@
                   </p:txBody>
                 </p:sp>
               </mc:Choice>
-              <mc:Fallback>
+              <mc:Fallback xmlns="">
                 <p:sp>
                   <p:nvSpPr>
-                    <p:cNvPr id="26" name="TextBox 25">
+                    <p:cNvPr id="31" name="TextBox 30">
                       <a:extLst>
                         <a:ext uri="{FF2B5EF4-FFF2-40B4-BE49-F238E27FC236}">
-                          <a16:creationId xmlns:a16="http://schemas.microsoft.com/office/drawing/2014/main" id="{5AF1F5DD-7A9E-E53B-C7A5-4F153349558F}"/>
+                          <a16:creationId xmlns:a16="http://schemas.microsoft.com/office/drawing/2014/main" id="{6CE69668-21D4-500A-62B0-44FA492612F3}"/>
                         </a:ext>
                       </a:extLst>
                     </p:cNvPr>
@@ -10014,967 +10192,16 @@
                   </p:nvSpPr>
                   <p:spPr>
                     <a:xfrm>
-                      <a:off x="4253355" y="3918187"/>
-                      <a:ext cx="431528" cy="276999"/>
+                      <a:off x="8741282" y="2252221"/>
+                      <a:ext cx="238206" cy="276999"/>
                     </a:xfrm>
                     <a:prstGeom prst="rect">
                       <a:avLst/>
                     </a:prstGeom>
                     <a:blipFill>
-                      <a:blip r:embed="rId4"/>
+                      <a:blip r:embed="rId11"/>
                       <a:stretch>
-                        <a:fillRect l="-14085" r="-5634" b="-17778"/>
-                      </a:stretch>
-                    </a:blipFill>
-                  </p:spPr>
-                  <p:txBody>
-                    <a:bodyPr/>
-                    <a:lstStyle/>
-                    <a:p>
-                      <a:r>
-                        <a:rPr lang="en-US">
-                          <a:noFill/>
-                        </a:rPr>
-                        <a:t> </a:t>
-                      </a:r>
-                    </a:p>
-                  </p:txBody>
-                </p:sp>
-              </mc:Fallback>
-            </mc:AlternateContent>
-            <mc:AlternateContent xmlns:mc="http://schemas.openxmlformats.org/markup-compatibility/2006">
-              <mc:Choice xmlns:a14="http://schemas.microsoft.com/office/drawing/2010/main" Requires="a14">
-                <p:sp>
-                  <p:nvSpPr>
-                    <p:cNvPr id="27" name="TextBox 26">
-                      <a:extLst>
-                        <a:ext uri="{FF2B5EF4-FFF2-40B4-BE49-F238E27FC236}">
-                          <a16:creationId xmlns:a16="http://schemas.microsoft.com/office/drawing/2014/main" id="{3B17B387-D242-3E8D-F128-A2F350139111}"/>
-                        </a:ext>
-                      </a:extLst>
-                    </p:cNvPr>
-                    <p:cNvSpPr txBox="1"/>
-                    <p:nvPr/>
-                  </p:nvSpPr>
-                  <p:spPr>
-                    <a:xfrm>
-                      <a:off x="4265075" y="1686625"/>
-                      <a:ext cx="500393" cy="276999"/>
-                    </a:xfrm>
-                    <a:prstGeom prst="rect">
-                      <a:avLst/>
-                    </a:prstGeom>
-                    <a:noFill/>
-                  </p:spPr>
-                  <p:txBody>
-                    <a:bodyPr wrap="none" lIns="0" tIns="0" rIns="0" bIns="0" rtlCol="0">
-                      <a:spAutoFit/>
-                    </a:bodyPr>
-                    <a:lstStyle/>
-                    <a:p>
-                      <a:pPr/>
-                      <a14:m>
-                        <m:oMathPara xmlns:m="http://schemas.openxmlformats.org/officeDocument/2006/math">
-                          <m:oMathParaPr>
-                            <m:jc m:val="centerGroup"/>
-                          </m:oMathParaPr>
-                          <m:oMath xmlns:m="http://schemas.openxmlformats.org/officeDocument/2006/math">
-                            <m:sSub>
-                              <m:sSubPr>
-                                <m:ctrlPr>
-                                  <a:rPr lang="en-US" i="1" smtClean="0">
-                                    <a:latin typeface="Cambria Math" panose="02040503050406030204" pitchFamily="18" charset="0"/>
-                                  </a:rPr>
-                                </m:ctrlPr>
-                              </m:sSubPr>
-                              <m:e>
-                                <m:r>
-                                  <a:rPr lang="en-US" b="0" i="1" smtClean="0">
-                                    <a:latin typeface="Cambria Math" panose="02040503050406030204" pitchFamily="18" charset="0"/>
-                                  </a:rPr>
-                                  <m:t>𝑅</m:t>
-                                </m:r>
-                              </m:e>
-                              <m:sub>
-                                <m:r>
-                                  <a:rPr lang="en-US" b="0" i="1" smtClean="0">
-                                    <a:latin typeface="Cambria Math" panose="02040503050406030204" pitchFamily="18" charset="0"/>
-                                    <a:ea typeface="Cambria Math" panose="02040503050406030204" pitchFamily="18" charset="0"/>
-                                  </a:rPr>
-                                  <m:t>𝑙𝑜𝑤</m:t>
-                                </m:r>
-                              </m:sub>
-                            </m:sSub>
-                          </m:oMath>
-                        </m:oMathPara>
-                      </a14:m>
-                      <a:endParaRPr lang="en-US" dirty="0"/>
-                    </a:p>
-                  </p:txBody>
-                </p:sp>
-              </mc:Choice>
-              <mc:Fallback>
-                <p:sp>
-                  <p:nvSpPr>
-                    <p:cNvPr id="27" name="TextBox 26">
-                      <a:extLst>
-                        <a:ext uri="{FF2B5EF4-FFF2-40B4-BE49-F238E27FC236}">
-                          <a16:creationId xmlns:a16="http://schemas.microsoft.com/office/drawing/2014/main" id="{3B17B387-D242-3E8D-F128-A2F350139111}"/>
-                        </a:ext>
-                      </a:extLst>
-                    </p:cNvPr>
-                    <p:cNvSpPr txBox="1">
-                      <a:spLocks noRot="1" noChangeAspect="1" noMove="1" noResize="1" noEditPoints="1" noAdjustHandles="1" noChangeArrowheads="1" noChangeShapeType="1" noTextEdit="1"/>
-                    </p:cNvSpPr>
-                    <p:nvPr/>
-                  </p:nvSpPr>
-                  <p:spPr>
-                    <a:xfrm>
-                      <a:off x="4265075" y="1686625"/>
-                      <a:ext cx="500393" cy="276999"/>
-                    </a:xfrm>
-                    <a:prstGeom prst="rect">
-                      <a:avLst/>
-                    </a:prstGeom>
-                    <a:blipFill>
-                      <a:blip r:embed="rId5"/>
-                      <a:stretch>
-                        <a:fillRect l="-12195" r="-4878" b="-17778"/>
-                      </a:stretch>
-                    </a:blipFill>
-                  </p:spPr>
-                  <p:txBody>
-                    <a:bodyPr/>
-                    <a:lstStyle/>
-                    <a:p>
-                      <a:r>
-                        <a:rPr lang="en-US">
-                          <a:noFill/>
-                        </a:rPr>
-                        <a:t> </a:t>
-                      </a:r>
-                    </a:p>
-                  </p:txBody>
-                </p:sp>
-              </mc:Fallback>
-            </mc:AlternateContent>
-            <p:grpSp>
-              <p:nvGrpSpPr>
-                <p:cNvPr id="111" name="Group 110">
-                  <a:extLst>
-                    <a:ext uri="{FF2B5EF4-FFF2-40B4-BE49-F238E27FC236}">
-                      <a16:creationId xmlns:a16="http://schemas.microsoft.com/office/drawing/2014/main" id="{FDA3245B-CF0A-D788-3ED3-38A319F29F15}"/>
-                    </a:ext>
-                  </a:extLst>
-                </p:cNvPr>
-                <p:cNvGrpSpPr/>
-                <p:nvPr/>
-              </p:nvGrpSpPr>
-              <p:grpSpPr>
-                <a:xfrm>
-                  <a:off x="8406617" y="2272859"/>
-                  <a:ext cx="907536" cy="1109855"/>
-                  <a:chOff x="8406617" y="2252221"/>
-                  <a:chExt cx="907536" cy="1109855"/>
-                </a:xfrm>
-              </p:grpSpPr>
-              <p:pic>
-                <p:nvPicPr>
-                  <p:cNvPr id="30" name="Picture 29">
-                    <a:extLst>
-                      <a:ext uri="{FF2B5EF4-FFF2-40B4-BE49-F238E27FC236}">
-                        <a16:creationId xmlns:a16="http://schemas.microsoft.com/office/drawing/2014/main" id="{32C5B79E-9A19-5BC5-A852-79CE9D0991DB}"/>
-                      </a:ext>
-                    </a:extLst>
-                  </p:cNvPr>
-                  <p:cNvPicPr>
-                    <a:picLocks noChangeAspect="1"/>
-                  </p:cNvPicPr>
-                  <p:nvPr/>
-                </p:nvPicPr>
-                <p:blipFill>
-                  <a:blip r:embed="rId6"/>
-                  <a:stretch>
-                    <a:fillRect/>
-                  </a:stretch>
-                </p:blipFill>
-                <p:spPr>
-                  <a:xfrm>
-                    <a:off x="8406617" y="2667132"/>
-                    <a:ext cx="907536" cy="694944"/>
-                  </a:xfrm>
-                  <a:prstGeom prst="rect">
-                    <a:avLst/>
-                  </a:prstGeom>
-                </p:spPr>
-              </p:pic>
-              <mc:AlternateContent xmlns:mc="http://schemas.openxmlformats.org/markup-compatibility/2006" xmlns:a14="http://schemas.microsoft.com/office/drawing/2010/main">
-                <mc:Choice Requires="a14">
-                  <p:sp>
-                    <p:nvSpPr>
-                      <p:cNvPr id="31" name="TextBox 30">
-                        <a:extLst>
-                          <a:ext uri="{FF2B5EF4-FFF2-40B4-BE49-F238E27FC236}">
-                            <a16:creationId xmlns:a16="http://schemas.microsoft.com/office/drawing/2014/main" id="{6CE69668-21D4-500A-62B0-44FA492612F3}"/>
-                          </a:ext>
-                        </a:extLst>
-                      </p:cNvPr>
-                      <p:cNvSpPr txBox="1"/>
-                      <p:nvPr/>
-                    </p:nvSpPr>
-                    <p:spPr>
-                      <a:xfrm>
-                        <a:off x="8741282" y="2252221"/>
-                        <a:ext cx="238206" cy="276999"/>
-                      </a:xfrm>
-                      <a:prstGeom prst="rect">
-                        <a:avLst/>
-                      </a:prstGeom>
-                      <a:noFill/>
-                    </p:spPr>
-                    <p:txBody>
-                      <a:bodyPr wrap="none" lIns="0" tIns="0" rIns="0" bIns="0" rtlCol="0">
-                        <a:spAutoFit/>
-                      </a:bodyPr>
-                      <a:lstStyle/>
-                      <a:p>
-                        <a:pPr/>
-                        <a14:m>
-                          <m:oMathPara xmlns:m="http://schemas.openxmlformats.org/officeDocument/2006/math">
-                            <m:oMathParaPr>
-                              <m:jc m:val="centerGroup"/>
-                            </m:oMathParaPr>
-                            <m:oMath xmlns:m="http://schemas.openxmlformats.org/officeDocument/2006/math">
-                              <m:sSub>
-                                <m:sSubPr>
-                                  <m:ctrlPr>
-                                    <a:rPr lang="en-US" i="1" smtClean="0">
-                                      <a:latin typeface="Cambria Math" panose="02040503050406030204" pitchFamily="18" charset="0"/>
-                                    </a:rPr>
-                                  </m:ctrlPr>
-                                </m:sSubPr>
-                                <m:e>
-                                  <m:r>
-                                    <a:rPr lang="en-US" b="0" i="1" smtClean="0">
-                                      <a:latin typeface="Cambria Math" panose="02040503050406030204" pitchFamily="18" charset="0"/>
-                                    </a:rPr>
-                                    <m:t>𝐼</m:t>
-                                  </m:r>
-                                </m:e>
-                                <m:sub>
-                                  <m:r>
-                                    <a:rPr lang="en-US" i="1" smtClean="0">
-                                      <a:latin typeface="Cambria Math" panose="02040503050406030204" pitchFamily="18" charset="0"/>
-                                      <a:ea typeface="Cambria Math" panose="02040503050406030204" pitchFamily="18" charset="0"/>
-                                    </a:rPr>
-                                    <m:t>𝛿</m:t>
-                                  </m:r>
-                                </m:sub>
-                              </m:sSub>
-                            </m:oMath>
-                          </m:oMathPara>
-                        </a14:m>
-                        <a:endParaRPr lang="en-US" dirty="0"/>
-                      </a:p>
-                    </p:txBody>
-                  </p:sp>
-                </mc:Choice>
-                <mc:Fallback xmlns="">
-                  <p:sp>
-                    <p:nvSpPr>
-                      <p:cNvPr id="31" name="TextBox 30">
-                        <a:extLst>
-                          <a:ext uri="{FF2B5EF4-FFF2-40B4-BE49-F238E27FC236}">
-                            <a16:creationId xmlns:a16="http://schemas.microsoft.com/office/drawing/2014/main" id="{6CE69668-21D4-500A-62B0-44FA492612F3}"/>
-                          </a:ext>
-                        </a:extLst>
-                      </p:cNvPr>
-                      <p:cNvSpPr txBox="1">
-                        <a:spLocks noRot="1" noChangeAspect="1" noMove="1" noResize="1" noEditPoints="1" noAdjustHandles="1" noChangeArrowheads="1" noChangeShapeType="1" noTextEdit="1"/>
-                      </p:cNvSpPr>
-                      <p:nvPr/>
-                    </p:nvSpPr>
-                    <p:spPr>
-                      <a:xfrm>
-                        <a:off x="8741282" y="2252221"/>
-                        <a:ext cx="238206" cy="276999"/>
-                      </a:xfrm>
-                      <a:prstGeom prst="rect">
-                        <a:avLst/>
-                      </a:prstGeom>
-                      <a:blipFill>
-                        <a:blip r:embed="rId11"/>
-                        <a:stretch>
-                          <a:fillRect l="-25641" r="-10256" b="-17778"/>
-                        </a:stretch>
-                      </a:blipFill>
-                    </p:spPr>
-                    <p:txBody>
-                      <a:bodyPr/>
-                      <a:lstStyle/>
-                      <a:p>
-                        <a:r>
-                          <a:rPr lang="en-US">
-                            <a:noFill/>
-                          </a:rPr>
-                          <a:t> </a:t>
-                        </a:r>
-                      </a:p>
-                    </p:txBody>
-                  </p:sp>
-                </mc:Fallback>
-              </mc:AlternateContent>
-            </p:grpSp>
-            <p:cxnSp>
-              <p:nvCxnSpPr>
-                <p:cNvPr id="34" name="Connector: Elbow 33">
-                  <a:extLst>
-                    <a:ext uri="{FF2B5EF4-FFF2-40B4-BE49-F238E27FC236}">
-                      <a16:creationId xmlns:a16="http://schemas.microsoft.com/office/drawing/2014/main" id="{F9418489-351F-D735-BA8B-1B7D402D6B06}"/>
-                    </a:ext>
-                  </a:extLst>
-                </p:cNvPr>
-                <p:cNvCxnSpPr>
-                  <a:cxnSpLocks/>
-                  <a:endCxn id="7" idx="1"/>
-                </p:cNvCxnSpPr>
-                <p:nvPr/>
-              </p:nvCxnSpPr>
-              <p:spPr>
-                <a:xfrm>
-                  <a:off x="1100106" y="3016352"/>
-                  <a:ext cx="449361" cy="0"/>
-                </a:xfrm>
-                <a:prstGeom prst="straightConnector1">
-                  <a:avLst/>
-                </a:prstGeom>
-                <a:ln w="3175">
-                  <a:solidFill>
-                    <a:schemeClr val="tx1"/>
-                  </a:solidFill>
-                  <a:tailEnd type="triangle"/>
-                </a:ln>
-              </p:spPr>
-              <p:style>
-                <a:lnRef idx="2">
-                  <a:schemeClr val="accent1"/>
-                </a:lnRef>
-                <a:fillRef idx="0">
-                  <a:schemeClr val="accent1"/>
-                </a:fillRef>
-                <a:effectRef idx="1">
-                  <a:schemeClr val="accent1"/>
-                </a:effectRef>
-                <a:fontRef idx="minor">
-                  <a:schemeClr val="tx1"/>
-                </a:fontRef>
-              </p:style>
-            </p:cxnSp>
-            <p:cxnSp>
-              <p:nvCxnSpPr>
-                <p:cNvPr id="75" name="Connector: Elbow 33">
-                  <a:extLst>
-                    <a:ext uri="{FF2B5EF4-FFF2-40B4-BE49-F238E27FC236}">
-                      <a16:creationId xmlns:a16="http://schemas.microsoft.com/office/drawing/2014/main" id="{B595C908-766F-8487-EA76-7BE675EFA149}"/>
-                    </a:ext>
-                  </a:extLst>
-                </p:cNvPr>
-                <p:cNvCxnSpPr>
-                  <a:cxnSpLocks/>
-                  <a:stCxn id="7" idx="3"/>
-                  <a:endCxn id="23" idx="1"/>
-                </p:cNvCxnSpPr>
-                <p:nvPr/>
-              </p:nvCxnSpPr>
-              <p:spPr>
-                <a:xfrm flipV="1">
-                  <a:off x="3748575" y="2586228"/>
-                  <a:ext cx="517120" cy="430124"/>
-                </a:xfrm>
-                <a:prstGeom prst="bentConnector3">
-                  <a:avLst>
-                    <a:gd name="adj1" fmla="val 50000"/>
-                  </a:avLst>
-                </a:prstGeom>
-                <a:ln w="3175">
-                  <a:solidFill>
-                    <a:schemeClr val="tx1"/>
-                  </a:solidFill>
-                  <a:tailEnd type="triangle"/>
-                </a:ln>
-              </p:spPr>
-              <p:style>
-                <a:lnRef idx="2">
-                  <a:schemeClr val="accent1"/>
-                </a:lnRef>
-                <a:fillRef idx="0">
-                  <a:schemeClr val="accent1"/>
-                </a:fillRef>
-                <a:effectRef idx="1">
-                  <a:schemeClr val="accent1"/>
-                </a:effectRef>
-                <a:fontRef idx="minor">
-                  <a:schemeClr val="tx1"/>
-                </a:fontRef>
-              </p:style>
-            </p:cxnSp>
-            <p:cxnSp>
-              <p:nvCxnSpPr>
-                <p:cNvPr id="80" name="Connector: Elbow 33">
-                  <a:extLst>
-                    <a:ext uri="{FF2B5EF4-FFF2-40B4-BE49-F238E27FC236}">
-                      <a16:creationId xmlns:a16="http://schemas.microsoft.com/office/drawing/2014/main" id="{281610A7-FFA3-C3F2-6E56-E4B340E2B1F3}"/>
-                    </a:ext>
-                  </a:extLst>
-                </p:cNvPr>
-                <p:cNvCxnSpPr>
-                  <a:cxnSpLocks/>
-                  <a:stCxn id="7" idx="3"/>
-                  <a:endCxn id="36" idx="1"/>
-                </p:cNvCxnSpPr>
-                <p:nvPr/>
-              </p:nvCxnSpPr>
-              <p:spPr>
-                <a:xfrm>
-                  <a:off x="3748575" y="3016352"/>
-                  <a:ext cx="517120" cy="473902"/>
-                </a:xfrm>
-                <a:prstGeom prst="bentConnector3">
-                  <a:avLst>
-                    <a:gd name="adj1" fmla="val 50000"/>
-                  </a:avLst>
-                </a:prstGeom>
-                <a:ln w="3175">
-                  <a:solidFill>
-                    <a:schemeClr val="tx1"/>
-                  </a:solidFill>
-                  <a:tailEnd type="triangle"/>
-                </a:ln>
-              </p:spPr>
-              <p:style>
-                <a:lnRef idx="2">
-                  <a:schemeClr val="accent1"/>
-                </a:lnRef>
-                <a:fillRef idx="0">
-                  <a:schemeClr val="accent1"/>
-                </a:fillRef>
-                <a:effectRef idx="1">
-                  <a:schemeClr val="accent1"/>
-                </a:effectRef>
-                <a:fontRef idx="minor">
-                  <a:schemeClr val="tx1"/>
-                </a:fontRef>
-              </p:style>
-            </p:cxnSp>
-            <p:cxnSp>
-              <p:nvCxnSpPr>
-                <p:cNvPr id="92" name="Connector: Elbow 33">
-                  <a:extLst>
-                    <a:ext uri="{FF2B5EF4-FFF2-40B4-BE49-F238E27FC236}">
-                      <a16:creationId xmlns:a16="http://schemas.microsoft.com/office/drawing/2014/main" id="{7A5CED56-7687-D509-9C29-50E6FB135FA4}"/>
-                    </a:ext>
-                  </a:extLst>
-                </p:cNvPr>
-                <p:cNvCxnSpPr>
-                  <a:cxnSpLocks/>
-                  <a:stCxn id="36" idx="3"/>
-                </p:cNvCxnSpPr>
-                <p:nvPr/>
-              </p:nvCxnSpPr>
-              <p:spPr>
-                <a:xfrm flipV="1">
-                  <a:off x="5180095" y="3220538"/>
-                  <a:ext cx="509965" cy="269716"/>
-                </a:xfrm>
-                <a:prstGeom prst="bentConnector3">
-                  <a:avLst>
-                    <a:gd name="adj1" fmla="val 50000"/>
-                  </a:avLst>
-                </a:prstGeom>
-                <a:ln w="3175">
-                  <a:solidFill>
-                    <a:schemeClr val="tx1"/>
-                  </a:solidFill>
-                  <a:tailEnd type="triangle"/>
-                </a:ln>
-              </p:spPr>
-              <p:style>
-                <a:lnRef idx="2">
-                  <a:schemeClr val="accent1"/>
-                </a:lnRef>
-                <a:fillRef idx="0">
-                  <a:schemeClr val="accent1"/>
-                </a:fillRef>
-                <a:effectRef idx="1">
-                  <a:schemeClr val="accent1"/>
-                </a:effectRef>
-                <a:fontRef idx="minor">
-                  <a:schemeClr val="tx1"/>
-                </a:fontRef>
-              </p:style>
-            </p:cxnSp>
-            <p:cxnSp>
-              <p:nvCxnSpPr>
-                <p:cNvPr id="112" name="Connector: Elbow 33">
-                  <a:extLst>
-                    <a:ext uri="{FF2B5EF4-FFF2-40B4-BE49-F238E27FC236}">
-                      <a16:creationId xmlns:a16="http://schemas.microsoft.com/office/drawing/2014/main" id="{C75A67AE-F34F-2AC3-68C8-5F8E0C523D67}"/>
-                    </a:ext>
-                  </a:extLst>
-                </p:cNvPr>
-                <p:cNvCxnSpPr>
-                  <a:cxnSpLocks/>
-                  <a:stCxn id="10" idx="3"/>
-                  <a:endCxn id="30" idx="1"/>
-                </p:cNvCxnSpPr>
-                <p:nvPr/>
-              </p:nvCxnSpPr>
-              <p:spPr>
-                <a:xfrm>
-                  <a:off x="7889168" y="3034973"/>
-                  <a:ext cx="517449" cy="269"/>
-                </a:xfrm>
-                <a:prstGeom prst="straightConnector1">
-                  <a:avLst/>
-                </a:prstGeom>
-                <a:ln w="3175">
-                  <a:solidFill>
-                    <a:schemeClr val="tx1"/>
-                  </a:solidFill>
-                  <a:tailEnd type="triangle"/>
-                </a:ln>
-              </p:spPr>
-              <p:style>
-                <a:lnRef idx="2">
-                  <a:schemeClr val="accent1"/>
-                </a:lnRef>
-                <a:fillRef idx="0">
-                  <a:schemeClr val="accent1"/>
-                </a:fillRef>
-                <a:effectRef idx="1">
-                  <a:schemeClr val="accent1"/>
-                </a:effectRef>
-                <a:fontRef idx="minor">
-                  <a:schemeClr val="tx1"/>
-                </a:fontRef>
-              </p:style>
-            </p:cxnSp>
-            <p:sp>
-              <p:nvSpPr>
-                <p:cNvPr id="115" name="Flowchart: Or 114">
-                  <a:extLst>
-                    <a:ext uri="{FF2B5EF4-FFF2-40B4-BE49-F238E27FC236}">
-                      <a16:creationId xmlns:a16="http://schemas.microsoft.com/office/drawing/2014/main" id="{A3605BF9-16A6-9ED2-575E-07E0F6335467}"/>
-                    </a:ext>
-                  </a:extLst>
-                </p:cNvPr>
-                <p:cNvSpPr/>
-                <p:nvPr/>
-              </p:nvSpPr>
-              <p:spPr>
-                <a:xfrm>
-                  <a:off x="9694442" y="2896173"/>
-                  <a:ext cx="274320" cy="274320"/>
-                </a:xfrm>
-                <a:prstGeom prst="flowChartOr">
-                  <a:avLst/>
-                </a:prstGeom>
-                <a:noFill/>
-                <a:ln w="3175">
-                  <a:solidFill>
-                    <a:schemeClr val="tx1"/>
-                  </a:solidFill>
-                </a:ln>
-              </p:spPr>
-              <p:style>
-                <a:lnRef idx="2">
-                  <a:schemeClr val="accent1">
-                    <a:shade val="15000"/>
-                  </a:schemeClr>
-                </a:lnRef>
-                <a:fillRef idx="1">
-                  <a:schemeClr val="accent1"/>
-                </a:fillRef>
-                <a:effectRef idx="0">
-                  <a:schemeClr val="accent1"/>
-                </a:effectRef>
-                <a:fontRef idx="minor">
-                  <a:schemeClr val="lt1"/>
-                </a:fontRef>
-              </p:style>
-              <p:txBody>
-                <a:bodyPr rtlCol="0" anchor="ctr"/>
-                <a:lstStyle/>
-                <a:p>
-                  <a:pPr algn="ctr"/>
-                  <a:endParaRPr lang="en-US"/>
-                </a:p>
-              </p:txBody>
-            </p:sp>
-            <p:cxnSp>
-              <p:nvCxnSpPr>
-                <p:cNvPr id="116" name="Connector: Elbow 33">
-                  <a:extLst>
-                    <a:ext uri="{FF2B5EF4-FFF2-40B4-BE49-F238E27FC236}">
-                      <a16:creationId xmlns:a16="http://schemas.microsoft.com/office/drawing/2014/main" id="{357962D2-22DC-4DCB-808E-6C46D2226912}"/>
-                    </a:ext>
-                  </a:extLst>
-                </p:cNvPr>
-                <p:cNvCxnSpPr>
-                  <a:cxnSpLocks/>
-                  <a:stCxn id="36" idx="2"/>
-                  <a:endCxn id="115" idx="4"/>
-                </p:cNvCxnSpPr>
-                <p:nvPr/>
-              </p:nvCxnSpPr>
-              <p:spPr>
-                <a:xfrm rot="5400000" flipH="1" flipV="1">
-                  <a:off x="6944442" y="948945"/>
-                  <a:ext cx="665612" cy="5108707"/>
-                </a:xfrm>
-                <a:prstGeom prst="bentConnector3">
-                  <a:avLst>
-                    <a:gd name="adj1" fmla="val -34344"/>
-                  </a:avLst>
-                </a:prstGeom>
-                <a:ln w="3175">
-                  <a:solidFill>
-                    <a:schemeClr val="tx1"/>
-                  </a:solidFill>
-                  <a:tailEnd type="triangle"/>
-                </a:ln>
-              </p:spPr>
-              <p:style>
-                <a:lnRef idx="2">
-                  <a:schemeClr val="accent1"/>
-                </a:lnRef>
-                <a:fillRef idx="0">
-                  <a:schemeClr val="accent1"/>
-                </a:fillRef>
-                <a:effectRef idx="1">
-                  <a:schemeClr val="accent1"/>
-                </a:effectRef>
-                <a:fontRef idx="minor">
-                  <a:schemeClr val="tx1"/>
-                </a:fontRef>
-              </p:style>
-            </p:cxnSp>
-            <p:cxnSp>
-              <p:nvCxnSpPr>
-                <p:cNvPr id="119" name="Connector: Elbow 33">
-                  <a:extLst>
-                    <a:ext uri="{FF2B5EF4-FFF2-40B4-BE49-F238E27FC236}">
-                      <a16:creationId xmlns:a16="http://schemas.microsoft.com/office/drawing/2014/main" id="{B3DC5574-F375-9DCE-5C84-AEB3773D2812}"/>
-                    </a:ext>
-                  </a:extLst>
-                </p:cNvPr>
-                <p:cNvCxnSpPr>
-                  <a:cxnSpLocks/>
-                  <a:stCxn id="30" idx="3"/>
-                  <a:endCxn id="115" idx="2"/>
-                </p:cNvCxnSpPr>
-                <p:nvPr/>
-              </p:nvCxnSpPr>
-              <p:spPr>
-                <a:xfrm flipV="1">
-                  <a:off x="9314153" y="3033333"/>
-                  <a:ext cx="380289" cy="1909"/>
-                </a:xfrm>
-                <a:prstGeom prst="straightConnector1">
-                  <a:avLst/>
-                </a:prstGeom>
-                <a:ln w="3175">
-                  <a:solidFill>
-                    <a:schemeClr val="tx1"/>
-                  </a:solidFill>
-                  <a:tailEnd type="triangle"/>
-                </a:ln>
-              </p:spPr>
-              <p:style>
-                <a:lnRef idx="2">
-                  <a:schemeClr val="accent1"/>
-                </a:lnRef>
-                <a:fillRef idx="0">
-                  <a:schemeClr val="accent1"/>
-                </a:fillRef>
-                <a:effectRef idx="1">
-                  <a:schemeClr val="accent1"/>
-                </a:effectRef>
-                <a:fontRef idx="minor">
-                  <a:schemeClr val="tx1"/>
-                </a:fontRef>
-              </p:style>
-            </p:cxnSp>
-            <p:sp>
-              <p:nvSpPr>
-                <p:cNvPr id="126" name="Flowchart: Summing Junction 125">
-                  <a:extLst>
-                    <a:ext uri="{FF2B5EF4-FFF2-40B4-BE49-F238E27FC236}">
-                      <a16:creationId xmlns:a16="http://schemas.microsoft.com/office/drawing/2014/main" id="{2D34BE29-15A9-6C26-90A1-40778167C81A}"/>
-                    </a:ext>
-                  </a:extLst>
-                </p:cNvPr>
-                <p:cNvSpPr/>
-                <p:nvPr/>
-              </p:nvSpPr>
-              <p:spPr>
-                <a:xfrm>
-                  <a:off x="10210119" y="2896387"/>
-                  <a:ext cx="274320" cy="274320"/>
-                </a:xfrm>
-                <a:prstGeom prst="flowChartSummingJunction">
-                  <a:avLst/>
-                </a:prstGeom>
-                <a:noFill/>
-                <a:ln w="3175">
-                  <a:solidFill>
-                    <a:schemeClr val="tx1"/>
-                  </a:solidFill>
-                </a:ln>
-              </p:spPr>
-              <p:style>
-                <a:lnRef idx="2">
-                  <a:schemeClr val="accent1">
-                    <a:shade val="15000"/>
-                  </a:schemeClr>
-                </a:lnRef>
-                <a:fillRef idx="1">
-                  <a:schemeClr val="accent1"/>
-                </a:fillRef>
-                <a:effectRef idx="0">
-                  <a:schemeClr val="accent1"/>
-                </a:effectRef>
-                <a:fontRef idx="minor">
-                  <a:schemeClr val="lt1"/>
-                </a:fontRef>
-              </p:style>
-              <p:txBody>
-                <a:bodyPr rtlCol="0" anchor="ctr"/>
-                <a:lstStyle/>
-                <a:p>
-                  <a:pPr algn="ctr"/>
-                  <a:endParaRPr lang="en-US"/>
-                </a:p>
-              </p:txBody>
-            </p:sp>
-            <p:cxnSp>
-              <p:nvCxnSpPr>
-                <p:cNvPr id="128" name="Connector: Elbow 33">
-                  <a:extLst>
-                    <a:ext uri="{FF2B5EF4-FFF2-40B4-BE49-F238E27FC236}">
-                      <a16:creationId xmlns:a16="http://schemas.microsoft.com/office/drawing/2014/main" id="{DED60004-EFCA-F865-BFA0-D03485F7B0BC}"/>
-                    </a:ext>
-                  </a:extLst>
-                </p:cNvPr>
-                <p:cNvCxnSpPr>
-                  <a:cxnSpLocks/>
-                  <a:stCxn id="115" idx="6"/>
-                  <a:endCxn id="126" idx="2"/>
-                </p:cNvCxnSpPr>
-                <p:nvPr/>
-              </p:nvCxnSpPr>
-              <p:spPr>
-                <a:xfrm>
-                  <a:off x="9968762" y="3033333"/>
-                  <a:ext cx="241357" cy="214"/>
-                </a:xfrm>
-                <a:prstGeom prst="straightConnector1">
-                  <a:avLst/>
-                </a:prstGeom>
-                <a:ln w="3175">
-                  <a:solidFill>
-                    <a:schemeClr val="tx1"/>
-                  </a:solidFill>
-                  <a:tailEnd type="triangle"/>
-                </a:ln>
-              </p:spPr>
-              <p:style>
-                <a:lnRef idx="2">
-                  <a:schemeClr val="accent1"/>
-                </a:lnRef>
-                <a:fillRef idx="0">
-                  <a:schemeClr val="accent1"/>
-                </a:fillRef>
-                <a:effectRef idx="1">
-                  <a:schemeClr val="accent1"/>
-                </a:effectRef>
-                <a:fontRef idx="minor">
-                  <a:schemeClr val="tx1"/>
-                </a:fontRef>
-              </p:style>
-            </p:cxnSp>
-            <p:cxnSp>
-              <p:nvCxnSpPr>
-                <p:cNvPr id="131" name="Connector: Elbow 33">
-                  <a:extLst>
-                    <a:ext uri="{FF2B5EF4-FFF2-40B4-BE49-F238E27FC236}">
-                      <a16:creationId xmlns:a16="http://schemas.microsoft.com/office/drawing/2014/main" id="{293454F4-CEB9-D718-595E-1611BAB8AF13}"/>
-                    </a:ext>
-                  </a:extLst>
-                </p:cNvPr>
-                <p:cNvCxnSpPr>
-                  <a:cxnSpLocks/>
-                  <a:stCxn id="18" idx="0"/>
-                  <a:endCxn id="126" idx="0"/>
-                </p:cNvCxnSpPr>
-                <p:nvPr/>
-              </p:nvCxnSpPr>
-              <p:spPr>
-                <a:xfrm rot="16200000" flipH="1">
-                  <a:off x="7194298" y="-256594"/>
-                  <a:ext cx="813816" cy="5492146"/>
-                </a:xfrm>
-                <a:prstGeom prst="bentConnector3">
-                  <a:avLst>
-                    <a:gd name="adj1" fmla="val -28090"/>
-                  </a:avLst>
-                </a:prstGeom>
-                <a:ln w="3175">
-                  <a:solidFill>
-                    <a:schemeClr val="tx1"/>
-                  </a:solidFill>
-                  <a:tailEnd type="triangle"/>
-                </a:ln>
-              </p:spPr>
-              <p:style>
-                <a:lnRef idx="2">
-                  <a:schemeClr val="accent1"/>
-                </a:lnRef>
-                <a:fillRef idx="0">
-                  <a:schemeClr val="accent1"/>
-                </a:fillRef>
-                <a:effectRef idx="1">
-                  <a:schemeClr val="accent1"/>
-                </a:effectRef>
-                <a:fontRef idx="minor">
-                  <a:schemeClr val="tx1"/>
-                </a:fontRef>
-              </p:style>
-            </p:cxnSp>
-            <p:cxnSp>
-              <p:nvCxnSpPr>
-                <p:cNvPr id="142" name="Connector: Elbow 33">
-                  <a:extLst>
-                    <a:ext uri="{FF2B5EF4-FFF2-40B4-BE49-F238E27FC236}">
-                      <a16:creationId xmlns:a16="http://schemas.microsoft.com/office/drawing/2014/main" id="{B86528C2-7262-7E37-3A8B-342BDA13490F}"/>
-                    </a:ext>
-                  </a:extLst>
-                </p:cNvPr>
-                <p:cNvCxnSpPr>
-                  <a:cxnSpLocks/>
-                  <a:stCxn id="126" idx="6"/>
-                  <a:endCxn id="41" idx="1"/>
-                </p:cNvCxnSpPr>
-                <p:nvPr/>
-              </p:nvCxnSpPr>
-              <p:spPr>
-                <a:xfrm flipV="1">
-                  <a:off x="10484439" y="3031415"/>
-                  <a:ext cx="380289" cy="2132"/>
-                </a:xfrm>
-                <a:prstGeom prst="straightConnector1">
-                  <a:avLst/>
-                </a:prstGeom>
-                <a:ln w="3175">
-                  <a:solidFill>
-                    <a:schemeClr val="tx1"/>
-                  </a:solidFill>
-                  <a:tailEnd type="triangle"/>
-                </a:ln>
-              </p:spPr>
-              <p:style>
-                <a:lnRef idx="2">
-                  <a:schemeClr val="accent1"/>
-                </a:lnRef>
-                <a:fillRef idx="0">
-                  <a:schemeClr val="accent1"/>
-                </a:fillRef>
-                <a:effectRef idx="1">
-                  <a:schemeClr val="accent1"/>
-                </a:effectRef>
-                <a:fontRef idx="minor">
-                  <a:schemeClr val="tx1"/>
-                </a:fontRef>
-              </p:style>
-            </p:cxnSp>
-            <mc:AlternateContent xmlns:mc="http://schemas.openxmlformats.org/markup-compatibility/2006" xmlns:a14="http://schemas.microsoft.com/office/drawing/2010/main">
-              <mc:Choice Requires="a14">
-                <p:sp>
-                  <p:nvSpPr>
-                    <p:cNvPr id="145" name="TextBox 144">
-                      <a:extLst>
-                        <a:ext uri="{FF2B5EF4-FFF2-40B4-BE49-F238E27FC236}">
-                          <a16:creationId xmlns:a16="http://schemas.microsoft.com/office/drawing/2014/main" id="{F4063461-85E7-E8DE-745A-7B58532C5F23}"/>
-                        </a:ext>
-                      </a:extLst>
-                    </p:cNvPr>
-                    <p:cNvSpPr txBox="1"/>
-                    <p:nvPr/>
-                  </p:nvSpPr>
-                  <p:spPr>
-                    <a:xfrm>
-                      <a:off x="11316724" y="2179093"/>
-                      <a:ext cx="160300" cy="285719"/>
-                    </a:xfrm>
-                    <a:prstGeom prst="rect">
-                      <a:avLst/>
-                    </a:prstGeom>
-                    <a:noFill/>
-                  </p:spPr>
-                  <p:txBody>
-                    <a:bodyPr wrap="none" lIns="0" tIns="0" rIns="0" bIns="0" rtlCol="0">
-                      <a:spAutoFit/>
-                    </a:bodyPr>
-                    <a:lstStyle/>
-                    <a:p>
-                      <a:pPr/>
-                      <a14:m>
-                        <m:oMathPara xmlns:m="http://schemas.openxmlformats.org/officeDocument/2006/math">
-                          <m:oMathParaPr>
-                            <m:jc m:val="centerGroup"/>
-                          </m:oMathParaPr>
-                          <m:oMath xmlns:m="http://schemas.openxmlformats.org/officeDocument/2006/math">
-                            <m:r>
-                              <a:rPr lang="en-US" b="0" i="1" smtClean="0">
-                                <a:latin typeface="Cambria Math" panose="02040503050406030204" pitchFamily="18" charset="0"/>
-                              </a:rPr>
-                              <m:t>Ŝ</m:t>
-                            </m:r>
-                          </m:oMath>
-                        </m:oMathPara>
-                      </a14:m>
-                      <a:endParaRPr lang="en-US" dirty="0"/>
-                    </a:p>
-                  </p:txBody>
-                </p:sp>
-              </mc:Choice>
-              <mc:Fallback xmlns="">
-                <p:sp>
-                  <p:nvSpPr>
-                    <p:cNvPr id="145" name="TextBox 144">
-                      <a:extLst>
-                        <a:ext uri="{FF2B5EF4-FFF2-40B4-BE49-F238E27FC236}">
-                          <a16:creationId xmlns:a16="http://schemas.microsoft.com/office/drawing/2014/main" id="{F4063461-85E7-E8DE-745A-7B58532C5F23}"/>
-                        </a:ext>
-                      </a:extLst>
-                    </p:cNvPr>
-                    <p:cNvSpPr txBox="1">
-                      <a:spLocks noRot="1" noChangeAspect="1" noMove="1" noResize="1" noEditPoints="1" noAdjustHandles="1" noChangeArrowheads="1" noChangeShapeType="1" noTextEdit="1"/>
-                    </p:cNvSpPr>
-                    <p:nvPr/>
-                  </p:nvSpPr>
-                  <p:spPr>
-                    <a:xfrm>
-                      <a:off x="11316724" y="2179093"/>
-                      <a:ext cx="160300" cy="285719"/>
-                    </a:xfrm>
-                    <a:prstGeom prst="rect">
-                      <a:avLst/>
-                    </a:prstGeom>
-                    <a:blipFill>
-                      <a:blip r:embed="rId12"/>
-                      <a:stretch>
-                        <a:fillRect l="-48148" t="-10638" r="-48148" b="-12766"/>
+                        <a:fillRect l="-25641" r="-10256" b="-17778"/>
                       </a:stretch>
                     </a:blipFill>
                   </p:spPr>
@@ -10994,6 +10221,674 @@
               </mc:Fallback>
             </mc:AlternateContent>
           </p:grpSp>
+          <p:cxnSp>
+            <p:nvCxnSpPr>
+              <p:cNvPr id="34" name="Connector: Elbow 33">
+                <a:extLst>
+                  <a:ext uri="{FF2B5EF4-FFF2-40B4-BE49-F238E27FC236}">
+                    <a16:creationId xmlns:a16="http://schemas.microsoft.com/office/drawing/2014/main" id="{F9418489-351F-D735-BA8B-1B7D402D6B06}"/>
+                  </a:ext>
+                </a:extLst>
+              </p:cNvPr>
+              <p:cNvCxnSpPr>
+                <a:cxnSpLocks/>
+                <a:endCxn id="7" idx="1"/>
+              </p:cNvCxnSpPr>
+              <p:nvPr/>
+            </p:nvCxnSpPr>
+            <p:spPr>
+              <a:xfrm>
+                <a:off x="1100106" y="3016352"/>
+                <a:ext cx="449361" cy="0"/>
+              </a:xfrm>
+              <a:prstGeom prst="straightConnector1">
+                <a:avLst/>
+              </a:prstGeom>
+              <a:ln w="3175">
+                <a:solidFill>
+                  <a:schemeClr val="tx1"/>
+                </a:solidFill>
+                <a:tailEnd type="triangle"/>
+              </a:ln>
+            </p:spPr>
+            <p:style>
+              <a:lnRef idx="2">
+                <a:schemeClr val="accent1"/>
+              </a:lnRef>
+              <a:fillRef idx="0">
+                <a:schemeClr val="accent1"/>
+              </a:fillRef>
+              <a:effectRef idx="1">
+                <a:schemeClr val="accent1"/>
+              </a:effectRef>
+              <a:fontRef idx="minor">
+                <a:schemeClr val="tx1"/>
+              </a:fontRef>
+            </p:style>
+          </p:cxnSp>
+          <p:cxnSp>
+            <p:nvCxnSpPr>
+              <p:cNvPr id="75" name="Connector: Elbow 33">
+                <a:extLst>
+                  <a:ext uri="{FF2B5EF4-FFF2-40B4-BE49-F238E27FC236}">
+                    <a16:creationId xmlns:a16="http://schemas.microsoft.com/office/drawing/2014/main" id="{B595C908-766F-8487-EA76-7BE675EFA149}"/>
+                  </a:ext>
+                </a:extLst>
+              </p:cNvPr>
+              <p:cNvCxnSpPr>
+                <a:cxnSpLocks/>
+                <a:stCxn id="7" idx="3"/>
+                <a:endCxn id="23" idx="1"/>
+              </p:cNvCxnSpPr>
+              <p:nvPr/>
+            </p:nvCxnSpPr>
+            <p:spPr>
+              <a:xfrm flipV="1">
+                <a:off x="3748575" y="2586228"/>
+                <a:ext cx="517120" cy="430124"/>
+              </a:xfrm>
+              <a:prstGeom prst="bentConnector3">
+                <a:avLst>
+                  <a:gd name="adj1" fmla="val 50000"/>
+                </a:avLst>
+              </a:prstGeom>
+              <a:ln w="3175">
+                <a:solidFill>
+                  <a:schemeClr val="tx1"/>
+                </a:solidFill>
+                <a:tailEnd type="triangle"/>
+              </a:ln>
+            </p:spPr>
+            <p:style>
+              <a:lnRef idx="2">
+                <a:schemeClr val="accent1"/>
+              </a:lnRef>
+              <a:fillRef idx="0">
+                <a:schemeClr val="accent1"/>
+              </a:fillRef>
+              <a:effectRef idx="1">
+                <a:schemeClr val="accent1"/>
+              </a:effectRef>
+              <a:fontRef idx="minor">
+                <a:schemeClr val="tx1"/>
+              </a:fontRef>
+            </p:style>
+          </p:cxnSp>
+          <p:cxnSp>
+            <p:nvCxnSpPr>
+              <p:cNvPr id="80" name="Connector: Elbow 33">
+                <a:extLst>
+                  <a:ext uri="{FF2B5EF4-FFF2-40B4-BE49-F238E27FC236}">
+                    <a16:creationId xmlns:a16="http://schemas.microsoft.com/office/drawing/2014/main" id="{281610A7-FFA3-C3F2-6E56-E4B340E2B1F3}"/>
+                  </a:ext>
+                </a:extLst>
+              </p:cNvPr>
+              <p:cNvCxnSpPr>
+                <a:cxnSpLocks/>
+                <a:stCxn id="7" idx="3"/>
+                <a:endCxn id="36" idx="1"/>
+              </p:cNvCxnSpPr>
+              <p:nvPr/>
+            </p:nvCxnSpPr>
+            <p:spPr>
+              <a:xfrm>
+                <a:off x="3748575" y="3016352"/>
+                <a:ext cx="517120" cy="473902"/>
+              </a:xfrm>
+              <a:prstGeom prst="bentConnector3">
+                <a:avLst>
+                  <a:gd name="adj1" fmla="val 50000"/>
+                </a:avLst>
+              </a:prstGeom>
+              <a:ln w="3175">
+                <a:solidFill>
+                  <a:schemeClr val="tx1"/>
+                </a:solidFill>
+                <a:tailEnd type="triangle"/>
+              </a:ln>
+            </p:spPr>
+            <p:style>
+              <a:lnRef idx="2">
+                <a:schemeClr val="accent1"/>
+              </a:lnRef>
+              <a:fillRef idx="0">
+                <a:schemeClr val="accent1"/>
+              </a:fillRef>
+              <a:effectRef idx="1">
+                <a:schemeClr val="accent1"/>
+              </a:effectRef>
+              <a:fontRef idx="minor">
+                <a:schemeClr val="tx1"/>
+              </a:fontRef>
+            </p:style>
+          </p:cxnSp>
+          <p:cxnSp>
+            <p:nvCxnSpPr>
+              <p:cNvPr id="92" name="Connector: Elbow 33">
+                <a:extLst>
+                  <a:ext uri="{FF2B5EF4-FFF2-40B4-BE49-F238E27FC236}">
+                    <a16:creationId xmlns:a16="http://schemas.microsoft.com/office/drawing/2014/main" id="{7A5CED56-7687-D509-9C29-50E6FB135FA4}"/>
+                  </a:ext>
+                </a:extLst>
+              </p:cNvPr>
+              <p:cNvCxnSpPr>
+                <a:cxnSpLocks/>
+                <a:stCxn id="36" idx="3"/>
+              </p:cNvCxnSpPr>
+              <p:nvPr/>
+            </p:nvCxnSpPr>
+            <p:spPr>
+              <a:xfrm flipV="1">
+                <a:off x="5180095" y="3220538"/>
+                <a:ext cx="509965" cy="269716"/>
+              </a:xfrm>
+              <a:prstGeom prst="bentConnector3">
+                <a:avLst>
+                  <a:gd name="adj1" fmla="val 50000"/>
+                </a:avLst>
+              </a:prstGeom>
+              <a:ln w="3175">
+                <a:solidFill>
+                  <a:schemeClr val="tx1"/>
+                </a:solidFill>
+                <a:tailEnd type="triangle"/>
+              </a:ln>
+            </p:spPr>
+            <p:style>
+              <a:lnRef idx="2">
+                <a:schemeClr val="accent1"/>
+              </a:lnRef>
+              <a:fillRef idx="0">
+                <a:schemeClr val="accent1"/>
+              </a:fillRef>
+              <a:effectRef idx="1">
+                <a:schemeClr val="accent1"/>
+              </a:effectRef>
+              <a:fontRef idx="minor">
+                <a:schemeClr val="tx1"/>
+              </a:fontRef>
+            </p:style>
+          </p:cxnSp>
+          <p:cxnSp>
+            <p:nvCxnSpPr>
+              <p:cNvPr id="112" name="Connector: Elbow 33">
+                <a:extLst>
+                  <a:ext uri="{FF2B5EF4-FFF2-40B4-BE49-F238E27FC236}">
+                    <a16:creationId xmlns:a16="http://schemas.microsoft.com/office/drawing/2014/main" id="{C75A67AE-F34F-2AC3-68C8-5F8E0C523D67}"/>
+                  </a:ext>
+                </a:extLst>
+              </p:cNvPr>
+              <p:cNvCxnSpPr>
+                <a:cxnSpLocks/>
+                <a:stCxn id="10" idx="3"/>
+                <a:endCxn id="30" idx="1"/>
+              </p:cNvCxnSpPr>
+              <p:nvPr/>
+            </p:nvCxnSpPr>
+            <p:spPr>
+              <a:xfrm>
+                <a:off x="7889168" y="3034973"/>
+                <a:ext cx="517449" cy="269"/>
+              </a:xfrm>
+              <a:prstGeom prst="straightConnector1">
+                <a:avLst/>
+              </a:prstGeom>
+              <a:ln w="3175">
+                <a:solidFill>
+                  <a:schemeClr val="tx1"/>
+                </a:solidFill>
+                <a:tailEnd type="triangle"/>
+              </a:ln>
+            </p:spPr>
+            <p:style>
+              <a:lnRef idx="2">
+                <a:schemeClr val="accent1"/>
+              </a:lnRef>
+              <a:fillRef idx="0">
+                <a:schemeClr val="accent1"/>
+              </a:fillRef>
+              <a:effectRef idx="1">
+                <a:schemeClr val="accent1"/>
+              </a:effectRef>
+              <a:fontRef idx="minor">
+                <a:schemeClr val="tx1"/>
+              </a:fontRef>
+            </p:style>
+          </p:cxnSp>
+          <p:sp>
+            <p:nvSpPr>
+              <p:cNvPr id="115" name="Flowchart: Or 114">
+                <a:extLst>
+                  <a:ext uri="{FF2B5EF4-FFF2-40B4-BE49-F238E27FC236}">
+                    <a16:creationId xmlns:a16="http://schemas.microsoft.com/office/drawing/2014/main" id="{A3605BF9-16A6-9ED2-575E-07E0F6335467}"/>
+                  </a:ext>
+                </a:extLst>
+              </p:cNvPr>
+              <p:cNvSpPr/>
+              <p:nvPr/>
+            </p:nvSpPr>
+            <p:spPr>
+              <a:xfrm>
+                <a:off x="9694442" y="2896173"/>
+                <a:ext cx="274320" cy="274320"/>
+              </a:xfrm>
+              <a:prstGeom prst="flowChartOr">
+                <a:avLst/>
+              </a:prstGeom>
+              <a:noFill/>
+              <a:ln w="3175">
+                <a:solidFill>
+                  <a:schemeClr val="tx1"/>
+                </a:solidFill>
+              </a:ln>
+            </p:spPr>
+            <p:style>
+              <a:lnRef idx="2">
+                <a:schemeClr val="accent1">
+                  <a:shade val="15000"/>
+                </a:schemeClr>
+              </a:lnRef>
+              <a:fillRef idx="1">
+                <a:schemeClr val="accent1"/>
+              </a:fillRef>
+              <a:effectRef idx="0">
+                <a:schemeClr val="accent1"/>
+              </a:effectRef>
+              <a:fontRef idx="minor">
+                <a:schemeClr val="lt1"/>
+              </a:fontRef>
+            </p:style>
+            <p:txBody>
+              <a:bodyPr rtlCol="0" anchor="ctr"/>
+              <a:lstStyle/>
+              <a:p>
+                <a:pPr algn="ctr"/>
+                <a:endParaRPr lang="en-US"/>
+              </a:p>
+            </p:txBody>
+          </p:sp>
+          <p:cxnSp>
+            <p:nvCxnSpPr>
+              <p:cNvPr id="116" name="Connector: Elbow 33">
+                <a:extLst>
+                  <a:ext uri="{FF2B5EF4-FFF2-40B4-BE49-F238E27FC236}">
+                    <a16:creationId xmlns:a16="http://schemas.microsoft.com/office/drawing/2014/main" id="{357962D2-22DC-4DCB-808E-6C46D2226912}"/>
+                  </a:ext>
+                </a:extLst>
+              </p:cNvPr>
+              <p:cNvCxnSpPr>
+                <a:cxnSpLocks/>
+                <a:stCxn id="36" idx="2"/>
+                <a:endCxn id="115" idx="4"/>
+              </p:cNvCxnSpPr>
+              <p:nvPr/>
+            </p:nvCxnSpPr>
+            <p:spPr>
+              <a:xfrm rot="5400000" flipH="1" flipV="1">
+                <a:off x="6944442" y="948945"/>
+                <a:ext cx="665612" cy="5108707"/>
+              </a:xfrm>
+              <a:prstGeom prst="bentConnector3">
+                <a:avLst>
+                  <a:gd name="adj1" fmla="val -34344"/>
+                </a:avLst>
+              </a:prstGeom>
+              <a:ln w="3175">
+                <a:solidFill>
+                  <a:schemeClr val="tx1"/>
+                </a:solidFill>
+                <a:tailEnd type="triangle"/>
+              </a:ln>
+            </p:spPr>
+            <p:style>
+              <a:lnRef idx="2">
+                <a:schemeClr val="accent1"/>
+              </a:lnRef>
+              <a:fillRef idx="0">
+                <a:schemeClr val="accent1"/>
+              </a:fillRef>
+              <a:effectRef idx="1">
+                <a:schemeClr val="accent1"/>
+              </a:effectRef>
+              <a:fontRef idx="minor">
+                <a:schemeClr val="tx1"/>
+              </a:fontRef>
+            </p:style>
+          </p:cxnSp>
+          <p:cxnSp>
+            <p:nvCxnSpPr>
+              <p:cNvPr id="119" name="Connector: Elbow 33">
+                <a:extLst>
+                  <a:ext uri="{FF2B5EF4-FFF2-40B4-BE49-F238E27FC236}">
+                    <a16:creationId xmlns:a16="http://schemas.microsoft.com/office/drawing/2014/main" id="{B3DC5574-F375-9DCE-5C84-AEB3773D2812}"/>
+                  </a:ext>
+                </a:extLst>
+              </p:cNvPr>
+              <p:cNvCxnSpPr>
+                <a:cxnSpLocks/>
+                <a:stCxn id="30" idx="3"/>
+                <a:endCxn id="115" idx="2"/>
+              </p:cNvCxnSpPr>
+              <p:nvPr/>
+            </p:nvCxnSpPr>
+            <p:spPr>
+              <a:xfrm flipV="1">
+                <a:off x="9314153" y="3033333"/>
+                <a:ext cx="380289" cy="1909"/>
+              </a:xfrm>
+              <a:prstGeom prst="straightConnector1">
+                <a:avLst/>
+              </a:prstGeom>
+              <a:ln w="3175">
+                <a:solidFill>
+                  <a:schemeClr val="tx1"/>
+                </a:solidFill>
+                <a:tailEnd type="triangle"/>
+              </a:ln>
+            </p:spPr>
+            <p:style>
+              <a:lnRef idx="2">
+                <a:schemeClr val="accent1"/>
+              </a:lnRef>
+              <a:fillRef idx="0">
+                <a:schemeClr val="accent1"/>
+              </a:fillRef>
+              <a:effectRef idx="1">
+                <a:schemeClr val="accent1"/>
+              </a:effectRef>
+              <a:fontRef idx="minor">
+                <a:schemeClr val="tx1"/>
+              </a:fontRef>
+            </p:style>
+          </p:cxnSp>
+          <p:sp>
+            <p:nvSpPr>
+              <p:cNvPr id="126" name="Flowchart: Summing Junction 125">
+                <a:extLst>
+                  <a:ext uri="{FF2B5EF4-FFF2-40B4-BE49-F238E27FC236}">
+                    <a16:creationId xmlns:a16="http://schemas.microsoft.com/office/drawing/2014/main" id="{2D34BE29-15A9-6C26-90A1-40778167C81A}"/>
+                  </a:ext>
+                </a:extLst>
+              </p:cNvPr>
+              <p:cNvSpPr/>
+              <p:nvPr/>
+            </p:nvSpPr>
+            <p:spPr>
+              <a:xfrm>
+                <a:off x="10210119" y="2896387"/>
+                <a:ext cx="274320" cy="274320"/>
+              </a:xfrm>
+              <a:prstGeom prst="flowChartSummingJunction">
+                <a:avLst/>
+              </a:prstGeom>
+              <a:noFill/>
+              <a:ln w="3175">
+                <a:solidFill>
+                  <a:schemeClr val="tx1"/>
+                </a:solidFill>
+              </a:ln>
+            </p:spPr>
+            <p:style>
+              <a:lnRef idx="2">
+                <a:schemeClr val="accent1">
+                  <a:shade val="15000"/>
+                </a:schemeClr>
+              </a:lnRef>
+              <a:fillRef idx="1">
+                <a:schemeClr val="accent1"/>
+              </a:fillRef>
+              <a:effectRef idx="0">
+                <a:schemeClr val="accent1"/>
+              </a:effectRef>
+              <a:fontRef idx="minor">
+                <a:schemeClr val="lt1"/>
+              </a:fontRef>
+            </p:style>
+            <p:txBody>
+              <a:bodyPr rtlCol="0" anchor="ctr"/>
+              <a:lstStyle/>
+              <a:p>
+                <a:pPr algn="ctr"/>
+                <a:endParaRPr lang="en-US"/>
+              </a:p>
+            </p:txBody>
+          </p:sp>
+          <p:cxnSp>
+            <p:nvCxnSpPr>
+              <p:cNvPr id="128" name="Connector: Elbow 33">
+                <a:extLst>
+                  <a:ext uri="{FF2B5EF4-FFF2-40B4-BE49-F238E27FC236}">
+                    <a16:creationId xmlns:a16="http://schemas.microsoft.com/office/drawing/2014/main" id="{DED60004-EFCA-F865-BFA0-D03485F7B0BC}"/>
+                  </a:ext>
+                </a:extLst>
+              </p:cNvPr>
+              <p:cNvCxnSpPr>
+                <a:cxnSpLocks/>
+                <a:stCxn id="115" idx="6"/>
+                <a:endCxn id="126" idx="2"/>
+              </p:cNvCxnSpPr>
+              <p:nvPr/>
+            </p:nvCxnSpPr>
+            <p:spPr>
+              <a:xfrm>
+                <a:off x="9968762" y="3033333"/>
+                <a:ext cx="241357" cy="214"/>
+              </a:xfrm>
+              <a:prstGeom prst="straightConnector1">
+                <a:avLst/>
+              </a:prstGeom>
+              <a:ln w="3175">
+                <a:solidFill>
+                  <a:schemeClr val="tx1"/>
+                </a:solidFill>
+                <a:tailEnd type="triangle"/>
+              </a:ln>
+            </p:spPr>
+            <p:style>
+              <a:lnRef idx="2">
+                <a:schemeClr val="accent1"/>
+              </a:lnRef>
+              <a:fillRef idx="0">
+                <a:schemeClr val="accent1"/>
+              </a:fillRef>
+              <a:effectRef idx="1">
+                <a:schemeClr val="accent1"/>
+              </a:effectRef>
+              <a:fontRef idx="minor">
+                <a:schemeClr val="tx1"/>
+              </a:fontRef>
+            </p:style>
+          </p:cxnSp>
+          <p:cxnSp>
+            <p:nvCxnSpPr>
+              <p:cNvPr id="131" name="Connector: Elbow 33">
+                <a:extLst>
+                  <a:ext uri="{FF2B5EF4-FFF2-40B4-BE49-F238E27FC236}">
+                    <a16:creationId xmlns:a16="http://schemas.microsoft.com/office/drawing/2014/main" id="{293454F4-CEB9-D718-595E-1611BAB8AF13}"/>
+                  </a:ext>
+                </a:extLst>
+              </p:cNvPr>
+              <p:cNvCxnSpPr>
+                <a:cxnSpLocks/>
+                <a:stCxn id="18" idx="0"/>
+                <a:endCxn id="126" idx="0"/>
+              </p:cNvCxnSpPr>
+              <p:nvPr/>
+            </p:nvCxnSpPr>
+            <p:spPr>
+              <a:xfrm rot="16200000" flipH="1">
+                <a:off x="7194298" y="-256594"/>
+                <a:ext cx="813816" cy="5492146"/>
+              </a:xfrm>
+              <a:prstGeom prst="bentConnector3">
+                <a:avLst>
+                  <a:gd name="adj1" fmla="val -28090"/>
+                </a:avLst>
+              </a:prstGeom>
+              <a:ln w="3175">
+                <a:solidFill>
+                  <a:schemeClr val="tx1"/>
+                </a:solidFill>
+                <a:tailEnd type="triangle"/>
+              </a:ln>
+            </p:spPr>
+            <p:style>
+              <a:lnRef idx="2">
+                <a:schemeClr val="accent1"/>
+              </a:lnRef>
+              <a:fillRef idx="0">
+                <a:schemeClr val="accent1"/>
+              </a:fillRef>
+              <a:effectRef idx="1">
+                <a:schemeClr val="accent1"/>
+              </a:effectRef>
+              <a:fontRef idx="minor">
+                <a:schemeClr val="tx1"/>
+              </a:fontRef>
+            </p:style>
+          </p:cxnSp>
+          <p:cxnSp>
+            <p:nvCxnSpPr>
+              <p:cNvPr id="142" name="Connector: Elbow 33">
+                <a:extLst>
+                  <a:ext uri="{FF2B5EF4-FFF2-40B4-BE49-F238E27FC236}">
+                    <a16:creationId xmlns:a16="http://schemas.microsoft.com/office/drawing/2014/main" id="{B86528C2-7262-7E37-3A8B-342BDA13490F}"/>
+                  </a:ext>
+                </a:extLst>
+              </p:cNvPr>
+              <p:cNvCxnSpPr>
+                <a:cxnSpLocks/>
+                <a:stCxn id="126" idx="6"/>
+                <a:endCxn id="15" idx="1"/>
+              </p:cNvCxnSpPr>
+              <p:nvPr/>
+            </p:nvCxnSpPr>
+            <p:spPr>
+              <a:xfrm flipV="1">
+                <a:off x="10484439" y="3030967"/>
+                <a:ext cx="426705" cy="2580"/>
+              </a:xfrm>
+              <a:prstGeom prst="straightConnector1">
+                <a:avLst/>
+              </a:prstGeom>
+              <a:ln w="3175">
+                <a:solidFill>
+                  <a:schemeClr val="tx1"/>
+                </a:solidFill>
+                <a:tailEnd type="triangle"/>
+              </a:ln>
+            </p:spPr>
+            <p:style>
+              <a:lnRef idx="2">
+                <a:schemeClr val="accent1"/>
+              </a:lnRef>
+              <a:fillRef idx="0">
+                <a:schemeClr val="accent1"/>
+              </a:fillRef>
+              <a:effectRef idx="1">
+                <a:schemeClr val="accent1"/>
+              </a:effectRef>
+              <a:fontRef idx="minor">
+                <a:schemeClr val="tx1"/>
+              </a:fontRef>
+            </p:style>
+          </p:cxnSp>
+          <mc:AlternateContent xmlns:mc="http://schemas.openxmlformats.org/markup-compatibility/2006">
+            <mc:Choice xmlns:a14="http://schemas.microsoft.com/office/drawing/2010/main" Requires="a14">
+              <p:sp>
+                <p:nvSpPr>
+                  <p:cNvPr id="145" name="TextBox 144">
+                    <a:extLst>
+                      <a:ext uri="{FF2B5EF4-FFF2-40B4-BE49-F238E27FC236}">
+                        <a16:creationId xmlns:a16="http://schemas.microsoft.com/office/drawing/2014/main" id="{F4063461-85E7-E8DE-745A-7B58532C5F23}"/>
+                      </a:ext>
+                    </a:extLst>
+                  </p:cNvPr>
+                  <p:cNvSpPr txBox="1"/>
+                  <p:nvPr/>
+                </p:nvSpPr>
+                <p:spPr>
+                  <a:xfrm>
+                    <a:off x="11368344" y="2203759"/>
+                    <a:ext cx="160300" cy="285719"/>
+                  </a:xfrm>
+                  <a:prstGeom prst="rect">
+                    <a:avLst/>
+                  </a:prstGeom>
+                  <a:noFill/>
+                </p:spPr>
+                <p:txBody>
+                  <a:bodyPr wrap="none" lIns="0" tIns="0" rIns="0" bIns="0" rtlCol="0">
+                    <a:spAutoFit/>
+                  </a:bodyPr>
+                  <a:lstStyle/>
+                  <a:p>
+                    <a:pPr/>
+                    <a14:m>
+                      <m:oMathPara xmlns:m="http://schemas.openxmlformats.org/officeDocument/2006/math">
+                        <m:oMathParaPr>
+                          <m:jc m:val="centerGroup"/>
+                        </m:oMathParaPr>
+                        <m:oMath xmlns:m="http://schemas.openxmlformats.org/officeDocument/2006/math">
+                          <m:r>
+                            <a:rPr lang="en-US" b="0" i="1" smtClean="0">
+                              <a:latin typeface="Cambria Math" panose="02040503050406030204" pitchFamily="18" charset="0"/>
+                            </a:rPr>
+                            <m:t>Ŝ</m:t>
+                          </m:r>
+                        </m:oMath>
+                      </m:oMathPara>
+                    </a14:m>
+                    <a:endParaRPr lang="en-US" dirty="0"/>
+                  </a:p>
+                </p:txBody>
+              </p:sp>
+            </mc:Choice>
+            <mc:Fallback>
+              <p:sp>
+                <p:nvSpPr>
+                  <p:cNvPr id="145" name="TextBox 144">
+                    <a:extLst>
+                      <a:ext uri="{FF2B5EF4-FFF2-40B4-BE49-F238E27FC236}">
+                        <a16:creationId xmlns:a16="http://schemas.microsoft.com/office/drawing/2014/main" id="{F4063461-85E7-E8DE-745A-7B58532C5F23}"/>
+                      </a:ext>
+                    </a:extLst>
+                  </p:cNvPr>
+                  <p:cNvSpPr txBox="1">
+                    <a:spLocks noRot="1" noChangeAspect="1" noMove="1" noResize="1" noEditPoints="1" noAdjustHandles="1" noChangeArrowheads="1" noChangeShapeType="1" noTextEdit="1"/>
+                  </p:cNvSpPr>
+                  <p:nvPr/>
+                </p:nvSpPr>
+                <p:spPr>
+                  <a:xfrm>
+                    <a:off x="11368344" y="2203759"/>
+                    <a:ext cx="160300" cy="285719"/>
+                  </a:xfrm>
+                  <a:prstGeom prst="rect">
+                    <a:avLst/>
+                  </a:prstGeom>
+                  <a:blipFill>
+                    <a:blip r:embed="rId12"/>
+                    <a:stretch>
+                      <a:fillRect l="-50000" t="-13043" r="-53846" b="-15217"/>
+                    </a:stretch>
+                  </a:blipFill>
+                </p:spPr>
+                <p:txBody>
+                  <a:bodyPr/>
+                  <a:lstStyle/>
+                  <a:p>
+                    <a:r>
+                      <a:rPr lang="en-US">
+                        <a:noFill/>
+                      </a:rPr>
+                      <a:t> </a:t>
+                    </a:r>
+                  </a:p>
+                </p:txBody>
+              </p:sp>
+            </mc:Fallback>
+          </mc:AlternateContent>
         </p:grpSp>
         <p:grpSp>
           <p:nvGrpSpPr>
@@ -11075,8 +10970,8 @@
               </a:prstGeom>
             </p:spPr>
           </p:pic>
-          <mc:AlternateContent xmlns:mc="http://schemas.openxmlformats.org/markup-compatibility/2006">
-            <mc:Choice xmlns:a14="http://schemas.microsoft.com/office/drawing/2010/main" Requires="a14">
+          <mc:AlternateContent xmlns:mc="http://schemas.openxmlformats.org/markup-compatibility/2006" xmlns:a14="http://schemas.microsoft.com/office/drawing/2010/main">
+            <mc:Choice Requires="a14">
               <p:sp>
                 <p:nvSpPr>
                   <p:cNvPr id="9" name="TextBox 8">
@@ -11126,7 +11021,7 @@
                 </p:txBody>
               </p:sp>
             </mc:Choice>
-            <mc:Fallback>
+            <mc:Fallback xmlns="">
               <p:sp>
                 <p:nvSpPr>
                   <p:cNvPr id="9" name="TextBox 8">
@@ -11362,48 +11257,114 @@
             </a:prstGeom>
           </p:spPr>
         </p:pic>
-        <p:pic>
-          <p:nvPicPr>
-            <p:cNvPr id="41" name="Picture 40">
+        <p:grpSp>
+          <p:nvGrpSpPr>
+            <p:cNvPr id="21" name="Group 20">
               <a:extLst>
                 <a:ext uri="{FF2B5EF4-FFF2-40B4-BE49-F238E27FC236}">
-                  <a16:creationId xmlns:a16="http://schemas.microsoft.com/office/drawing/2014/main" id="{7B4332E0-535D-75EB-6077-FA6B9994BAE0}"/>
+                  <a16:creationId xmlns:a16="http://schemas.microsoft.com/office/drawing/2014/main" id="{1C8B84D3-295F-5E89-614A-E3B42C3425CD}"/>
                 </a:ext>
               </a:extLst>
             </p:cNvPr>
-            <p:cNvPicPr>
-              <a:picLocks noChangeAspect="1"/>
-            </p:cNvPicPr>
+            <p:cNvGrpSpPr/>
             <p:nvPr/>
-          </p:nvPicPr>
-          <p:blipFill>
-            <a:blip r:embed="rId2">
-              <a:extLst>
-                <a:ext uri="{BEBA8EAE-BF5A-486C-A8C5-ECC9F3942E4B}">
-                  <a14:imgProps xmlns:a14="http://schemas.microsoft.com/office/drawing/2010/main">
-                    <a14:imgLayer r:embed="rId3">
-                      <a14:imgEffect>
-                        <a14:brightnessContrast bright="30000" contrast="20000"/>
-                      </a14:imgEffect>
-                    </a14:imgLayer>
-                  </a14:imgProps>
-                </a:ext>
-              </a:extLst>
-            </a:blip>
-            <a:stretch>
-              <a:fillRect/>
-            </a:stretch>
-          </p:blipFill>
-          <p:spPr>
+          </p:nvGrpSpPr>
+          <p:grpSpPr>
             <a:xfrm>
-              <a:off x="10864728" y="2683943"/>
-              <a:ext cx="907536" cy="694944"/>
+              <a:off x="10911144" y="2528739"/>
+              <a:ext cx="1059020" cy="846346"/>
+              <a:chOff x="10911144" y="2511594"/>
+              <a:chExt cx="1059020" cy="846346"/>
             </a:xfrm>
-            <a:prstGeom prst="rect">
-              <a:avLst/>
-            </a:prstGeom>
-          </p:spPr>
-        </p:pic>
+          </p:grpSpPr>
+          <p:pic>
+            <p:nvPicPr>
+              <p:cNvPr id="13" name="Picture 12">
+                <a:extLst>
+                  <a:ext uri="{FF2B5EF4-FFF2-40B4-BE49-F238E27FC236}">
+                    <a16:creationId xmlns:a16="http://schemas.microsoft.com/office/drawing/2014/main" id="{AA6D6E2A-3DB6-7F77-BF25-E573DE044176}"/>
+                  </a:ext>
+                </a:extLst>
+              </p:cNvPr>
+              <p:cNvPicPr>
+                <a:picLocks noChangeAspect="1"/>
+              </p:cNvPicPr>
+              <p:nvPr/>
+            </p:nvPicPr>
+            <p:blipFill>
+              <a:blip r:embed="rId18"/>
+              <a:srcRect l="616" t="1379" r="1103" b="1509"/>
+              <a:stretch/>
+            </p:blipFill>
+            <p:spPr>
+              <a:xfrm>
+                <a:off x="11055764" y="2511594"/>
+                <a:ext cx="914400" cy="688236"/>
+              </a:xfrm>
+              <a:prstGeom prst="rect">
+                <a:avLst/>
+              </a:prstGeom>
+            </p:spPr>
+          </p:pic>
+          <p:pic>
+            <p:nvPicPr>
+              <p:cNvPr id="14" name="Picture 13">
+                <a:extLst>
+                  <a:ext uri="{FF2B5EF4-FFF2-40B4-BE49-F238E27FC236}">
+                    <a16:creationId xmlns:a16="http://schemas.microsoft.com/office/drawing/2014/main" id="{76BF9452-53DB-E685-EE4D-D2E110E4E889}"/>
+                  </a:ext>
+                </a:extLst>
+              </p:cNvPr>
+              <p:cNvPicPr>
+                <a:picLocks noChangeAspect="1"/>
+              </p:cNvPicPr>
+              <p:nvPr/>
+            </p:nvPicPr>
+            <p:blipFill>
+              <a:blip r:embed="rId18"/>
+              <a:srcRect l="616" t="1379" r="1103" b="1509"/>
+              <a:stretch/>
+            </p:blipFill>
+            <p:spPr>
+              <a:xfrm>
+                <a:off x="10983454" y="2591794"/>
+                <a:ext cx="914400" cy="688236"/>
+              </a:xfrm>
+              <a:prstGeom prst="rect">
+                <a:avLst/>
+              </a:prstGeom>
+            </p:spPr>
+          </p:pic>
+          <p:pic>
+            <p:nvPicPr>
+              <p:cNvPr id="15" name="Picture 14">
+                <a:extLst>
+                  <a:ext uri="{FF2B5EF4-FFF2-40B4-BE49-F238E27FC236}">
+                    <a16:creationId xmlns:a16="http://schemas.microsoft.com/office/drawing/2014/main" id="{25A65DFD-1C18-5B08-AF04-338EEA1675D2}"/>
+                  </a:ext>
+                </a:extLst>
+              </p:cNvPr>
+              <p:cNvPicPr>
+                <a:picLocks noChangeAspect="1"/>
+              </p:cNvPicPr>
+              <p:nvPr/>
+            </p:nvPicPr>
+            <p:blipFill>
+              <a:blip r:embed="rId18"/>
+              <a:srcRect l="616" t="1379" r="1103" b="1509"/>
+              <a:stretch/>
+            </p:blipFill>
+            <p:spPr>
+              <a:xfrm>
+                <a:off x="10911144" y="2669704"/>
+                <a:ext cx="914400" cy="688236"/>
+              </a:xfrm>
+              <a:prstGeom prst="rect">
+                <a:avLst/>
+              </a:prstGeom>
+            </p:spPr>
+          </p:pic>
+        </p:grpSp>
       </p:grpSp>
     </p:spTree>
     <p:extLst>
@@ -11734,21 +11695,6 @@
 </file>
 
 <file path=customXml/item1.xml><?xml version="1.0" encoding="utf-8"?>
-<p:properties xmlns:p="http://schemas.microsoft.com/office/2006/metadata/properties" xmlns:xsi="http://www.w3.org/2001/XMLSchema-instance" xmlns:pc="http://schemas.microsoft.com/office/infopath/2007/PartnerControls">
-  <documentManagement/>
-</p:properties>
-</file>
-
-<file path=customXml/item2.xml><?xml version="1.0" encoding="utf-8"?>
-<?mso-contentType ?>
-<FormTemplates xmlns="http://schemas.microsoft.com/sharepoint/v3/contenttype/forms">
-  <Display>DocumentLibraryForm</Display>
-  <Edit>DocumentLibraryForm</Edit>
-  <New>DocumentLibraryForm</New>
-</FormTemplates>
-</file>
-
-<file path=customXml/item3.xml><?xml version="1.0" encoding="utf-8"?>
 <ct:contentTypeSchema xmlns:ct="http://schemas.microsoft.com/office/2006/metadata/contentType" xmlns:ma="http://schemas.microsoft.com/office/2006/metadata/properties/metaAttributes" ct:_="" ma:_="" ma:contentTypeName="Belge" ma:contentTypeID="0x010100D65531C721006442AFE33DD3F61FB1F9" ma:contentTypeVersion="5" ma:contentTypeDescription="Yeni belge oluşturun." ma:contentTypeScope="" ma:versionID="ea0e0445bf190cd714c4bb3f591f0919">
   <xsd:schema xmlns:xsd="http://www.w3.org/2001/XMLSchema" xmlns:xs="http://www.w3.org/2001/XMLSchema" xmlns:p="http://schemas.microsoft.com/office/2006/metadata/properties" xmlns:ns3="311a3ffc-e206-4322-bfa4-4d4db0bffdba" targetNamespace="http://schemas.microsoft.com/office/2006/metadata/properties" ma:root="true" ma:fieldsID="1bcbfb1ed5d1d507abe322899e6e78cc" ns3:_="">
     <xsd:import namespace="311a3ffc-e206-4322-bfa4-4d4db0bffdba"/>
@@ -11898,31 +11844,22 @@
 </ct:contentTypeSchema>
 </file>
 
-<file path=customXml/itemProps1.xml><?xml version="1.0" encoding="utf-8"?>
-<ds:datastoreItem xmlns:ds="http://schemas.openxmlformats.org/officeDocument/2006/customXml" ds:itemID="{D6A00702-DDFE-4F00-B51E-B21B70BB5E18}">
-  <ds:schemaRefs>
-    <ds:schemaRef ds:uri="http://purl.org/dc/terms/"/>
-    <ds:schemaRef ds:uri="http://purl.org/dc/dcmitype/"/>
-    <ds:schemaRef ds:uri="http://schemas.microsoft.com/office/2006/documentManagement/types"/>
-    <ds:schemaRef ds:uri="http://schemas.openxmlformats.org/package/2006/metadata/core-properties"/>
-    <ds:schemaRef ds:uri="http://schemas.microsoft.com/office/2006/metadata/properties"/>
-    <ds:schemaRef ds:uri="http://schemas.microsoft.com/office/infopath/2007/PartnerControls"/>
-    <ds:schemaRef ds:uri="http://www.w3.org/XML/1998/namespace"/>
-    <ds:schemaRef ds:uri="http://purl.org/dc/elements/1.1/"/>
-    <ds:schemaRef ds:uri="311a3ffc-e206-4322-bfa4-4d4db0bffdba"/>
-  </ds:schemaRefs>
-</ds:datastoreItem>
+<file path=customXml/item2.xml><?xml version="1.0" encoding="utf-8"?>
+<?mso-contentType ?>
+<FormTemplates xmlns="http://schemas.microsoft.com/sharepoint/v3/contenttype/forms">
+  <Display>DocumentLibraryForm</Display>
+  <Edit>DocumentLibraryForm</Edit>
+  <New>DocumentLibraryForm</New>
+</FormTemplates>
 </file>
 
-<file path=customXml/itemProps2.xml><?xml version="1.0" encoding="utf-8"?>
-<ds:datastoreItem xmlns:ds="http://schemas.openxmlformats.org/officeDocument/2006/customXml" ds:itemID="{A1ABC223-37B2-4DDA-95DF-458CBE5A7C72}">
-  <ds:schemaRefs>
-    <ds:schemaRef ds:uri="http://schemas.microsoft.com/sharepoint/v3/contenttype/forms"/>
-  </ds:schemaRefs>
-</ds:datastoreItem>
+<file path=customXml/item3.xml><?xml version="1.0" encoding="utf-8"?>
+<p:properties xmlns:p="http://schemas.microsoft.com/office/2006/metadata/properties" xmlns:xsi="http://www.w3.org/2001/XMLSchema-instance" xmlns:pc="http://schemas.microsoft.com/office/infopath/2007/PartnerControls">
+  <documentManagement/>
+</p:properties>
 </file>
 
-<file path=customXml/itemProps3.xml><?xml version="1.0" encoding="utf-8"?>
+<file path=customXml/itemProps1.xml><?xml version="1.0" encoding="utf-8"?>
 <ds:datastoreItem xmlns:ds="http://schemas.openxmlformats.org/officeDocument/2006/customXml" ds:itemID="{CB30C552-EBCB-4B68-A116-FC1494D5A3FD}">
   <ds:schemaRefs>
     <ds:schemaRef ds:uri="http://schemas.microsoft.com/office/2006/metadata/contentType"/>
@@ -11938,4 +11875,28 @@
     <ds:schemaRef ds:uri="http://schemas.microsoft.com/internal/obd"/>
   </ds:schemaRefs>
 </ds:datastoreItem>
+</file>
+
+<file path=customXml/itemProps2.xml><?xml version="1.0" encoding="utf-8"?>
+<ds:datastoreItem xmlns:ds="http://schemas.openxmlformats.org/officeDocument/2006/customXml" ds:itemID="{A1ABC223-37B2-4DDA-95DF-458CBE5A7C72}">
+  <ds:schemaRefs>
+    <ds:schemaRef ds:uri="http://schemas.microsoft.com/sharepoint/v3/contenttype/forms"/>
+  </ds:schemaRefs>
+</ds:datastoreItem>
+</file>
+
+<file path=customXml/itemProps3.xml><?xml version="1.0" encoding="utf-8"?>
+<ds:datastoreItem xmlns:ds="http://schemas.openxmlformats.org/officeDocument/2006/customXml" ds:itemID="{D6A00702-DDFE-4F00-B51E-B21B70BB5E18}">
+  <ds:schemaRefs>
+    <ds:schemaRef ds:uri="http://purl.org/dc/terms/"/>
+    <ds:schemaRef ds:uri="http://purl.org/dc/dcmitype/"/>
+    <ds:schemaRef ds:uri="http://schemas.microsoft.com/office/2006/documentManagement/types"/>
+    <ds:schemaRef ds:uri="http://schemas.openxmlformats.org/package/2006/metadata/core-properties"/>
+    <ds:schemaRef ds:uri="http://schemas.microsoft.com/office/2006/metadata/properties"/>
+    <ds:schemaRef ds:uri="http://schemas.microsoft.com/office/infopath/2007/PartnerControls"/>
+    <ds:schemaRef ds:uri="http://www.w3.org/XML/1998/namespace"/>
+    <ds:schemaRef ds:uri="http://purl.org/dc/elements/1.1/"/>
+    <ds:schemaRef ds:uri="311a3ffc-e206-4322-bfa4-4d4db0bffdba"/>
+  </ds:schemaRefs>
+</ds:datastoreItem>
 </file>
--- a/network.pptx
+++ b/network.pptx
@@ -8,6 +8,7 @@
     <p:sldId id="256" r:id="rId5"/>
     <p:sldId id="257" r:id="rId6"/>
     <p:sldId id="258" r:id="rId7"/>
+    <p:sldId id="259" r:id="rId8"/>
   </p:sldIdLst>
   <p:sldSz cx="12192000" cy="6858000"/>
   <p:notesSz cx="6858000" cy="9144000"/>
@@ -261,7 +262,7 @@
           <a:p>
             <a:fld id="{75D70393-DF08-4715-BB1D-4361A5C8FF0F}" type="datetimeFigureOut">
               <a:rPr lang="en-US" smtClean="0"/>
-              <a:t>26/4/2025</a:t>
+              <a:t>10/6/2025</a:t>
             </a:fld>
             <a:endParaRPr lang="en-US"/>
           </a:p>
@@ -459,7 +460,7 @@
           <a:p>
             <a:fld id="{75D70393-DF08-4715-BB1D-4361A5C8FF0F}" type="datetimeFigureOut">
               <a:rPr lang="en-US" smtClean="0"/>
-              <a:t>26/4/2025</a:t>
+              <a:t>10/6/2025</a:t>
             </a:fld>
             <a:endParaRPr lang="en-US"/>
           </a:p>
@@ -667,7 +668,7 @@
           <a:p>
             <a:fld id="{75D70393-DF08-4715-BB1D-4361A5C8FF0F}" type="datetimeFigureOut">
               <a:rPr lang="en-US" smtClean="0"/>
-              <a:t>26/4/2025</a:t>
+              <a:t>10/6/2025</a:t>
             </a:fld>
             <a:endParaRPr lang="en-US"/>
           </a:p>
@@ -865,7 +866,7 @@
           <a:p>
             <a:fld id="{75D70393-DF08-4715-BB1D-4361A5C8FF0F}" type="datetimeFigureOut">
               <a:rPr lang="en-US" smtClean="0"/>
-              <a:t>26/4/2025</a:t>
+              <a:t>10/6/2025</a:t>
             </a:fld>
             <a:endParaRPr lang="en-US"/>
           </a:p>
@@ -1140,7 +1141,7 @@
           <a:p>
             <a:fld id="{75D70393-DF08-4715-BB1D-4361A5C8FF0F}" type="datetimeFigureOut">
               <a:rPr lang="en-US" smtClean="0"/>
-              <a:t>26/4/2025</a:t>
+              <a:t>10/6/2025</a:t>
             </a:fld>
             <a:endParaRPr lang="en-US"/>
           </a:p>
@@ -1405,7 +1406,7 @@
           <a:p>
             <a:fld id="{75D70393-DF08-4715-BB1D-4361A5C8FF0F}" type="datetimeFigureOut">
               <a:rPr lang="en-US" smtClean="0"/>
-              <a:t>26/4/2025</a:t>
+              <a:t>10/6/2025</a:t>
             </a:fld>
             <a:endParaRPr lang="en-US"/>
           </a:p>
@@ -1817,7 +1818,7 @@
           <a:p>
             <a:fld id="{75D70393-DF08-4715-BB1D-4361A5C8FF0F}" type="datetimeFigureOut">
               <a:rPr lang="en-US" smtClean="0"/>
-              <a:t>26/4/2025</a:t>
+              <a:t>10/6/2025</a:t>
             </a:fld>
             <a:endParaRPr lang="en-US"/>
           </a:p>
@@ -1958,7 +1959,7 @@
           <a:p>
             <a:fld id="{75D70393-DF08-4715-BB1D-4361A5C8FF0F}" type="datetimeFigureOut">
               <a:rPr lang="en-US" smtClean="0"/>
-              <a:t>26/4/2025</a:t>
+              <a:t>10/6/2025</a:t>
             </a:fld>
             <a:endParaRPr lang="en-US"/>
           </a:p>
@@ -2071,7 +2072,7 @@
           <a:p>
             <a:fld id="{75D70393-DF08-4715-BB1D-4361A5C8FF0F}" type="datetimeFigureOut">
               <a:rPr lang="en-US" smtClean="0"/>
-              <a:t>26/4/2025</a:t>
+              <a:t>10/6/2025</a:t>
             </a:fld>
             <a:endParaRPr lang="en-US"/>
           </a:p>
@@ -2382,7 +2383,7 @@
           <a:p>
             <a:fld id="{75D70393-DF08-4715-BB1D-4361A5C8FF0F}" type="datetimeFigureOut">
               <a:rPr lang="en-US" smtClean="0"/>
-              <a:t>26/4/2025</a:t>
+              <a:t>10/6/2025</a:t>
             </a:fld>
             <a:endParaRPr lang="en-US"/>
           </a:p>
@@ -2670,7 +2671,7 @@
           <a:p>
             <a:fld id="{75D70393-DF08-4715-BB1D-4361A5C8FF0F}" type="datetimeFigureOut">
               <a:rPr lang="en-US" smtClean="0"/>
-              <a:t>26/4/2025</a:t>
+              <a:t>10/6/2025</a:t>
             </a:fld>
             <a:endParaRPr lang="en-US"/>
           </a:p>
@@ -2911,7 +2912,7 @@
           <a:p>
             <a:fld id="{75D70393-DF08-4715-BB1D-4361A5C8FF0F}" type="datetimeFigureOut">
               <a:rPr lang="en-US" smtClean="0"/>
-              <a:t>26/4/2025</a:t>
+              <a:t>10/6/2025</a:t>
             </a:fld>
             <a:endParaRPr lang="en-US"/>
           </a:p>
@@ -3342,10 +3343,10 @@
         </p:nvGrpSpPr>
         <p:grpSpPr>
           <a:xfrm>
-            <a:off x="603356" y="1116755"/>
-            <a:ext cx="10094516" cy="4191219"/>
-            <a:chOff x="603356" y="1116755"/>
-            <a:chExt cx="10094516" cy="4191219"/>
+            <a:off x="603356" y="932525"/>
+            <a:ext cx="10094516" cy="4375449"/>
+            <a:chOff x="603356" y="932525"/>
+            <a:chExt cx="10094516" cy="4375449"/>
           </a:xfrm>
         </p:grpSpPr>
         <p:cxnSp>
@@ -3412,8 +3413,8 @@
           </p:nvCxnSpPr>
           <p:spPr>
             <a:xfrm flipV="1">
-              <a:off x="3576809" y="2570691"/>
-              <a:ext cx="270637" cy="4892"/>
+              <a:off x="3618846" y="2570691"/>
+              <a:ext cx="228600" cy="4892"/>
             </a:xfrm>
             <a:prstGeom prst="straightConnector1">
               <a:avLst/>
@@ -3458,8 +3459,8 @@
           </p:nvCxnSpPr>
           <p:spPr>
             <a:xfrm>
-              <a:off x="4327959" y="2570691"/>
-              <a:ext cx="272464" cy="0"/>
+              <a:off x="4375227" y="2570691"/>
+              <a:ext cx="225196" cy="0"/>
             </a:xfrm>
             <a:prstGeom prst="straightConnector1">
               <a:avLst/>
@@ -3504,8 +3505,8 @@
           </p:nvCxnSpPr>
           <p:spPr>
             <a:xfrm>
-              <a:off x="5080936" y="2570691"/>
-              <a:ext cx="269941" cy="3032"/>
+              <a:off x="5113769" y="2570691"/>
+              <a:ext cx="237108" cy="3032"/>
             </a:xfrm>
             <a:prstGeom prst="straightConnector1">
               <a:avLst/>
@@ -3596,8 +3597,8 @@
           </p:nvCxnSpPr>
           <p:spPr>
             <a:xfrm flipV="1">
-              <a:off x="7090405" y="2567778"/>
-              <a:ext cx="266659" cy="2913"/>
+              <a:off x="7150053" y="2567778"/>
+              <a:ext cx="207011" cy="2913"/>
             </a:xfrm>
             <a:prstGeom prst="straightConnector1">
               <a:avLst/>
@@ -3642,8 +3643,8 @@
           </p:nvCxnSpPr>
           <p:spPr>
             <a:xfrm flipV="1">
-              <a:off x="2957998" y="3127118"/>
-              <a:ext cx="4513366" cy="1458480"/>
+              <a:off x="3010787" y="3127118"/>
+              <a:ext cx="4460577" cy="1458480"/>
             </a:xfrm>
             <a:prstGeom prst="bentConnector2">
               <a:avLst/>
@@ -3781,8 +3782,8 @@
           </p:nvCxnSpPr>
           <p:spPr>
             <a:xfrm>
-              <a:off x="5831390" y="2573723"/>
-              <a:ext cx="273976" cy="1508"/>
+              <a:off x="5918399" y="2573723"/>
+              <a:ext cx="186967" cy="1508"/>
             </a:xfrm>
             <a:prstGeom prst="straightConnector1">
               <a:avLst/>
@@ -3827,8 +3828,8 @@
           </p:nvCxnSpPr>
           <p:spPr>
             <a:xfrm rot="16200000" flipH="1">
-              <a:off x="4763799" y="560023"/>
-              <a:ext cx="162683" cy="2749050"/>
+              <a:off x="4774308" y="570532"/>
+              <a:ext cx="162683" cy="2728032"/>
             </a:xfrm>
             <a:prstGeom prst="bentConnector3">
               <a:avLst>
@@ -3876,8 +3877,8 @@
           </p:nvCxnSpPr>
           <p:spPr>
             <a:xfrm flipV="1">
-              <a:off x="8864473" y="2025975"/>
-              <a:ext cx="786761" cy="539001"/>
+              <a:off x="8954432" y="2025975"/>
+              <a:ext cx="696802" cy="539001"/>
             </a:xfrm>
             <a:prstGeom prst="bentConnector3">
               <a:avLst>
@@ -3924,8 +3925,8 @@
           </p:nvCxnSpPr>
           <p:spPr>
             <a:xfrm>
-              <a:off x="8864473" y="2564976"/>
-              <a:ext cx="789721" cy="572880"/>
+              <a:off x="8954432" y="2564976"/>
+              <a:ext cx="699762" cy="572880"/>
             </a:xfrm>
             <a:prstGeom prst="bentConnector3">
               <a:avLst>
@@ -4104,14 +4105,14 @@
             <a:p>
               <a:pPr algn="ctr"/>
               <a:r>
-                <a:rPr lang="en-US" sz="1400" dirty="0" err="1">
+                <a:rPr lang="en-US" sz="2200" dirty="0" err="1">
                   <a:solidFill>
                     <a:schemeClr val="tx1"/>
                   </a:solidFill>
                 </a:rPr>
                 <a:t>Concat</a:t>
               </a:r>
-              <a:endParaRPr lang="en-US" sz="1400" dirty="0">
+              <a:endParaRPr lang="en-US" sz="2200" dirty="0">
                 <a:solidFill>
                   <a:schemeClr val="tx1"/>
                 </a:solidFill>
@@ -4173,14 +4174,14 @@
             <a:p>
               <a:pPr algn="ctr"/>
               <a:r>
-                <a:rPr lang="en-US" sz="1400" dirty="0" err="1">
+                <a:rPr lang="en-US" sz="2200" dirty="0" err="1">
                   <a:solidFill>
                     <a:schemeClr val="tx1"/>
                   </a:solidFill>
                 </a:rPr>
                 <a:t>Concat</a:t>
               </a:r>
-              <a:endParaRPr lang="en-US" sz="1400" dirty="0">
+              <a:endParaRPr lang="en-US" sz="2200" dirty="0">
                 <a:solidFill>
                   <a:schemeClr val="tx1"/>
                 </a:solidFill>
@@ -4203,9 +4204,9 @@
           <p:grpSpPr>
             <a:xfrm>
               <a:off x="2477485" y="3863222"/>
-              <a:ext cx="480513" cy="1444752"/>
+              <a:ext cx="533302" cy="1444752"/>
               <a:chOff x="1698322" y="4729723"/>
-              <a:chExt cx="480513" cy="897246"/>
+              <a:chExt cx="533302" cy="897246"/>
             </a:xfrm>
           </p:grpSpPr>
           <p:sp>
@@ -4262,7 +4263,7 @@
               <a:p>
                 <a:pPr algn="ctr"/>
                 <a:r>
-                  <a:rPr lang="en-US" sz="1600" dirty="0">
+                  <a:rPr lang="en-US" sz="2400" dirty="0">
                     <a:solidFill>
                       <a:schemeClr val="tx1"/>
                     </a:solidFill>
@@ -4287,7 +4288,7 @@
             <p:spPr>
               <a:xfrm>
                 <a:off x="1966448" y="4729723"/>
-                <a:ext cx="212387" cy="897246"/>
+                <a:ext cx="265176" cy="897246"/>
               </a:xfrm>
               <a:prstGeom prst="rect">
                 <a:avLst/>
@@ -4323,7 +4324,7 @@
               <a:p>
                 <a:pPr algn="ctr"/>
                 <a:r>
-                  <a:rPr lang="en-US" sz="1400" dirty="0">
+                  <a:rPr lang="en-US" sz="2300" dirty="0">
                     <a:solidFill>
                       <a:schemeClr val="tx1"/>
                     </a:solidFill>
@@ -4388,7 +4389,7 @@
             <a:p>
               <a:pPr algn="ctr"/>
               <a:r>
-                <a:rPr lang="en-US" sz="1600" dirty="0">
+                <a:rPr lang="en-US" sz="2400" dirty="0">
                   <a:solidFill>
                     <a:schemeClr val="tx1"/>
                   </a:solidFill>
@@ -4413,9 +4414,9 @@
           <p:grpSpPr>
             <a:xfrm>
               <a:off x="3096296" y="1853207"/>
-              <a:ext cx="480513" cy="1444752"/>
+              <a:ext cx="522550" cy="1444752"/>
               <a:chOff x="1698322" y="4729723"/>
-              <a:chExt cx="480513" cy="897246"/>
+              <a:chExt cx="522550" cy="897246"/>
             </a:xfrm>
           </p:grpSpPr>
           <p:sp>
@@ -4472,7 +4473,7 @@
               <a:p>
                 <a:pPr algn="ctr"/>
                 <a:r>
-                  <a:rPr lang="en-US" sz="1600" dirty="0">
+                  <a:rPr lang="en-US" sz="2400" dirty="0">
                     <a:solidFill>
                       <a:schemeClr val="tx1"/>
                     </a:solidFill>
@@ -4497,7 +4498,7 @@
             <p:spPr>
               <a:xfrm>
                 <a:off x="1966448" y="4729723"/>
-                <a:ext cx="212387" cy="897246"/>
+                <a:ext cx="254424" cy="897246"/>
               </a:xfrm>
               <a:prstGeom prst="rect">
                 <a:avLst/>
@@ -4533,7 +4534,7 @@
               <a:p>
                 <a:pPr algn="ctr"/>
                 <a:r>
-                  <a:rPr lang="en-US" sz="1400" dirty="0">
+                  <a:rPr lang="en-US" sz="2300" dirty="0">
                     <a:solidFill>
                       <a:schemeClr val="tx1"/>
                     </a:solidFill>
@@ -4559,9 +4560,9 @@
           <p:grpSpPr>
             <a:xfrm>
               <a:off x="3847446" y="2145010"/>
-              <a:ext cx="480513" cy="851362"/>
+              <a:ext cx="527781" cy="851362"/>
               <a:chOff x="1698322" y="4729723"/>
-              <a:chExt cx="480513" cy="897246"/>
+              <a:chExt cx="527781" cy="897246"/>
             </a:xfrm>
           </p:grpSpPr>
           <p:sp>
@@ -4618,7 +4619,7 @@
               <a:p>
                 <a:pPr algn="ctr"/>
                 <a:r>
-                  <a:rPr lang="en-US" sz="1600" dirty="0">
+                  <a:rPr lang="en-US" sz="2400" dirty="0">
                     <a:solidFill>
                       <a:schemeClr val="tx1"/>
                     </a:solidFill>
@@ -4643,7 +4644,7 @@
             <p:spPr>
               <a:xfrm>
                 <a:off x="1966448" y="4729723"/>
-                <a:ext cx="212387" cy="897246"/>
+                <a:ext cx="259655" cy="897246"/>
               </a:xfrm>
               <a:prstGeom prst="rect">
                 <a:avLst/>
@@ -4679,7 +4680,7 @@
               <a:p>
                 <a:pPr algn="ctr"/>
                 <a:r>
-                  <a:rPr lang="en-US" sz="1400" dirty="0">
+                  <a:rPr lang="en-US" sz="2300" dirty="0">
                     <a:solidFill>
                       <a:schemeClr val="tx1"/>
                     </a:solidFill>
@@ -4705,9 +4706,9 @@
           <p:grpSpPr>
             <a:xfrm>
               <a:off x="4600423" y="2145010"/>
-              <a:ext cx="480513" cy="851362"/>
+              <a:ext cx="513346" cy="851362"/>
               <a:chOff x="1698322" y="4729723"/>
-              <a:chExt cx="480513" cy="897246"/>
+              <a:chExt cx="513346" cy="897246"/>
             </a:xfrm>
           </p:grpSpPr>
           <p:sp>
@@ -4764,7 +4765,7 @@
               <a:p>
                 <a:pPr algn="ctr"/>
                 <a:r>
-                  <a:rPr lang="en-US" sz="1600" dirty="0">
+                  <a:rPr lang="en-US" sz="2400" dirty="0">
                     <a:solidFill>
                       <a:schemeClr val="tx1"/>
                     </a:solidFill>
@@ -4789,7 +4790,7 @@
             <p:spPr>
               <a:xfrm>
                 <a:off x="1966448" y="4729723"/>
-                <a:ext cx="212387" cy="897246"/>
+                <a:ext cx="245220" cy="897246"/>
               </a:xfrm>
               <a:prstGeom prst="rect">
                 <a:avLst/>
@@ -4825,7 +4826,7 @@
               <a:p>
                 <a:pPr algn="ctr"/>
                 <a:r>
-                  <a:rPr lang="en-US" sz="1400" dirty="0">
+                  <a:rPr lang="en-US" sz="2300" dirty="0">
                     <a:solidFill>
                       <a:schemeClr val="tx1"/>
                     </a:solidFill>
@@ -4851,9 +4852,9 @@
           <p:grpSpPr>
             <a:xfrm>
               <a:off x="5350877" y="1851347"/>
-              <a:ext cx="480513" cy="1444752"/>
+              <a:ext cx="567522" cy="1444752"/>
               <a:chOff x="1698322" y="4729723"/>
-              <a:chExt cx="480513" cy="897246"/>
+              <a:chExt cx="567522" cy="897246"/>
             </a:xfrm>
           </p:grpSpPr>
           <p:sp>
@@ -4910,7 +4911,7 @@
               <a:p>
                 <a:pPr algn="ctr"/>
                 <a:r>
-                  <a:rPr lang="en-US" sz="1600" dirty="0">
+                  <a:rPr lang="en-US" sz="2400" dirty="0">
                     <a:solidFill>
                       <a:schemeClr val="tx1"/>
                     </a:solidFill>
@@ -4935,7 +4936,7 @@
             <p:spPr>
               <a:xfrm>
                 <a:off x="1966448" y="4729723"/>
-                <a:ext cx="212387" cy="897246"/>
+                <a:ext cx="299396" cy="897246"/>
               </a:xfrm>
               <a:prstGeom prst="rect">
                 <a:avLst/>
@@ -4971,7 +4972,7 @@
               <a:p>
                 <a:pPr algn="ctr"/>
                 <a:r>
-                  <a:rPr lang="en-US" sz="1400" dirty="0">
+                  <a:rPr lang="en-US" sz="2300" dirty="0">
                     <a:solidFill>
                       <a:schemeClr val="tx1"/>
                     </a:solidFill>
@@ -4997,9 +4998,9 @@
           <p:grpSpPr>
             <a:xfrm>
               <a:off x="6609892" y="1848315"/>
-              <a:ext cx="480513" cy="1444752"/>
+              <a:ext cx="540161" cy="1444752"/>
               <a:chOff x="1698322" y="4729723"/>
-              <a:chExt cx="480513" cy="897246"/>
+              <a:chExt cx="540161" cy="897246"/>
             </a:xfrm>
           </p:grpSpPr>
           <p:sp>
@@ -5056,7 +5057,7 @@
               <a:p>
                 <a:pPr algn="ctr"/>
                 <a:r>
-                  <a:rPr lang="en-US" sz="1600" dirty="0">
+                  <a:rPr lang="en-US" sz="2400" dirty="0">
                     <a:solidFill>
                       <a:schemeClr val="tx1"/>
                     </a:solidFill>
@@ -5081,7 +5082,7 @@
             <p:spPr>
               <a:xfrm>
                 <a:off x="1966448" y="4729723"/>
-                <a:ext cx="212387" cy="897246"/>
+                <a:ext cx="272035" cy="897246"/>
               </a:xfrm>
               <a:prstGeom prst="rect">
                 <a:avLst/>
@@ -5117,7 +5118,7 @@
               <a:p>
                 <a:pPr algn="ctr"/>
                 <a:r>
-                  <a:rPr lang="en-US" sz="1400" dirty="0">
+                  <a:rPr lang="en-US" sz="2300" dirty="0">
                     <a:solidFill>
                       <a:schemeClr val="tx1"/>
                     </a:solidFill>
@@ -5182,7 +5183,7 @@
             <a:p>
               <a:pPr algn="ctr"/>
               <a:r>
-                <a:rPr lang="en-US" sz="1600" dirty="0">
+                <a:rPr lang="en-US" sz="2400" dirty="0">
                   <a:solidFill>
                     <a:schemeClr val="tx1"/>
                   </a:solidFill>
@@ -5207,9 +5208,9 @@
           <p:grpSpPr>
             <a:xfrm>
               <a:off x="8383960" y="1842600"/>
-              <a:ext cx="480513" cy="1444752"/>
+              <a:ext cx="570472" cy="1444752"/>
               <a:chOff x="1698322" y="4729723"/>
-              <a:chExt cx="480513" cy="897246"/>
+              <a:chExt cx="570472" cy="897246"/>
             </a:xfrm>
           </p:grpSpPr>
           <p:sp>
@@ -5266,7 +5267,7 @@
               <a:p>
                 <a:pPr algn="ctr"/>
                 <a:r>
-                  <a:rPr lang="en-US" sz="1600" dirty="0">
+                  <a:rPr lang="en-US" sz="2400" dirty="0">
                     <a:solidFill>
                       <a:schemeClr val="tx1"/>
                     </a:solidFill>
@@ -5291,7 +5292,7 @@
             <p:spPr>
               <a:xfrm>
                 <a:off x="1966448" y="4729723"/>
-                <a:ext cx="212387" cy="897246"/>
+                <a:ext cx="302346" cy="897246"/>
               </a:xfrm>
               <a:prstGeom prst="rect">
                 <a:avLst/>
@@ -5327,7 +5328,7 @@
               <a:p>
                 <a:pPr algn="ctr"/>
                 <a:r>
-                  <a:rPr lang="en-US" sz="1400" dirty="0">
+                  <a:rPr lang="en-US" sz="2200" dirty="0">
                     <a:solidFill>
                       <a:schemeClr val="tx1"/>
                     </a:solidFill>
@@ -5354,8 +5355,8 @@
               </p:nvSpPr>
               <p:spPr>
                 <a:xfrm>
-                  <a:off x="9892671" y="3565665"/>
-                  <a:ext cx="431528" cy="276999"/>
+                  <a:off x="9749105" y="3568996"/>
+                  <a:ext cx="718658" cy="461665"/>
                 </a:xfrm>
                 <a:prstGeom prst="rect">
                   <a:avLst/>
@@ -5378,14 +5379,14 @@
                         <m:sSub>
                           <m:sSubPr>
                             <m:ctrlPr>
-                              <a:rPr lang="en-US" i="1" smtClean="0">
+                              <a:rPr lang="en-US" sz="3000" i="1" smtClean="0">
                                 <a:latin typeface="Cambria Math" panose="02040503050406030204" pitchFamily="18" charset="0"/>
                               </a:rPr>
                             </m:ctrlPr>
                           </m:sSubPr>
                           <m:e>
                             <m:r>
-                              <a:rPr lang="en-US" b="0" i="1" smtClean="0">
+                              <a:rPr lang="en-US" sz="3000" b="0" i="1" smtClean="0">
                                 <a:latin typeface="Cambria Math" panose="02040503050406030204" pitchFamily="18" charset="0"/>
                               </a:rPr>
                               <m:t>𝐼</m:t>
@@ -5393,7 +5394,7 @@
                           </m:e>
                           <m:sub>
                             <m:r>
-                              <a:rPr lang="en-US" b="0" i="1" smtClean="0">
+                              <a:rPr lang="en-US" sz="3000" b="0" i="1" smtClean="0">
                                 <a:latin typeface="Cambria Math" panose="02040503050406030204" pitchFamily="18" charset="0"/>
                                 <a:ea typeface="Cambria Math" panose="02040503050406030204" pitchFamily="18" charset="0"/>
                               </a:rPr>
@@ -5404,7 +5405,7 @@
                       </m:oMath>
                     </m:oMathPara>
                   </a14:m>
-                  <a:endParaRPr lang="en-US" dirty="0"/>
+                  <a:endParaRPr lang="en-US" sz="3000" dirty="0"/>
                 </a:p>
               </p:txBody>
             </p:sp>
@@ -5426,8 +5427,8 @@
               </p:nvSpPr>
               <p:spPr>
                 <a:xfrm>
-                  <a:off x="9892671" y="3565665"/>
-                  <a:ext cx="431528" cy="276999"/>
+                  <a:off x="9749105" y="3568996"/>
+                  <a:ext cx="718658" cy="461665"/>
                 </a:xfrm>
                 <a:prstGeom prst="rect">
                   <a:avLst/>
@@ -5435,7 +5436,7 @@
                 <a:blipFill>
                   <a:blip r:embed="rId2"/>
                   <a:stretch>
-                    <a:fillRect l="-14085" r="-5634" b="-17778"/>
+                    <a:fillRect/>
                   </a:stretch>
                 </a:blipFill>
               </p:spPr>
@@ -5468,10 +5469,10 @@
           </p:nvGrpSpPr>
           <p:grpSpPr>
             <a:xfrm>
-              <a:off x="603356" y="2792004"/>
-              <a:ext cx="1064198" cy="1184633"/>
-              <a:chOff x="603356" y="2792004"/>
-              <a:chExt cx="1064198" cy="1184633"/>
+              <a:off x="603356" y="2666233"/>
+              <a:ext cx="1064198" cy="1310404"/>
+              <a:chOff x="603356" y="2666233"/>
+              <a:chExt cx="1064198" cy="1310404"/>
             </a:xfrm>
           </p:grpSpPr>
           <p:pic>
@@ -5550,8 +5551,8 @@
                 </p:nvSpPr>
                 <p:spPr>
                   <a:xfrm>
-                    <a:off x="1050464" y="2792004"/>
-                    <a:ext cx="172804" cy="276999"/>
+                    <a:off x="1052514" y="2666233"/>
+                    <a:ext cx="289630" cy="461665"/>
                   </a:xfrm>
                   <a:prstGeom prst="rect">
                     <a:avLst/>
@@ -5572,7 +5573,7 @@
                         </m:oMathParaPr>
                         <m:oMath xmlns:m="http://schemas.openxmlformats.org/officeDocument/2006/math">
                           <m:r>
-                            <a:rPr lang="en-US" b="0" i="1" smtClean="0">
+                            <a:rPr lang="en-US" sz="3000" b="0" i="1" smtClean="0">
                               <a:latin typeface="Cambria Math" panose="02040503050406030204" pitchFamily="18" charset="0"/>
                             </a:rPr>
                             <m:t>𝑆</m:t>
@@ -5580,7 +5581,7 @@
                         </m:oMath>
                       </m:oMathPara>
                     </a14:m>
-                    <a:endParaRPr lang="en-US" dirty="0"/>
+                    <a:endParaRPr lang="en-US" sz="3000" dirty="0"/>
                   </a:p>
                 </p:txBody>
               </p:sp>
@@ -5602,8 +5603,8 @@
                 </p:nvSpPr>
                 <p:spPr>
                   <a:xfrm>
-                    <a:off x="1050464" y="2792004"/>
-                    <a:ext cx="172804" cy="276999"/>
+                    <a:off x="1052514" y="2666233"/>
+                    <a:ext cx="289630" cy="461665"/>
                   </a:xfrm>
                   <a:prstGeom prst="rect">
                     <a:avLst/>
@@ -5611,7 +5612,7 @@
                   <a:blipFill>
                     <a:blip r:embed="rId4"/>
                     <a:stretch>
-                      <a:fillRect l="-31034" r="-31034" b="-8889"/>
+                      <a:fillRect/>
                     </a:stretch>
                   </a:blipFill>
                 </p:spPr>
@@ -5709,10 +5710,10 @@
           </p:nvGrpSpPr>
           <p:grpSpPr>
             <a:xfrm>
-              <a:off x="9651234" y="1116755"/>
-              <a:ext cx="1046638" cy="1257262"/>
-              <a:chOff x="9651234" y="1116755"/>
-              <a:chExt cx="1046638" cy="1257262"/>
+              <a:off x="9651234" y="932525"/>
+              <a:ext cx="1046638" cy="1441492"/>
+              <a:chOff x="9651234" y="932525"/>
+              <a:chExt cx="1046638" cy="1441492"/>
             </a:xfrm>
           </p:grpSpPr>
           <p:pic>
@@ -5766,8 +5767,8 @@
                 </p:nvSpPr>
                 <p:spPr>
                   <a:xfrm>
-                    <a:off x="9858238" y="1116755"/>
-                    <a:ext cx="500393" cy="276999"/>
+                    <a:off x="9792493" y="932525"/>
+                    <a:ext cx="834011" cy="461665"/>
                   </a:xfrm>
                   <a:prstGeom prst="rect">
                     <a:avLst/>
@@ -5790,14 +5791,14 @@
                           <m:sSub>
                             <m:sSubPr>
                               <m:ctrlPr>
-                                <a:rPr lang="en-US" i="1" smtClean="0">
+                                <a:rPr lang="en-US" sz="3000" i="1" smtClean="0">
                                   <a:latin typeface="Cambria Math" panose="02040503050406030204" pitchFamily="18" charset="0"/>
                                 </a:rPr>
                               </m:ctrlPr>
                             </m:sSubPr>
                             <m:e>
                               <m:r>
-                                <a:rPr lang="en-US" b="0" i="1" smtClean="0">
+                                <a:rPr lang="en-US" sz="3000" b="0" i="1" smtClean="0">
                                   <a:latin typeface="Cambria Math" panose="02040503050406030204" pitchFamily="18" charset="0"/>
                                 </a:rPr>
                                 <m:t>𝑅</m:t>
@@ -5805,7 +5806,7 @@
                             </m:e>
                             <m:sub>
                               <m:r>
-                                <a:rPr lang="en-US" b="0" i="1" smtClean="0">
+                                <a:rPr lang="en-US" sz="3000" b="0" i="1" smtClean="0">
                                   <a:latin typeface="Cambria Math" panose="02040503050406030204" pitchFamily="18" charset="0"/>
                                   <a:ea typeface="Cambria Math" panose="02040503050406030204" pitchFamily="18" charset="0"/>
                                 </a:rPr>
@@ -5816,7 +5817,7 @@
                         </m:oMath>
                       </m:oMathPara>
                     </a14:m>
-                    <a:endParaRPr lang="en-US" dirty="0"/>
+                    <a:endParaRPr lang="en-US" sz="3000" dirty="0"/>
                   </a:p>
                 </p:txBody>
               </p:sp>
@@ -5838,8 +5839,8 @@
                 </p:nvSpPr>
                 <p:spPr>
                   <a:xfrm>
-                    <a:off x="9858238" y="1116755"/>
-                    <a:ext cx="500393" cy="276999"/>
+                    <a:off x="9792493" y="932525"/>
+                    <a:ext cx="834011" cy="461665"/>
                   </a:xfrm>
                   <a:prstGeom prst="rect">
                     <a:avLst/>
@@ -5847,7 +5848,7 @@
                   <a:blipFill>
                     <a:blip r:embed="rId8"/>
                     <a:stretch>
-                      <a:fillRect l="-10976" r="-4878" b="-15217"/>
+                      <a:fillRect/>
                     </a:stretch>
                   </a:blipFill>
                 </p:spPr>
@@ -5988,10 +5989,10 @@
         </p:nvGrpSpPr>
         <p:grpSpPr>
           <a:xfrm>
-            <a:off x="-454152" y="1373945"/>
-            <a:ext cx="12892436" cy="3287706"/>
-            <a:chOff x="-454152" y="1373945"/>
-            <a:chExt cx="12892436" cy="3287706"/>
+            <a:off x="-454152" y="1209563"/>
+            <a:ext cx="12892436" cy="3452088"/>
+            <a:chOff x="-454152" y="1209563"/>
+            <a:chExt cx="12892436" cy="3452088"/>
           </a:xfrm>
         </p:grpSpPr>
         <p:grpSp>
@@ -6008,10 +6009,10 @@
           </p:nvGrpSpPr>
           <p:grpSpPr>
             <a:xfrm>
-              <a:off x="-214278" y="1373945"/>
-              <a:ext cx="12652562" cy="3287706"/>
-              <a:chOff x="-214278" y="1373945"/>
-              <a:chExt cx="12652562" cy="3287706"/>
+              <a:off x="-336086" y="1209563"/>
+              <a:ext cx="12774370" cy="3452088"/>
+              <a:chOff x="-336086" y="1209563"/>
+              <a:chExt cx="12774370" cy="3452088"/>
             </a:xfrm>
           </p:grpSpPr>
           <p:grpSp>
@@ -6191,8 +6192,8 @@
               </p:nvSpPr>
               <p:spPr>
                 <a:xfrm>
-                  <a:off x="3995381" y="2262857"/>
-                  <a:ext cx="457927" cy="1118680"/>
+                  <a:off x="3995381" y="2013626"/>
+                  <a:ext cx="457927" cy="1624519"/>
                 </a:xfrm>
                 <a:prstGeom prst="rect">
                   <a:avLst/>
@@ -6231,7 +6232,7 @@
                 <a:p>
                   <a:pPr algn="ctr"/>
                   <a:r>
-                    <a:rPr lang="en-US" sz="1300" dirty="0">
+                    <a:rPr lang="en-US" sz="2200" dirty="0">
                       <a:solidFill>
                         <a:schemeClr val="tx1"/>
                       </a:solidFill>
@@ -6255,8 +6256,8 @@
               </p:nvSpPr>
               <p:spPr>
                 <a:xfrm>
-                  <a:off x="4673817" y="2293206"/>
-                  <a:ext cx="246521" cy="1051997"/>
+                  <a:off x="4673818" y="2097148"/>
+                  <a:ext cx="265176" cy="1444752"/>
                 </a:xfrm>
                 <a:prstGeom prst="rect">
                   <a:avLst/>
@@ -6295,14 +6296,14 @@
                 <a:p>
                   <a:pPr algn="ctr"/>
                   <a:r>
-                    <a:rPr lang="en-US" sz="1400" dirty="0" err="1">
+                    <a:rPr lang="en-US" sz="2200" dirty="0" err="1">
                       <a:solidFill>
                         <a:schemeClr val="tx1"/>
                       </a:solidFill>
                     </a:rPr>
                     <a:t>Upsample</a:t>
                   </a:r>
-                  <a:endParaRPr lang="en-US" sz="1400" dirty="0">
+                  <a:endParaRPr lang="en-US" sz="2200" dirty="0">
                     <a:solidFill>
                       <a:schemeClr val="tx1"/>
                     </a:solidFill>
@@ -6380,8 +6381,8 @@
               </p:nvCxnSpPr>
               <p:spPr>
                 <a:xfrm rot="16200000" flipH="1">
-                  <a:off x="4177581" y="889791"/>
-                  <a:ext cx="582905" cy="3002111"/>
+                  <a:off x="4192114" y="904323"/>
+                  <a:ext cx="582905" cy="2973046"/>
                 </a:xfrm>
                 <a:prstGeom prst="bentConnector3">
                   <a:avLst>
@@ -6475,8 +6476,8 @@
               </p:nvCxnSpPr>
               <p:spPr>
                 <a:xfrm flipV="1">
-                  <a:off x="2339871" y="2821770"/>
-                  <a:ext cx="253788" cy="3469"/>
+                  <a:off x="2431602" y="2821770"/>
+                  <a:ext cx="162057" cy="3469"/>
                 </a:xfrm>
                 <a:prstGeom prst="straightConnector1">
                   <a:avLst/>
@@ -6521,8 +6522,8 @@
               </p:nvCxnSpPr>
               <p:spPr>
                 <a:xfrm>
-                  <a:off x="3074172" y="2821770"/>
-                  <a:ext cx="220187" cy="677"/>
+                  <a:off x="3132302" y="2821770"/>
+                  <a:ext cx="162057" cy="677"/>
                 </a:xfrm>
                 <a:prstGeom prst="straightConnector1">
                   <a:avLst/>
@@ -6566,9 +6567,9 @@
                 <p:nvPr/>
               </p:nvCxnSpPr>
               <p:spPr>
-                <a:xfrm flipV="1">
-                  <a:off x="3774872" y="2822197"/>
-                  <a:ext cx="220509" cy="250"/>
+                <a:xfrm>
+                  <a:off x="3824009" y="2822447"/>
+                  <a:ext cx="171372" cy="3439"/>
                 </a:xfrm>
                 <a:prstGeom prst="straightConnector1">
                   <a:avLst/>
@@ -6659,8 +6660,8 @@
               </p:nvCxnSpPr>
               <p:spPr>
                 <a:xfrm flipV="1">
-                  <a:off x="4453308" y="2819205"/>
-                  <a:ext cx="220509" cy="2992"/>
+                  <a:off x="4453308" y="2819524"/>
+                  <a:ext cx="220510" cy="6362"/>
                 </a:xfrm>
                 <a:prstGeom prst="straightConnector1">
                   <a:avLst/>
@@ -6705,8 +6706,8 @@
               </p:nvCxnSpPr>
               <p:spPr>
                 <a:xfrm>
-                  <a:off x="4920338" y="2819205"/>
-                  <a:ext cx="214417" cy="319"/>
+                  <a:off x="4938994" y="2819524"/>
+                  <a:ext cx="195761" cy="0"/>
                 </a:xfrm>
                 <a:prstGeom prst="straightConnector1">
                   <a:avLst/>
@@ -6751,8 +6752,8 @@
               </p:nvCxnSpPr>
               <p:spPr>
                 <a:xfrm flipV="1">
-                  <a:off x="5615268" y="2819459"/>
-                  <a:ext cx="217662" cy="65"/>
+                  <a:off x="5677198" y="2819459"/>
+                  <a:ext cx="155732" cy="65"/>
                 </a:xfrm>
                 <a:prstGeom prst="straightConnector1">
                   <a:avLst/>
@@ -6796,9 +6797,9 @@
                 <p:nvPr/>
               </p:nvCxnSpPr>
               <p:spPr>
-                <a:xfrm flipV="1">
-                  <a:off x="6107250" y="2819205"/>
-                  <a:ext cx="424868" cy="254"/>
+                <a:xfrm>
+                  <a:off x="6107250" y="2819459"/>
+                  <a:ext cx="424868" cy="65"/>
                 </a:xfrm>
                 <a:prstGeom prst="straightConnector1">
                   <a:avLst/>
@@ -6843,8 +6844,8 @@
               </p:nvCxnSpPr>
               <p:spPr>
                 <a:xfrm>
-                  <a:off x="6778639" y="2819205"/>
-                  <a:ext cx="209315" cy="1080"/>
+                  <a:off x="6806435" y="2819524"/>
+                  <a:ext cx="181519" cy="761"/>
                 </a:xfrm>
                 <a:prstGeom prst="straightConnector1">
                   <a:avLst/>
@@ -6941,8 +6942,8 @@
               </p:nvCxnSpPr>
               <p:spPr>
                 <a:xfrm>
-                  <a:off x="7468467" y="2820258"/>
-                  <a:ext cx="210428" cy="851"/>
+                  <a:off x="7527450" y="2820258"/>
+                  <a:ext cx="151445" cy="851"/>
                 </a:xfrm>
                 <a:prstGeom prst="straightConnector1">
                   <a:avLst/>
@@ -6987,8 +6988,8 @@
               </p:nvCxnSpPr>
               <p:spPr>
                 <a:xfrm rot="16200000" flipH="1">
-                  <a:off x="4585733" y="-546372"/>
-                  <a:ext cx="878266" cy="5582377"/>
+                  <a:off x="4608666" y="-523440"/>
+                  <a:ext cx="878266" cy="5536512"/>
                 </a:xfrm>
                 <a:prstGeom prst="bentConnector3">
                   <a:avLst>
@@ -7035,9 +7036,9 @@
                 <p:nvPr/>
               </p:nvCxnSpPr>
               <p:spPr>
-                <a:xfrm>
-                  <a:off x="7953215" y="2821109"/>
-                  <a:ext cx="269539" cy="1"/>
+                <a:xfrm flipV="1">
+                  <a:off x="7953215" y="2819524"/>
+                  <a:ext cx="269539" cy="1585"/>
                 </a:xfrm>
                 <a:prstGeom prst="straightConnector1">
                   <a:avLst/>
@@ -7082,8 +7083,8 @@
               </p:nvCxnSpPr>
               <p:spPr>
                 <a:xfrm>
-                  <a:off x="8469275" y="2821110"/>
-                  <a:ext cx="231621" cy="197"/>
+                  <a:off x="8502786" y="2819524"/>
+                  <a:ext cx="198110" cy="1783"/>
                 </a:xfrm>
                 <a:prstGeom prst="straightConnector1">
                   <a:avLst/>
@@ -7180,8 +7181,8 @@
               </p:nvCxnSpPr>
               <p:spPr>
                 <a:xfrm flipV="1">
-                  <a:off x="9177421" y="2819456"/>
-                  <a:ext cx="241061" cy="201"/>
+                  <a:off x="9263821" y="2819456"/>
+                  <a:ext cx="154661" cy="201"/>
                 </a:xfrm>
                 <a:prstGeom prst="straightConnector1">
                   <a:avLst/>
@@ -7271,8 +7272,8 @@
               </p:nvSpPr>
               <p:spPr>
                 <a:xfrm>
-                  <a:off x="9900209" y="2260317"/>
-                  <a:ext cx="210312" cy="1118681"/>
+                  <a:off x="9894191" y="2259863"/>
+                  <a:ext cx="353158" cy="1118681"/>
                 </a:xfrm>
                 <a:prstGeom prst="rect">
                   <a:avLst/>
@@ -7311,14 +7312,14 @@
                 <a:p>
                   <a:pPr algn="ctr"/>
                   <a:r>
-                    <a:rPr lang="en-US" sz="1400" dirty="0" err="1">
+                    <a:rPr lang="en-US" sz="2200" dirty="0" err="1">
                       <a:solidFill>
                         <a:schemeClr val="tx1"/>
                       </a:solidFill>
                     </a:rPr>
                     <a:t>Concat</a:t>
                   </a:r>
-                  <a:endParaRPr lang="en-US" sz="1400" dirty="0">
+                  <a:endParaRPr lang="en-US" sz="2200" dirty="0">
                     <a:solidFill>
                       <a:schemeClr val="tx1"/>
                     </a:solidFill>
@@ -7343,9 +7344,9 @@
                 <p:nvPr/>
               </p:nvCxnSpPr>
               <p:spPr>
-                <a:xfrm>
-                  <a:off x="9692802" y="2819456"/>
-                  <a:ext cx="207407" cy="202"/>
+                <a:xfrm flipV="1">
+                  <a:off x="9692802" y="2819204"/>
+                  <a:ext cx="201389" cy="252"/>
                 </a:xfrm>
                 <a:prstGeom prst="straightConnector1">
                   <a:avLst/>
@@ -7390,12 +7391,12 @@
               </p:nvCxnSpPr>
               <p:spPr>
                 <a:xfrm rot="5400000" flipH="1" flipV="1">
-                  <a:off x="7509479" y="2165766"/>
-                  <a:ext cx="1282653" cy="3709117"/>
+                  <a:off x="7540868" y="2131750"/>
+                  <a:ext cx="1283107" cy="3776696"/>
                 </a:xfrm>
                 <a:prstGeom prst="bentConnector3">
                   <a:avLst>
-                    <a:gd name="adj1" fmla="val -17822"/>
+                    <a:gd name="adj1" fmla="val -17816"/>
                   </a:avLst>
                 </a:prstGeom>
                 <a:ln w="3175">
@@ -7438,12 +7439,12 @@
               </p:nvCxnSpPr>
               <p:spPr>
                 <a:xfrm flipV="1">
-                  <a:off x="8151325" y="3112549"/>
-                  <a:ext cx="1748883" cy="1152788"/>
+                  <a:off x="8217500" y="3112549"/>
+                  <a:ext cx="1682708" cy="1090573"/>
                 </a:xfrm>
                 <a:prstGeom prst="bentConnector3">
                   <a:avLst>
-                    <a:gd name="adj1" fmla="val 90956"/>
+                    <a:gd name="adj1" fmla="val 50000"/>
                   </a:avLst>
                 </a:prstGeom>
                 <a:ln w="3175">
@@ -7486,9 +7487,9 @@
                 <p:nvPr/>
               </p:nvCxnSpPr>
               <p:spPr>
-                <a:xfrm flipV="1">
-                  <a:off x="10110521" y="2819657"/>
-                  <a:ext cx="260211" cy="1"/>
+                <a:xfrm>
+                  <a:off x="10247349" y="2819204"/>
+                  <a:ext cx="123383" cy="453"/>
                 </a:xfrm>
                 <a:prstGeom prst="straightConnector1">
                   <a:avLst/>
@@ -7661,7 +7662,7 @@
                 <a:p>
                   <a:pPr algn="ctr"/>
                   <a:r>
-                    <a:rPr lang="en-US" sz="1600" dirty="0">
+                    <a:rPr lang="en-US" sz="2400" dirty="0">
                       <a:solidFill>
                         <a:schemeClr val="tx1"/>
                       </a:solidFill>
@@ -7686,9 +7687,9 @@
               <p:grpSpPr>
                 <a:xfrm>
                   <a:off x="2593659" y="2099394"/>
-                  <a:ext cx="480513" cy="1444752"/>
+                  <a:ext cx="538643" cy="1444752"/>
                   <a:chOff x="1698322" y="4729723"/>
-                  <a:chExt cx="480513" cy="897246"/>
+                  <a:chExt cx="538643" cy="897246"/>
                 </a:xfrm>
               </p:grpSpPr>
               <p:sp>
@@ -7745,7 +7746,7 @@
                   <a:p>
                     <a:pPr algn="ctr"/>
                     <a:r>
-                      <a:rPr lang="en-US" sz="1600" dirty="0">
+                      <a:rPr lang="en-US" sz="2400" dirty="0">
                         <a:solidFill>
                           <a:schemeClr val="tx1"/>
                         </a:solidFill>
@@ -7770,7 +7771,7 @@
                 <p:spPr>
                   <a:xfrm>
                     <a:off x="1966448" y="4729723"/>
-                    <a:ext cx="212387" cy="897246"/>
+                    <a:ext cx="270517" cy="897246"/>
                   </a:xfrm>
                   <a:prstGeom prst="rect">
                     <a:avLst/>
@@ -7806,7 +7807,7 @@
                   <a:p>
                     <a:pPr algn="ctr"/>
                     <a:r>
-                      <a:rPr lang="en-US" sz="1400" dirty="0">
+                      <a:rPr lang="en-US" sz="2300" dirty="0">
                         <a:solidFill>
                           <a:schemeClr val="tx1"/>
                         </a:solidFill>
@@ -7832,9 +7833,9 @@
               <p:grpSpPr>
                 <a:xfrm>
                   <a:off x="3294359" y="2396766"/>
-                  <a:ext cx="480513" cy="851362"/>
+                  <a:ext cx="529650" cy="851362"/>
                   <a:chOff x="1698322" y="4729723"/>
-                  <a:chExt cx="480513" cy="897246"/>
+                  <a:chExt cx="529650" cy="897246"/>
                 </a:xfrm>
               </p:grpSpPr>
               <p:sp>
@@ -7891,7 +7892,7 @@
                   <a:p>
                     <a:pPr algn="ctr"/>
                     <a:r>
-                      <a:rPr lang="en-US" sz="1600" dirty="0">
+                      <a:rPr lang="en-US" sz="2400" dirty="0">
                         <a:solidFill>
                           <a:schemeClr val="tx1"/>
                         </a:solidFill>
@@ -7916,7 +7917,7 @@
                 <p:spPr>
                   <a:xfrm>
                     <a:off x="1966448" y="4729723"/>
-                    <a:ext cx="212387" cy="897246"/>
+                    <a:ext cx="261524" cy="897246"/>
                   </a:xfrm>
                   <a:prstGeom prst="rect">
                     <a:avLst/>
@@ -7952,7 +7953,7 @@
                   <a:p>
                     <a:pPr algn="ctr"/>
                     <a:r>
-                      <a:rPr lang="en-US" sz="1400" dirty="0">
+                      <a:rPr lang="en-US" sz="2300" dirty="0">
                         <a:solidFill>
                           <a:schemeClr val="tx1"/>
                         </a:solidFill>
@@ -7978,9 +7979,9 @@
               <p:grpSpPr>
                 <a:xfrm>
                   <a:off x="5134755" y="2097148"/>
-                  <a:ext cx="480513" cy="1444752"/>
+                  <a:ext cx="542443" cy="1444752"/>
                   <a:chOff x="1698322" y="4729723"/>
-                  <a:chExt cx="480513" cy="897246"/>
+                  <a:chExt cx="542443" cy="897246"/>
                 </a:xfrm>
               </p:grpSpPr>
               <p:sp>
@@ -8037,7 +8038,7 @@
                   <a:p>
                     <a:pPr algn="ctr"/>
                     <a:r>
-                      <a:rPr lang="en-US" sz="1600" dirty="0">
+                      <a:rPr lang="en-US" sz="2400" dirty="0">
                         <a:solidFill>
                           <a:schemeClr val="tx1"/>
                         </a:solidFill>
@@ -8062,7 +8063,7 @@
                 <p:spPr>
                   <a:xfrm>
                     <a:off x="1966448" y="4729723"/>
-                    <a:ext cx="212387" cy="897246"/>
+                    <a:ext cx="274317" cy="897246"/>
                   </a:xfrm>
                   <a:prstGeom prst="rect">
                     <a:avLst/>
@@ -8098,7 +8099,7 @@
                   <a:p>
                     <a:pPr algn="ctr"/>
                     <a:r>
-                      <a:rPr lang="en-US" sz="1400" dirty="0">
+                      <a:rPr lang="en-US" sz="2300" dirty="0">
                         <a:solidFill>
                           <a:schemeClr val="tx1"/>
                         </a:solidFill>
@@ -8123,8 +8124,8 @@
               </p:nvSpPr>
               <p:spPr>
                 <a:xfrm>
-                  <a:off x="6532118" y="2293206"/>
-                  <a:ext cx="246521" cy="1051997"/>
+                  <a:off x="6532118" y="2097148"/>
+                  <a:ext cx="274317" cy="1444752"/>
                 </a:xfrm>
                 <a:prstGeom prst="rect">
                   <a:avLst/>
@@ -8163,14 +8164,14 @@
                 <a:p>
                   <a:pPr algn="ctr"/>
                   <a:r>
-                    <a:rPr lang="en-US" sz="1400" dirty="0" err="1">
+                    <a:rPr lang="en-US" sz="2200" dirty="0" err="1">
                       <a:solidFill>
                         <a:schemeClr val="tx1"/>
                       </a:solidFill>
                     </a:rPr>
                     <a:t>Upsample</a:t>
                   </a:r>
-                  <a:endParaRPr lang="en-US" sz="1400" dirty="0">
+                  <a:endParaRPr lang="en-US" sz="2200" dirty="0">
                     <a:solidFill>
                       <a:schemeClr val="tx1"/>
                     </a:solidFill>
@@ -8193,9 +8194,9 @@
               <p:grpSpPr>
                 <a:xfrm>
                   <a:off x="6987954" y="1800704"/>
-                  <a:ext cx="480513" cy="2039135"/>
+                  <a:ext cx="539496" cy="2039135"/>
                   <a:chOff x="1698322" y="4729723"/>
-                  <a:chExt cx="480513" cy="897258"/>
+                  <a:chExt cx="539496" cy="897258"/>
                 </a:xfrm>
               </p:grpSpPr>
               <p:sp>
@@ -8252,7 +8253,7 @@
                   <a:p>
                     <a:pPr algn="ctr"/>
                     <a:r>
-                      <a:rPr lang="en-US" sz="1600" dirty="0">
+                      <a:rPr lang="en-US" sz="2400" dirty="0">
                         <a:solidFill>
                           <a:schemeClr val="tx1"/>
                         </a:solidFill>
@@ -8277,7 +8278,7 @@
                 <p:spPr>
                   <a:xfrm>
                     <a:off x="1966448" y="4729723"/>
-                    <a:ext cx="212387" cy="897246"/>
+                    <a:ext cx="271370" cy="897246"/>
                   </a:xfrm>
                   <a:prstGeom prst="rect">
                     <a:avLst/>
@@ -8313,7 +8314,7 @@
                   <a:p>
                     <a:pPr algn="ctr"/>
                     <a:r>
-                      <a:rPr lang="en-US" sz="1400" dirty="0">
+                      <a:rPr lang="en-US" sz="2300" dirty="0">
                         <a:solidFill>
                           <a:schemeClr val="tx1"/>
                         </a:solidFill>
@@ -8338,8 +8339,8 @@
               </p:nvSpPr>
               <p:spPr>
                 <a:xfrm>
-                  <a:off x="8222754" y="2295111"/>
-                  <a:ext cx="246521" cy="1051997"/>
+                  <a:off x="8222754" y="2097148"/>
+                  <a:ext cx="280032" cy="1444751"/>
                 </a:xfrm>
                 <a:prstGeom prst="rect">
                   <a:avLst/>
@@ -8378,14 +8379,14 @@
                 <a:p>
                   <a:pPr algn="ctr"/>
                   <a:r>
-                    <a:rPr lang="en-US" sz="1400" dirty="0" err="1">
+                    <a:rPr lang="en-US" sz="2200" dirty="0" err="1">
                       <a:solidFill>
                         <a:schemeClr val="tx1"/>
                       </a:solidFill>
                     </a:rPr>
                     <a:t>Upsample</a:t>
                   </a:r>
-                  <a:endParaRPr lang="en-US" sz="1400" dirty="0">
+                  <a:endParaRPr lang="en-US" sz="2200" dirty="0">
                     <a:solidFill>
                       <a:schemeClr val="tx1"/>
                     </a:solidFill>
@@ -8407,8 +8408,8 @@
               </p:nvSpPr>
               <p:spPr>
                 <a:xfrm>
-                  <a:off x="6190054" y="3869023"/>
-                  <a:ext cx="212387" cy="792628"/>
+                  <a:off x="6107251" y="3744593"/>
+                  <a:ext cx="373646" cy="917058"/>
                 </a:xfrm>
                 <a:prstGeom prst="rect">
                   <a:avLst/>
@@ -8446,7 +8447,7 @@
                 <a:p>
                   <a:pPr algn="ctr"/>
                   <a:r>
-                    <a:rPr lang="en-US" sz="1400" dirty="0">
+                    <a:rPr lang="en-US" sz="2200" dirty="0">
                       <a:solidFill>
                         <a:schemeClr val="tx1"/>
                       </a:solidFill>
@@ -8471,9 +8472,9 @@
               <p:grpSpPr>
                 <a:xfrm>
                   <a:off x="8700896" y="1502921"/>
-                  <a:ext cx="476525" cy="2635122"/>
+                  <a:ext cx="562925" cy="2635122"/>
                   <a:chOff x="2005571" y="3536805"/>
-                  <a:chExt cx="476525" cy="2635122"/>
+                  <a:chExt cx="562925" cy="2635122"/>
                 </a:xfrm>
               </p:grpSpPr>
               <p:sp>
@@ -8530,7 +8531,7 @@
                   <a:p>
                     <a:pPr algn="ctr"/>
                     <a:r>
-                      <a:rPr lang="en-US" sz="1600" dirty="0">
+                      <a:rPr lang="en-US" sz="2400" dirty="0">
                         <a:solidFill>
                           <a:schemeClr val="tx1"/>
                         </a:solidFill>
@@ -8555,7 +8556,7 @@
                 <p:spPr>
                   <a:xfrm>
                     <a:off x="2271784" y="3536805"/>
-                    <a:ext cx="210312" cy="2633472"/>
+                    <a:ext cx="296712" cy="2633472"/>
                   </a:xfrm>
                   <a:prstGeom prst="rect">
                     <a:avLst/>
@@ -8591,7 +8592,7 @@
                   <a:p>
                     <a:pPr algn="ctr"/>
                     <a:r>
-                      <a:rPr lang="en-US" sz="1400" dirty="0">
+                      <a:rPr lang="en-US" sz="2300" dirty="0">
                         <a:solidFill>
                           <a:schemeClr val="tx1"/>
                         </a:solidFill>
@@ -8616,8 +8617,8 @@
               </p:nvSpPr>
               <p:spPr>
                 <a:xfrm>
-                  <a:off x="7938938" y="3869023"/>
-                  <a:ext cx="212387" cy="792628"/>
+                  <a:off x="7895700" y="3744593"/>
+                  <a:ext cx="321800" cy="917058"/>
                 </a:xfrm>
                 <a:prstGeom prst="rect">
                   <a:avLst/>
@@ -8655,7 +8656,7 @@
                 <a:p>
                   <a:pPr algn="ctr"/>
                   <a:r>
-                    <a:rPr lang="en-US" sz="1400" dirty="0">
+                    <a:rPr lang="en-US" sz="2200" dirty="0">
                       <a:solidFill>
                         <a:schemeClr val="tx1"/>
                       </a:solidFill>
@@ -8683,7 +8684,7 @@
               <p:spPr>
                 <a:xfrm>
                   <a:off x="8045131" y="2819204"/>
-                  <a:ext cx="1" cy="1049819"/>
+                  <a:ext cx="11469" cy="925389"/>
                 </a:xfrm>
                 <a:prstGeom prst="straightConnector1">
                   <a:avLst/>
@@ -8726,9 +8727,9 @@
                 <p:nvPr/>
               </p:nvCxnSpPr>
               <p:spPr>
-                <a:xfrm>
-                  <a:off x="6296247" y="2819204"/>
-                  <a:ext cx="1" cy="1049819"/>
+                <a:xfrm flipH="1">
+                  <a:off x="6294074" y="2819204"/>
+                  <a:ext cx="2173" cy="925389"/>
                 </a:xfrm>
                 <a:prstGeom prst="straightConnector1">
                   <a:avLst/>
@@ -8809,7 +8810,7 @@
                 <a:p>
                   <a:pPr algn="ctr"/>
                   <a:r>
-                    <a:rPr lang="en-US" sz="1600" dirty="0">
+                    <a:rPr lang="en-US" sz="2400" dirty="0">
                       <a:solidFill>
                         <a:schemeClr val="tx1"/>
                       </a:solidFill>
@@ -8873,7 +8874,7 @@
                 <a:p>
                   <a:pPr algn="ctr"/>
                   <a:r>
-                    <a:rPr lang="en-US" sz="1600" dirty="0">
+                    <a:rPr lang="en-US" sz="2400" dirty="0">
                       <a:solidFill>
                         <a:schemeClr val="tx1"/>
                       </a:solidFill>
@@ -8898,9 +8899,9 @@
               <p:grpSpPr>
                 <a:xfrm>
                   <a:off x="1859358" y="1805683"/>
-                  <a:ext cx="480513" cy="2039112"/>
+                  <a:ext cx="572244" cy="2039112"/>
                   <a:chOff x="1698322" y="4729723"/>
-                  <a:chExt cx="480513" cy="897246"/>
+                  <a:chExt cx="572244" cy="897246"/>
                 </a:xfrm>
               </p:grpSpPr>
               <p:sp>
@@ -8957,7 +8958,7 @@
                   <a:p>
                     <a:pPr algn="ctr"/>
                     <a:r>
-                      <a:rPr lang="en-US" sz="1600" dirty="0">
+                      <a:rPr lang="en-US" sz="2400" dirty="0">
                         <a:solidFill>
                           <a:schemeClr val="tx1"/>
                         </a:solidFill>
@@ -8982,7 +8983,7 @@
                 <p:spPr>
                   <a:xfrm>
                     <a:off x="1966448" y="4729723"/>
-                    <a:ext cx="212387" cy="897246"/>
+                    <a:ext cx="304118" cy="897246"/>
                   </a:xfrm>
                   <a:prstGeom prst="rect">
                     <a:avLst/>
@@ -9018,7 +9019,7 @@
                   <a:p>
                     <a:pPr algn="ctr"/>
                     <a:r>
-                      <a:rPr lang="en-US" sz="1400" dirty="0">
+                      <a:rPr lang="en-US" sz="2300" dirty="0">
                         <a:solidFill>
                           <a:schemeClr val="tx1"/>
                         </a:solidFill>
@@ -9076,8 +9077,8 @@
                 </p:nvSpPr>
                 <p:spPr>
                   <a:xfrm>
-                    <a:off x="11865413" y="2121817"/>
-                    <a:ext cx="238206" cy="276999"/>
+                    <a:off x="11760956" y="1924243"/>
+                    <a:ext cx="371127" cy="430887"/>
                   </a:xfrm>
                   <a:prstGeom prst="rect">
                     <a:avLst/>
@@ -9100,14 +9101,14 @@
                           <m:sSub>
                             <m:sSubPr>
                               <m:ctrlPr>
-                                <a:rPr lang="en-US" i="1" smtClean="0">
+                                <a:rPr lang="en-US" sz="2800" i="1" smtClean="0">
                                   <a:latin typeface="Cambria Math" panose="02040503050406030204" pitchFamily="18" charset="0"/>
                                 </a:rPr>
                               </m:ctrlPr>
                             </m:sSubPr>
                             <m:e>
                               <m:r>
-                                <a:rPr lang="en-US" b="0" i="1" smtClean="0">
+                                <a:rPr lang="en-US" sz="2800" b="0" i="1" smtClean="0">
                                   <a:latin typeface="Cambria Math" panose="02040503050406030204" pitchFamily="18" charset="0"/>
                                 </a:rPr>
                                 <m:t>𝐼</m:t>
@@ -9115,7 +9116,7 @@
                             </m:e>
                             <m:sub>
                               <m:r>
-                                <a:rPr lang="en-US" i="1" smtClean="0">
+                                <a:rPr lang="en-US" sz="2800" i="1" smtClean="0">
                                   <a:latin typeface="Cambria Math" panose="02040503050406030204" pitchFamily="18" charset="0"/>
                                   <a:ea typeface="Cambria Math" panose="02040503050406030204" pitchFamily="18" charset="0"/>
                                 </a:rPr>
@@ -9126,7 +9127,7 @@
                         </m:oMath>
                       </m:oMathPara>
                     </a14:m>
-                    <a:endParaRPr lang="en-US" dirty="0"/>
+                    <a:endParaRPr lang="en-US" sz="2800" dirty="0"/>
                   </a:p>
                 </p:txBody>
               </p:sp>
@@ -9148,16 +9149,16 @@
                 </p:nvSpPr>
                 <p:spPr>
                   <a:xfrm>
-                    <a:off x="11865413" y="2121817"/>
-                    <a:ext cx="238206" cy="276999"/>
+                    <a:off x="11760956" y="1924243"/>
+                    <a:ext cx="371127" cy="430887"/>
                   </a:xfrm>
                   <a:prstGeom prst="rect">
                     <a:avLst/>
                   </a:prstGeom>
                   <a:blipFill>
-                    <a:blip r:embed="rId5"/>
+                    <a:blip r:embed="rId3"/>
                     <a:stretch>
-                      <a:fillRect l="-22500" r="-10000" b="-17391"/>
+                      <a:fillRect/>
                     </a:stretch>
                   </a:blipFill>
                 </p:spPr>
@@ -9192,8 +9193,8 @@
                 </p:nvSpPr>
                 <p:spPr>
                   <a:xfrm>
-                    <a:off x="-175341" y="1373945"/>
-                    <a:ext cx="500393" cy="276999"/>
+                    <a:off x="-258904" y="1209563"/>
+                    <a:ext cx="780022" cy="430887"/>
                   </a:xfrm>
                   <a:prstGeom prst="rect">
                     <a:avLst/>
@@ -9216,14 +9217,14 @@
                           <m:sSub>
                             <m:sSubPr>
                               <m:ctrlPr>
-                                <a:rPr lang="en-US" i="1" smtClean="0">
+                                <a:rPr lang="en-US" sz="2800" i="1" smtClean="0">
                                   <a:latin typeface="Cambria Math" panose="02040503050406030204" pitchFamily="18" charset="0"/>
                                 </a:rPr>
                               </m:ctrlPr>
                             </m:sSubPr>
                             <m:e>
                               <m:r>
-                                <a:rPr lang="en-US" b="0" i="1" smtClean="0">
+                                <a:rPr lang="en-US" sz="2800" b="0" i="1" smtClean="0">
                                   <a:latin typeface="Cambria Math" panose="02040503050406030204" pitchFamily="18" charset="0"/>
                                 </a:rPr>
                                 <m:t>𝑅</m:t>
@@ -9231,7 +9232,7 @@
                             </m:e>
                             <m:sub>
                               <m:r>
-                                <a:rPr lang="en-US" b="0" i="1" smtClean="0">
+                                <a:rPr lang="en-US" sz="2800" b="0" i="1" smtClean="0">
                                   <a:latin typeface="Cambria Math" panose="02040503050406030204" pitchFamily="18" charset="0"/>
                                   <a:ea typeface="Cambria Math" panose="02040503050406030204" pitchFamily="18" charset="0"/>
                                 </a:rPr>
@@ -9242,7 +9243,7 @@
                         </m:oMath>
                       </m:oMathPara>
                     </a14:m>
-                    <a:endParaRPr lang="en-US" dirty="0"/>
+                    <a:endParaRPr lang="en-US" sz="2800" dirty="0"/>
                   </a:p>
                 </p:txBody>
               </p:sp>
@@ -9264,16 +9265,16 @@
                 </p:nvSpPr>
                 <p:spPr>
                   <a:xfrm>
-                    <a:off x="-175341" y="1373945"/>
-                    <a:ext cx="500393" cy="276999"/>
+                    <a:off x="-258904" y="1209563"/>
+                    <a:ext cx="780022" cy="430887"/>
                   </a:xfrm>
                   <a:prstGeom prst="rect">
                     <a:avLst/>
                   </a:prstGeom>
                   <a:blipFill>
-                    <a:blip r:embed="rId6"/>
+                    <a:blip r:embed="rId4"/>
                     <a:stretch>
-                      <a:fillRect l="-10976" r="-4878" b="-15217"/>
+                      <a:fillRect/>
                     </a:stretch>
                   </a:blipFill>
                 </p:spPr>
@@ -9308,8 +9309,8 @@
                 </p:nvSpPr>
                 <p:spPr>
                   <a:xfrm>
-                    <a:off x="-214278" y="3834206"/>
-                    <a:ext cx="431528" cy="276999"/>
+                    <a:off x="-336086" y="3834450"/>
+                    <a:ext cx="672172" cy="430887"/>
                   </a:xfrm>
                   <a:prstGeom prst="rect">
                     <a:avLst/>
@@ -9332,14 +9333,14 @@
                           <m:sSub>
                             <m:sSubPr>
                               <m:ctrlPr>
-                                <a:rPr lang="en-US" i="1" smtClean="0">
+                                <a:rPr lang="en-US" sz="2800" i="1" smtClean="0">
                                   <a:latin typeface="Cambria Math" panose="02040503050406030204" pitchFamily="18" charset="0"/>
                                 </a:rPr>
                               </m:ctrlPr>
                             </m:sSubPr>
                             <m:e>
                               <m:r>
-                                <a:rPr lang="en-US" b="0" i="1" smtClean="0">
+                                <a:rPr lang="en-US" sz="2800" b="0" i="1" smtClean="0">
                                   <a:latin typeface="Cambria Math" panose="02040503050406030204" pitchFamily="18" charset="0"/>
                                 </a:rPr>
                                 <m:t>𝐼</m:t>
@@ -9347,7 +9348,7 @@
                             </m:e>
                             <m:sub>
                               <m:r>
-                                <a:rPr lang="en-US" b="0" i="1" smtClean="0">
+                                <a:rPr lang="en-US" sz="2800" b="0" i="1" smtClean="0">
                                   <a:latin typeface="Cambria Math" panose="02040503050406030204" pitchFamily="18" charset="0"/>
                                   <a:ea typeface="Cambria Math" panose="02040503050406030204" pitchFamily="18" charset="0"/>
                                 </a:rPr>
@@ -9358,7 +9359,7 @@
                         </m:oMath>
                       </m:oMathPara>
                     </a14:m>
-                    <a:endParaRPr lang="en-US" dirty="0"/>
+                    <a:endParaRPr lang="en-US" sz="2800" dirty="0"/>
                   </a:p>
                 </p:txBody>
               </p:sp>
@@ -9380,16 +9381,16 @@
                 </p:nvSpPr>
                 <p:spPr>
                   <a:xfrm>
-                    <a:off x="-214278" y="3834206"/>
-                    <a:ext cx="431528" cy="276999"/>
+                    <a:off x="-336086" y="3834450"/>
+                    <a:ext cx="672172" cy="430887"/>
                   </a:xfrm>
                   <a:prstGeom prst="rect">
                     <a:avLst/>
                   </a:prstGeom>
                   <a:blipFill>
-                    <a:blip r:embed="rId7"/>
+                    <a:blip r:embed="rId5"/>
                     <a:stretch>
-                      <a:fillRect l="-14085" r="-5634" b="-17778"/>
+                      <a:fillRect/>
                     </a:stretch>
                   </a:blipFill>
                 </p:spPr>
@@ -9444,7 +9445,7 @@
               <p:nvPr/>
             </p:nvPicPr>
             <p:blipFill>
-              <a:blip r:embed="rId8">
+              <a:blip r:embed="rId6">
                 <a:extLst>
                   <a:ext uri="{28A0092B-C50C-407E-A947-70E740481C1C}">
                     <a14:useLocalDpi xmlns:a14="http://schemas.microsoft.com/office/drawing/2010/main" val="0"/>
@@ -9479,7 +9480,7 @@
               <p:nvPr/>
             </p:nvPicPr>
             <p:blipFill>
-              <a:blip r:embed="rId8">
+              <a:blip r:embed="rId6">
                 <a:extLst>
                   <a:ext uri="{28A0092B-C50C-407E-A947-70E740481C1C}">
                     <a14:useLocalDpi xmlns:a14="http://schemas.microsoft.com/office/drawing/2010/main" val="0"/>
@@ -9514,7 +9515,7 @@
               <p:nvPr/>
             </p:nvPicPr>
             <p:blipFill>
-              <a:blip r:embed="rId8">
+              <a:blip r:embed="rId6">
                 <a:extLst>
                   <a:ext uri="{28A0092B-C50C-407E-A947-70E740481C1C}">
                     <a14:useLocalDpi xmlns:a14="http://schemas.microsoft.com/office/drawing/2010/main" val="0"/>
@@ -9550,7 +9551,7 @@
             <p:nvPr/>
           </p:nvPicPr>
           <p:blipFill>
-            <a:blip r:embed="rId9">
+            <a:blip r:embed="rId7">
               <a:extLst>
                 <a:ext uri="{28A0092B-C50C-407E-A947-70E740481C1C}">
                   <a14:useLocalDpi xmlns:a14="http://schemas.microsoft.com/office/drawing/2010/main" val="0"/>
@@ -9621,10 +9622,10 @@
         </p:nvGrpSpPr>
         <p:grpSpPr>
           <a:xfrm>
-            <a:off x="43106" y="1686625"/>
-            <a:ext cx="11927058" cy="2508561"/>
-            <a:chOff x="43106" y="1686625"/>
-            <a:chExt cx="11927058" cy="2508561"/>
+            <a:off x="43106" y="1250751"/>
+            <a:ext cx="11927058" cy="3213047"/>
+            <a:chOff x="43106" y="1250751"/>
+            <a:chExt cx="11927058" cy="3213047"/>
           </a:xfrm>
         </p:grpSpPr>
         <p:grpSp>
@@ -9641,10 +9642,10 @@
           </p:nvGrpSpPr>
           <p:grpSpPr>
             <a:xfrm>
-              <a:off x="1100106" y="1686625"/>
-              <a:ext cx="10428538" cy="2508561"/>
-              <a:chOff x="1100106" y="1686625"/>
-              <a:chExt cx="10428538" cy="2508561"/>
+              <a:off x="1100106" y="1250751"/>
+              <a:ext cx="10484017" cy="3213047"/>
+              <a:chOff x="1100106" y="1250751"/>
+              <a:chExt cx="10484017" cy="3213047"/>
             </a:xfrm>
           </p:grpSpPr>
           <p:cxnSp>
@@ -9708,8 +9709,8 @@
             </p:nvSpPr>
             <p:spPr>
               <a:xfrm>
-                <a:off x="1549467" y="2309919"/>
-                <a:ext cx="2199108" cy="1412865"/>
+                <a:off x="1348662" y="2309919"/>
+                <a:ext cx="2399914" cy="1412865"/>
               </a:xfrm>
               <a:prstGeom prst="rect">
                 <a:avLst/>
@@ -9748,10 +9749,12 @@
               <a:p>
                 <a:pPr algn="ctr"/>
                 <a:r>
-                  <a:rPr lang="en-US" sz="1600" dirty="0">
+                  <a:rPr lang="en-US" sz="2600" dirty="0">
                     <a:solidFill>
                       <a:schemeClr val="tx1"/>
                     </a:solidFill>
+                    <a:latin typeface="Arial" panose="020B0604020202020204" pitchFamily="34" charset="0"/>
+                    <a:cs typeface="Arial" panose="020B0604020202020204" pitchFamily="34" charset="0"/>
                   </a:rPr>
                   <a:t>Decomposition Network</a:t>
                 </a:r>
@@ -9812,10 +9815,12 @@
               <a:p>
                 <a:pPr algn="ctr"/>
                 <a:r>
-                  <a:rPr lang="en-US" sz="1600" dirty="0">
+                  <a:rPr lang="en-US" sz="2600" dirty="0">
                     <a:solidFill>
                       <a:schemeClr val="tx1"/>
                     </a:solidFill>
+                    <a:latin typeface="Arial" panose="020B0604020202020204" pitchFamily="34" charset="0"/>
+                    <a:cs typeface="Arial" panose="020B0604020202020204" pitchFamily="34" charset="0"/>
                   </a:rPr>
                   <a:t>Illumination Adjustment Network</a:t>
                 </a:r>
@@ -9838,8 +9843,8 @@
                 </p:nvSpPr>
                 <p:spPr>
                   <a:xfrm>
-                    <a:off x="4253355" y="3918187"/>
-                    <a:ext cx="431528" cy="276999"/>
+                    <a:off x="4387991" y="3971355"/>
+                    <a:ext cx="766877" cy="492443"/>
                   </a:xfrm>
                   <a:prstGeom prst="rect">
                     <a:avLst/>
@@ -9862,14 +9867,14 @@
                           <m:sSub>
                             <m:sSubPr>
                               <m:ctrlPr>
-                                <a:rPr lang="en-US" i="1" smtClean="0">
+                                <a:rPr lang="en-US" sz="3200" i="1" smtClean="0">
                                   <a:latin typeface="Cambria Math" panose="02040503050406030204" pitchFamily="18" charset="0"/>
                                 </a:rPr>
                               </m:ctrlPr>
                             </m:sSubPr>
                             <m:e>
                               <m:r>
-                                <a:rPr lang="en-US" b="0" i="1" smtClean="0">
+                                <a:rPr lang="en-US" sz="3200" b="0" i="1" smtClean="0">
                                   <a:latin typeface="Cambria Math" panose="02040503050406030204" pitchFamily="18" charset="0"/>
                                 </a:rPr>
                                 <m:t>𝐼</m:t>
@@ -9877,7 +9882,7 @@
                             </m:e>
                             <m:sub>
                               <m:r>
-                                <a:rPr lang="en-US" b="0" i="1" smtClean="0">
+                                <a:rPr lang="en-US" sz="3200" b="0" i="1" smtClean="0">
                                   <a:latin typeface="Cambria Math" panose="02040503050406030204" pitchFamily="18" charset="0"/>
                                   <a:ea typeface="Cambria Math" panose="02040503050406030204" pitchFamily="18" charset="0"/>
                                 </a:rPr>
@@ -9888,7 +9893,7 @@
                         </m:oMath>
                       </m:oMathPara>
                     </a14:m>
-                    <a:endParaRPr lang="en-US" dirty="0"/>
+                    <a:endParaRPr lang="en-US" sz="3200" dirty="0"/>
                   </a:p>
                 </p:txBody>
               </p:sp>
@@ -9910,16 +9915,16 @@
                 </p:nvSpPr>
                 <p:spPr>
                   <a:xfrm>
-                    <a:off x="4253355" y="3918187"/>
-                    <a:ext cx="431528" cy="276999"/>
+                    <a:off x="4387991" y="3971355"/>
+                    <a:ext cx="766877" cy="492443"/>
                   </a:xfrm>
                   <a:prstGeom prst="rect">
                     <a:avLst/>
                   </a:prstGeom>
                   <a:blipFill>
-                    <a:blip r:embed="rId4"/>
+                    <a:blip r:embed="rId2"/>
                     <a:stretch>
-                      <a:fillRect l="-14085" r="-5634" b="-17778"/>
+                      <a:fillRect/>
                     </a:stretch>
                   </a:blipFill>
                 </p:spPr>
@@ -9954,8 +9959,8 @@
                 </p:nvSpPr>
                 <p:spPr>
                   <a:xfrm>
-                    <a:off x="4265075" y="1686625"/>
-                    <a:ext cx="500393" cy="276999"/>
+                    <a:off x="4326565" y="1250751"/>
+                    <a:ext cx="889731" cy="492443"/>
                   </a:xfrm>
                   <a:prstGeom prst="rect">
                     <a:avLst/>
@@ -9978,14 +9983,14 @@
                           <m:sSub>
                             <m:sSubPr>
                               <m:ctrlPr>
-                                <a:rPr lang="en-US" i="1" smtClean="0">
+                                <a:rPr lang="en-US" sz="3200" i="1" smtClean="0">
                                   <a:latin typeface="Cambria Math" panose="02040503050406030204" pitchFamily="18" charset="0"/>
                                 </a:rPr>
                               </m:ctrlPr>
                             </m:sSubPr>
                             <m:e>
                               <m:r>
-                                <a:rPr lang="en-US" b="0" i="1" smtClean="0">
+                                <a:rPr lang="en-US" sz="3200" b="0" i="1" smtClean="0">
                                   <a:latin typeface="Cambria Math" panose="02040503050406030204" pitchFamily="18" charset="0"/>
                                 </a:rPr>
                                 <m:t>𝑅</m:t>
@@ -9993,7 +9998,7 @@
                             </m:e>
                             <m:sub>
                               <m:r>
-                                <a:rPr lang="en-US" b="0" i="1" smtClean="0">
+                                <a:rPr lang="en-US" sz="3200" b="0" i="1" smtClean="0">
                                   <a:latin typeface="Cambria Math" panose="02040503050406030204" pitchFamily="18" charset="0"/>
                                   <a:ea typeface="Cambria Math" panose="02040503050406030204" pitchFamily="18" charset="0"/>
                                 </a:rPr>
@@ -10004,7 +10009,7 @@
                         </m:oMath>
                       </m:oMathPara>
                     </a14:m>
-                    <a:endParaRPr lang="en-US" dirty="0"/>
+                    <a:endParaRPr lang="en-US" sz="3200" dirty="0"/>
                   </a:p>
                 </p:txBody>
               </p:sp>
@@ -10026,16 +10031,16 @@
                 </p:nvSpPr>
                 <p:spPr>
                   <a:xfrm>
-                    <a:off x="4265075" y="1686625"/>
-                    <a:ext cx="500393" cy="276999"/>
+                    <a:off x="4326565" y="1250751"/>
+                    <a:ext cx="889731" cy="492443"/>
                   </a:xfrm>
                   <a:prstGeom prst="rect">
                     <a:avLst/>
                   </a:prstGeom>
                   <a:blipFill>
-                    <a:blip r:embed="rId5"/>
+                    <a:blip r:embed="rId3"/>
                     <a:stretch>
-                      <a:fillRect l="-12195" r="-4878" b="-17778"/>
+                      <a:fillRect/>
                     </a:stretch>
                   </a:blipFill>
                 </p:spPr>
@@ -10068,10 +10073,10 @@
             </p:nvGrpSpPr>
             <p:grpSpPr>
               <a:xfrm>
-                <a:off x="8406617" y="2272859"/>
-                <a:ext cx="907536" cy="1109855"/>
-                <a:chOff x="8406617" y="2252221"/>
-                <a:chExt cx="907536" cy="1109855"/>
+                <a:off x="8406617" y="2058274"/>
+                <a:ext cx="907536" cy="1324440"/>
+                <a:chOff x="8406617" y="2037636"/>
+                <a:chExt cx="907536" cy="1324440"/>
               </a:xfrm>
             </p:grpSpPr>
             <p:pic>
@@ -10089,7 +10094,7 @@
                 <p:nvPr/>
               </p:nvPicPr>
               <p:blipFill>
-                <a:blip r:embed="rId6"/>
+                <a:blip r:embed="rId4"/>
                 <a:stretch>
                   <a:fillRect/>
                 </a:stretch>
@@ -10120,8 +10125,8 @@
                   </p:nvSpPr>
                   <p:spPr>
                     <a:xfrm>
-                      <a:off x="8741282" y="2252221"/>
-                      <a:ext cx="238206" cy="276999"/>
+                      <a:off x="8637609" y="2037636"/>
+                      <a:ext cx="423065" cy="492443"/>
                     </a:xfrm>
                     <a:prstGeom prst="rect">
                       <a:avLst/>
@@ -10144,14 +10149,14 @@
                             <m:sSub>
                               <m:sSubPr>
                                 <m:ctrlPr>
-                                  <a:rPr lang="en-US" i="1" smtClean="0">
+                                  <a:rPr lang="en-US" sz="3200" i="1" smtClean="0">
                                     <a:latin typeface="Cambria Math" panose="02040503050406030204" pitchFamily="18" charset="0"/>
                                   </a:rPr>
                                 </m:ctrlPr>
                               </m:sSubPr>
                               <m:e>
                                 <m:r>
-                                  <a:rPr lang="en-US" b="0" i="1" smtClean="0">
+                                  <a:rPr lang="en-US" sz="3200" b="0" i="1" smtClean="0">
                                     <a:latin typeface="Cambria Math" panose="02040503050406030204" pitchFamily="18" charset="0"/>
                                   </a:rPr>
                                   <m:t>𝐼</m:t>
@@ -10159,7 +10164,7 @@
                               </m:e>
                               <m:sub>
                                 <m:r>
-                                  <a:rPr lang="en-US" i="1" smtClean="0">
+                                  <a:rPr lang="en-US" sz="3200" i="1" smtClean="0">
                                     <a:latin typeface="Cambria Math" panose="02040503050406030204" pitchFamily="18" charset="0"/>
                                     <a:ea typeface="Cambria Math" panose="02040503050406030204" pitchFamily="18" charset="0"/>
                                   </a:rPr>
@@ -10170,7 +10175,7 @@
                           </m:oMath>
                         </m:oMathPara>
                       </a14:m>
-                      <a:endParaRPr lang="en-US" dirty="0"/>
+                      <a:endParaRPr lang="en-US" sz="3200" dirty="0"/>
                     </a:p>
                   </p:txBody>
                 </p:sp>
@@ -10192,16 +10197,16 @@
                   </p:nvSpPr>
                   <p:spPr>
                     <a:xfrm>
-                      <a:off x="8741282" y="2252221"/>
-                      <a:ext cx="238206" cy="276999"/>
+                      <a:off x="8637609" y="2037636"/>
+                      <a:ext cx="423065" cy="492443"/>
                     </a:xfrm>
                     <a:prstGeom prst="rect">
                       <a:avLst/>
                     </a:prstGeom>
                     <a:blipFill>
-                      <a:blip r:embed="rId11"/>
+                      <a:blip r:embed="rId5"/>
                       <a:stretch>
-                        <a:fillRect l="-25641" r="-10256" b="-17778"/>
+                        <a:fillRect/>
                       </a:stretch>
                     </a:blipFill>
                   </p:spPr>
@@ -10239,7 +10244,7 @@
             <p:spPr>
               <a:xfrm>
                 <a:off x="1100106" y="3016352"/>
-                <a:ext cx="449361" cy="0"/>
+                <a:ext cx="248556" cy="0"/>
               </a:xfrm>
               <a:prstGeom prst="straightConnector1">
                 <a:avLst/>
@@ -10284,8 +10289,8 @@
             </p:nvCxnSpPr>
             <p:spPr>
               <a:xfrm flipV="1">
-                <a:off x="3748575" y="2586228"/>
-                <a:ext cx="517120" cy="430124"/>
+                <a:off x="3748576" y="2586228"/>
+                <a:ext cx="517119" cy="430124"/>
               </a:xfrm>
               <a:prstGeom prst="bentConnector3">
                 <a:avLst>
@@ -10332,8 +10337,8 @@
             </p:nvCxnSpPr>
             <p:spPr>
               <a:xfrm>
-                <a:off x="3748575" y="3016352"/>
-                <a:ext cx="517120" cy="473902"/>
+                <a:off x="3748576" y="3016352"/>
+                <a:ext cx="517119" cy="473902"/>
               </a:xfrm>
               <a:prstGeom prst="bentConnector3">
                 <a:avLst>
@@ -10793,8 +10798,8 @@
               </a:fontRef>
             </p:style>
           </p:cxnSp>
-          <mc:AlternateContent xmlns:mc="http://schemas.openxmlformats.org/markup-compatibility/2006">
-            <mc:Choice xmlns:a14="http://schemas.microsoft.com/office/drawing/2010/main" Requires="a14">
+          <mc:AlternateContent xmlns:mc="http://schemas.openxmlformats.org/markup-compatibility/2006" xmlns:a14="http://schemas.microsoft.com/office/drawing/2010/main">
+            <mc:Choice Requires="a14">
               <p:sp>
                 <p:nvSpPr>
                   <p:cNvPr id="145" name="TextBox 144">
@@ -10809,8 +10814,8 @@
                 </p:nvSpPr>
                 <p:spPr>
                   <a:xfrm>
-                    <a:off x="11368344" y="2203759"/>
-                    <a:ext cx="160300" cy="285719"/>
+                    <a:off x="11297185" y="2020715"/>
+                    <a:ext cx="286938" cy="508024"/>
                   </a:xfrm>
                   <a:prstGeom prst="rect">
                     <a:avLst/>
@@ -10831,7 +10836,7 @@
                         </m:oMathParaPr>
                         <m:oMath xmlns:m="http://schemas.openxmlformats.org/officeDocument/2006/math">
                           <m:r>
-                            <a:rPr lang="en-US" b="0" i="1" smtClean="0">
+                            <a:rPr lang="en-US" sz="3200" b="0" i="1" smtClean="0">
                               <a:latin typeface="Cambria Math" panose="02040503050406030204" pitchFamily="18" charset="0"/>
                             </a:rPr>
                             <m:t>Ŝ</m:t>
@@ -10839,12 +10844,12 @@
                         </m:oMath>
                       </m:oMathPara>
                     </a14:m>
-                    <a:endParaRPr lang="en-US" dirty="0"/>
+                    <a:endParaRPr lang="en-US" sz="3200" dirty="0"/>
                   </a:p>
                 </p:txBody>
               </p:sp>
             </mc:Choice>
-            <mc:Fallback>
+            <mc:Fallback xmlns="">
               <p:sp>
                 <p:nvSpPr>
                   <p:cNvPr id="145" name="TextBox 144">
@@ -10861,16 +10866,16 @@
                 </p:nvSpPr>
                 <p:spPr>
                   <a:xfrm>
-                    <a:off x="11368344" y="2203759"/>
-                    <a:ext cx="160300" cy="285719"/>
+                    <a:off x="11297185" y="2020715"/>
+                    <a:ext cx="286938" cy="508024"/>
                   </a:xfrm>
                   <a:prstGeom prst="rect">
                     <a:avLst/>
                   </a:prstGeom>
                   <a:blipFill>
-                    <a:blip r:embed="rId12"/>
+                    <a:blip r:embed="rId6"/>
                     <a:stretch>
-                      <a:fillRect l="-50000" t="-13043" r="-53846" b="-15217"/>
+                      <a:fillRect/>
                     </a:stretch>
                   </a:blipFill>
                 </p:spPr>
@@ -10904,10 +10909,10 @@
           </p:nvGrpSpPr>
           <p:grpSpPr>
             <a:xfrm>
-              <a:off x="43106" y="2267855"/>
-              <a:ext cx="1064198" cy="1184633"/>
-              <a:chOff x="603356" y="2792004"/>
-              <a:chExt cx="1064198" cy="1184633"/>
+              <a:off x="43106" y="2116496"/>
+              <a:ext cx="1064198" cy="1335992"/>
+              <a:chOff x="603356" y="2640645"/>
+              <a:chExt cx="1064198" cy="1335992"/>
             </a:xfrm>
           </p:grpSpPr>
           <p:pic>
@@ -10925,7 +10930,7 @@
               <p:nvPr/>
             </p:nvPicPr>
             <p:blipFill>
-              <a:blip r:embed="rId13"/>
+              <a:blip r:embed="rId7"/>
               <a:stretch>
                 <a:fillRect/>
               </a:stretch>
@@ -10955,7 +10960,7 @@
               <p:nvPr/>
             </p:nvPicPr>
             <p:blipFill>
-              <a:blip r:embed="rId13"/>
+              <a:blip r:embed="rId7"/>
               <a:stretch>
                 <a:fillRect/>
               </a:stretch>
@@ -10986,8 +10991,8 @@
                 </p:nvSpPr>
                 <p:spPr>
                   <a:xfrm>
-                    <a:off x="1050464" y="2792004"/>
-                    <a:ext cx="172804" cy="276999"/>
+                    <a:off x="1040627" y="2640645"/>
+                    <a:ext cx="309379" cy="492443"/>
                   </a:xfrm>
                   <a:prstGeom prst="rect">
                     <a:avLst/>
@@ -11008,7 +11013,7 @@
                         </m:oMathParaPr>
                         <m:oMath xmlns:m="http://schemas.openxmlformats.org/officeDocument/2006/math">
                           <m:r>
-                            <a:rPr lang="en-US" b="0" i="1" smtClean="0">
+                            <a:rPr lang="en-US" sz="3200" b="0" i="1" smtClean="0">
                               <a:latin typeface="Cambria Math" panose="02040503050406030204" pitchFamily="18" charset="0"/>
                             </a:rPr>
                             <m:t>𝑆</m:t>
@@ -11038,16 +11043,16 @@
                 </p:nvSpPr>
                 <p:spPr>
                   <a:xfrm>
-                    <a:off x="1050464" y="2792004"/>
-                    <a:ext cx="172804" cy="276999"/>
+                    <a:off x="1040627" y="2640645"/>
+                    <a:ext cx="309379" cy="492443"/>
                   </a:xfrm>
                   <a:prstGeom prst="rect">
                     <a:avLst/>
                   </a:prstGeom>
                   <a:blipFill>
-                    <a:blip r:embed="rId14"/>
+                    <a:blip r:embed="rId8"/>
                     <a:stretch>
-                      <a:fillRect l="-31034" r="-31034" b="-8889"/>
+                      <a:fillRect/>
                     </a:stretch>
                   </a:blipFill>
                 </p:spPr>
@@ -11081,7 +11086,7 @@
               <p:nvPr/>
             </p:nvPicPr>
             <p:blipFill>
-              <a:blip r:embed="rId15"/>
+              <a:blip r:embed="rId9"/>
               <a:srcRect l="415" t="959" r="840" b="713"/>
               <a:stretch/>
             </p:blipFill>
@@ -11131,7 +11136,7 @@
               <p:nvPr/>
             </p:nvPicPr>
             <p:blipFill>
-              <a:blip r:embed="rId16">
+              <a:blip r:embed="rId10">
                 <a:extLst>
                   <a:ext uri="{28A0092B-C50C-407E-A947-70E740481C1C}">
                     <a14:useLocalDpi xmlns:a14="http://schemas.microsoft.com/office/drawing/2010/main" val="0"/>
@@ -11166,7 +11171,7 @@
               <p:nvPr/>
             </p:nvPicPr>
             <p:blipFill>
-              <a:blip r:embed="rId16">
+              <a:blip r:embed="rId10">
                 <a:extLst>
                   <a:ext uri="{28A0092B-C50C-407E-A947-70E740481C1C}">
                     <a14:useLocalDpi xmlns:a14="http://schemas.microsoft.com/office/drawing/2010/main" val="0"/>
@@ -11201,7 +11206,7 @@
               <p:nvPr/>
             </p:nvPicPr>
             <p:blipFill>
-              <a:blip r:embed="rId16">
+              <a:blip r:embed="rId10">
                 <a:extLst>
                   <a:ext uri="{28A0092B-C50C-407E-A947-70E740481C1C}">
                     <a14:useLocalDpi xmlns:a14="http://schemas.microsoft.com/office/drawing/2010/main" val="0"/>
@@ -11237,7 +11242,7 @@
             <p:nvPr/>
           </p:nvPicPr>
           <p:blipFill>
-            <a:blip r:embed="rId17">
+            <a:blip r:embed="rId11">
               <a:extLst>
                 <a:ext uri="{28A0092B-C50C-407E-A947-70E740481C1C}">
                   <a14:useLocalDpi xmlns:a14="http://schemas.microsoft.com/office/drawing/2010/main" val="0"/>
@@ -11292,7 +11297,7 @@
               <p:nvPr/>
             </p:nvPicPr>
             <p:blipFill>
-              <a:blip r:embed="rId18"/>
+              <a:blip r:embed="rId12"/>
               <a:srcRect l="616" t="1379" r="1103" b="1509"/>
               <a:stretch/>
             </p:blipFill>
@@ -11321,7 +11326,7 @@
               <p:nvPr/>
             </p:nvPicPr>
             <p:blipFill>
-              <a:blip r:embed="rId18"/>
+              <a:blip r:embed="rId12"/>
               <a:srcRect l="616" t="1379" r="1103" b="1509"/>
               <a:stretch/>
             </p:blipFill>
@@ -11350,7 +11355,7 @@
               <p:nvPr/>
             </p:nvPicPr>
             <p:blipFill>
-              <a:blip r:embed="rId18"/>
+              <a:blip r:embed="rId12"/>
               <a:srcRect l="616" t="1379" r="1103" b="1509"/>
               <a:stretch/>
             </p:blipFill>
@@ -11370,6 +11375,1879 @@
     <p:extLst>
       <p:ext uri="{BB962C8B-B14F-4D97-AF65-F5344CB8AC3E}">
         <p14:creationId xmlns:p14="http://schemas.microsoft.com/office/powerpoint/2010/main" val="875738466"/>
+      </p:ext>
+    </p:extLst>
+  </p:cSld>
+  <p:clrMapOvr>
+    <a:masterClrMapping/>
+  </p:clrMapOvr>
+</p:sld>
+</file>
+
+<file path=ppt/slides/slide4.xml><?xml version="1.0" encoding="utf-8"?>
+<p:sld xmlns:a="http://schemas.openxmlformats.org/drawingml/2006/main" xmlns:r="http://schemas.openxmlformats.org/officeDocument/2006/relationships" xmlns:p="http://schemas.openxmlformats.org/presentationml/2006/main">
+  <p:cSld>
+    <p:spTree>
+      <p:nvGrpSpPr>
+        <p:cNvPr id="1" name="">
+          <a:extLst>
+            <a:ext uri="{FF2B5EF4-FFF2-40B4-BE49-F238E27FC236}">
+              <a16:creationId xmlns:a16="http://schemas.microsoft.com/office/drawing/2014/main" id="{C35122D7-9B8B-5094-9A6F-99CD57F44768}"/>
+            </a:ext>
+          </a:extLst>
+        </p:cNvPr>
+        <p:cNvGrpSpPr/>
+        <p:nvPr/>
+      </p:nvGrpSpPr>
+      <p:grpSpPr>
+        <a:xfrm>
+          <a:off x="0" y="0"/>
+          <a:ext cx="0" cy="0"/>
+          <a:chOff x="0" y="0"/>
+          <a:chExt cx="0" cy="0"/>
+        </a:xfrm>
+      </p:grpSpPr>
+      <p:grpSp>
+        <p:nvGrpSpPr>
+          <p:cNvPr id="22" name="Group 21">
+            <a:extLst>
+              <a:ext uri="{FF2B5EF4-FFF2-40B4-BE49-F238E27FC236}">
+                <a16:creationId xmlns:a16="http://schemas.microsoft.com/office/drawing/2014/main" id="{981B2541-06A6-8336-EF57-0DB5DBD2F1D8}"/>
+              </a:ext>
+            </a:extLst>
+          </p:cNvPr>
+          <p:cNvGrpSpPr/>
+          <p:nvPr/>
+        </p:nvGrpSpPr>
+        <p:grpSpPr>
+          <a:xfrm>
+            <a:off x="43106" y="1250751"/>
+            <a:ext cx="11927058" cy="3213047"/>
+            <a:chOff x="43106" y="1250751"/>
+            <a:chExt cx="11927058" cy="3213047"/>
+          </a:xfrm>
+        </p:grpSpPr>
+        <p:grpSp>
+          <p:nvGrpSpPr>
+            <p:cNvPr id="146" name="Group 145">
+              <a:extLst>
+                <a:ext uri="{FF2B5EF4-FFF2-40B4-BE49-F238E27FC236}">
+                  <a16:creationId xmlns:a16="http://schemas.microsoft.com/office/drawing/2014/main" id="{4AC43C61-E578-9224-9D9E-A3C28F009620}"/>
+                </a:ext>
+              </a:extLst>
+            </p:cNvPr>
+            <p:cNvGrpSpPr/>
+            <p:nvPr/>
+          </p:nvGrpSpPr>
+          <p:grpSpPr>
+            <a:xfrm>
+              <a:off x="1100106" y="1250751"/>
+              <a:ext cx="10484017" cy="3213047"/>
+              <a:chOff x="1100106" y="1250751"/>
+              <a:chExt cx="10484017" cy="3213047"/>
+            </a:xfrm>
+          </p:grpSpPr>
+          <p:cxnSp>
+            <p:nvCxnSpPr>
+              <p:cNvPr id="86" name="Connector: Elbow 33">
+                <a:extLst>
+                  <a:ext uri="{FF2B5EF4-FFF2-40B4-BE49-F238E27FC236}">
+                    <a16:creationId xmlns:a16="http://schemas.microsoft.com/office/drawing/2014/main" id="{DD2A09FE-5844-A85C-7AD8-9AB60F04DCED}"/>
+                  </a:ext>
+                </a:extLst>
+              </p:cNvPr>
+              <p:cNvCxnSpPr>
+                <a:cxnSpLocks/>
+                <a:stCxn id="20" idx="3"/>
+              </p:cNvCxnSpPr>
+              <p:nvPr/>
+            </p:nvCxnSpPr>
+            <p:spPr>
+              <a:xfrm>
+                <a:off x="5240965" y="2511480"/>
+                <a:ext cx="449095" cy="375407"/>
+              </a:xfrm>
+              <a:prstGeom prst="bentConnector3">
+                <a:avLst>
+                  <a:gd name="adj1" fmla="val 50000"/>
+                </a:avLst>
+              </a:prstGeom>
+              <a:ln w="3175">
+                <a:solidFill>
+                  <a:schemeClr val="tx1"/>
+                </a:solidFill>
+                <a:tailEnd type="triangle"/>
+              </a:ln>
+            </p:spPr>
+            <p:style>
+              <a:lnRef idx="2">
+                <a:schemeClr val="accent1"/>
+              </a:lnRef>
+              <a:fillRef idx="0">
+                <a:schemeClr val="accent1"/>
+              </a:fillRef>
+              <a:effectRef idx="1">
+                <a:schemeClr val="accent1"/>
+              </a:effectRef>
+              <a:fontRef idx="minor">
+                <a:schemeClr val="tx1"/>
+              </a:fontRef>
+            </p:style>
+          </p:cxnSp>
+          <p:sp>
+            <p:nvSpPr>
+              <p:cNvPr id="7" name="Rectangle 6">
+                <a:extLst>
+                  <a:ext uri="{FF2B5EF4-FFF2-40B4-BE49-F238E27FC236}">
+                    <a16:creationId xmlns:a16="http://schemas.microsoft.com/office/drawing/2014/main" id="{38731E88-13EA-9A44-4DD4-6EF78F1BEDEE}"/>
+                  </a:ext>
+                </a:extLst>
+              </p:cNvPr>
+              <p:cNvSpPr/>
+              <p:nvPr/>
+            </p:nvSpPr>
+            <p:spPr>
+              <a:xfrm>
+                <a:off x="1348662" y="2309919"/>
+                <a:ext cx="2399914" cy="1412865"/>
+              </a:xfrm>
+              <a:prstGeom prst="rect">
+                <a:avLst/>
+              </a:prstGeom>
+              <a:solidFill>
+                <a:schemeClr val="accent2">
+                  <a:lumMod val="40000"/>
+                  <a:lumOff val="60000"/>
+                </a:schemeClr>
+              </a:solidFill>
+              <a:ln w="3175">
+                <a:solidFill>
+                  <a:schemeClr val="accent1"/>
+                </a:solidFill>
+              </a:ln>
+            </p:spPr>
+            <p:style>
+              <a:lnRef idx="2">
+                <a:schemeClr val="accent1">
+                  <a:shade val="15000"/>
+                </a:schemeClr>
+              </a:lnRef>
+              <a:fillRef idx="1">
+                <a:schemeClr val="accent1"/>
+              </a:fillRef>
+              <a:effectRef idx="0">
+                <a:schemeClr val="accent1"/>
+              </a:effectRef>
+              <a:fontRef idx="minor">
+                <a:schemeClr val="lt1"/>
+              </a:fontRef>
+            </p:style>
+            <p:txBody>
+              <a:bodyPr vert="horz" rtlCol="0" anchor="ctr"/>
+              <a:lstStyle/>
+              <a:p>
+                <a:pPr algn="ctr"/>
+                <a:r>
+                  <a:rPr lang="en-US" sz="2300" dirty="0" err="1">
+                    <a:solidFill>
+                      <a:schemeClr val="tx1"/>
+                    </a:solidFill>
+                    <a:latin typeface="Arial" panose="020B0604020202020204" pitchFamily="34" charset="0"/>
+                    <a:cs typeface="Arial" panose="020B0604020202020204" pitchFamily="34" charset="0"/>
+                  </a:rPr>
+                  <a:t>Dekompozisyon</a:t>
+                </a:r>
+                <a:endParaRPr lang="en-US" sz="2300" dirty="0">
+                  <a:solidFill>
+                    <a:schemeClr val="tx1"/>
+                  </a:solidFill>
+                  <a:latin typeface="Arial" panose="020B0604020202020204" pitchFamily="34" charset="0"/>
+                  <a:cs typeface="Arial" panose="020B0604020202020204" pitchFamily="34" charset="0"/>
+                </a:endParaRPr>
+              </a:p>
+              <a:p>
+                <a:pPr algn="ctr"/>
+                <a:r>
+                  <a:rPr lang="en-US" sz="2300" dirty="0" err="1">
+                    <a:solidFill>
+                      <a:schemeClr val="tx1"/>
+                    </a:solidFill>
+                    <a:latin typeface="Arial" panose="020B0604020202020204" pitchFamily="34" charset="0"/>
+                    <a:cs typeface="Arial" panose="020B0604020202020204" pitchFamily="34" charset="0"/>
+                  </a:rPr>
+                  <a:t>Ağı</a:t>
+                </a:r>
+                <a:endParaRPr lang="en-US" sz="2300" dirty="0">
+                  <a:solidFill>
+                    <a:schemeClr val="tx1"/>
+                  </a:solidFill>
+                  <a:latin typeface="Arial" panose="020B0604020202020204" pitchFamily="34" charset="0"/>
+                  <a:cs typeface="Arial" panose="020B0604020202020204" pitchFamily="34" charset="0"/>
+                </a:endParaRPr>
+              </a:p>
+            </p:txBody>
+          </p:sp>
+          <p:sp>
+            <p:nvSpPr>
+              <p:cNvPr id="10" name="Rectangle 9">
+                <a:extLst>
+                  <a:ext uri="{FF2B5EF4-FFF2-40B4-BE49-F238E27FC236}">
+                    <a16:creationId xmlns:a16="http://schemas.microsoft.com/office/drawing/2014/main" id="{E9137291-B9F6-3F5F-04D3-919BBFF5317C}"/>
+                  </a:ext>
+                </a:extLst>
+              </p:cNvPr>
+              <p:cNvSpPr/>
+              <p:nvPr/>
+            </p:nvSpPr>
+            <p:spPr>
+              <a:xfrm>
+                <a:off x="5690060" y="2326313"/>
+                <a:ext cx="2199108" cy="1417320"/>
+              </a:xfrm>
+              <a:prstGeom prst="rect">
+                <a:avLst/>
+              </a:prstGeom>
+              <a:solidFill>
+                <a:schemeClr val="accent1">
+                  <a:lumMod val="20000"/>
+                  <a:lumOff val="80000"/>
+                </a:schemeClr>
+              </a:solidFill>
+              <a:ln w="3175">
+                <a:solidFill>
+                  <a:schemeClr val="accent1"/>
+                </a:solidFill>
+              </a:ln>
+            </p:spPr>
+            <p:style>
+              <a:lnRef idx="2">
+                <a:schemeClr val="accent1">
+                  <a:shade val="15000"/>
+                </a:schemeClr>
+              </a:lnRef>
+              <a:fillRef idx="1">
+                <a:schemeClr val="accent1"/>
+              </a:fillRef>
+              <a:effectRef idx="0">
+                <a:schemeClr val="accent1"/>
+              </a:effectRef>
+              <a:fontRef idx="minor">
+                <a:schemeClr val="lt1"/>
+              </a:fontRef>
+            </p:style>
+            <p:txBody>
+              <a:bodyPr vert="horz" rtlCol="0" anchor="ctr"/>
+              <a:lstStyle/>
+              <a:p>
+                <a:pPr algn="ctr"/>
+                <a:r>
+                  <a:rPr lang="en-US" sz="2300" dirty="0" err="1">
+                    <a:solidFill>
+                      <a:schemeClr val="tx1"/>
+                    </a:solidFill>
+                    <a:latin typeface="Arial" panose="020B0604020202020204" pitchFamily="34" charset="0"/>
+                    <a:cs typeface="Arial" panose="020B0604020202020204" pitchFamily="34" charset="0"/>
+                  </a:rPr>
+                  <a:t>Aydınlatma</a:t>
+                </a:r>
+                <a:endParaRPr lang="en-US" sz="2300" dirty="0">
+                  <a:solidFill>
+                    <a:schemeClr val="tx1"/>
+                  </a:solidFill>
+                  <a:latin typeface="Arial" panose="020B0604020202020204" pitchFamily="34" charset="0"/>
+                  <a:cs typeface="Arial" panose="020B0604020202020204" pitchFamily="34" charset="0"/>
+                </a:endParaRPr>
+              </a:p>
+              <a:p>
+                <a:pPr algn="ctr"/>
+                <a:r>
+                  <a:rPr lang="en-US" sz="2300" dirty="0" err="1">
+                    <a:solidFill>
+                      <a:schemeClr val="tx1"/>
+                    </a:solidFill>
+                    <a:latin typeface="Arial" panose="020B0604020202020204" pitchFamily="34" charset="0"/>
+                    <a:cs typeface="Arial" panose="020B0604020202020204" pitchFamily="34" charset="0"/>
+                  </a:rPr>
+                  <a:t>Düzenleme</a:t>
+                </a:r>
+                <a:endParaRPr lang="en-US" sz="2300" dirty="0">
+                  <a:solidFill>
+                    <a:schemeClr val="tx1"/>
+                  </a:solidFill>
+                  <a:latin typeface="Arial" panose="020B0604020202020204" pitchFamily="34" charset="0"/>
+                  <a:cs typeface="Arial" panose="020B0604020202020204" pitchFamily="34" charset="0"/>
+                </a:endParaRPr>
+              </a:p>
+              <a:p>
+                <a:pPr algn="ctr"/>
+                <a:r>
+                  <a:rPr lang="en-US" sz="2300" dirty="0" err="1">
+                    <a:solidFill>
+                      <a:schemeClr val="tx1"/>
+                    </a:solidFill>
+                    <a:latin typeface="Arial" panose="020B0604020202020204" pitchFamily="34" charset="0"/>
+                    <a:cs typeface="Arial" panose="020B0604020202020204" pitchFamily="34" charset="0"/>
+                  </a:rPr>
+                  <a:t>Ağı</a:t>
+                </a:r>
+                <a:endParaRPr lang="en-US" sz="2300" dirty="0">
+                  <a:solidFill>
+                    <a:schemeClr val="tx1"/>
+                  </a:solidFill>
+                  <a:latin typeface="Arial" panose="020B0604020202020204" pitchFamily="34" charset="0"/>
+                  <a:cs typeface="Arial" panose="020B0604020202020204" pitchFamily="34" charset="0"/>
+                </a:endParaRPr>
+              </a:p>
+            </p:txBody>
+          </p:sp>
+          <mc:AlternateContent xmlns:mc="http://schemas.openxmlformats.org/markup-compatibility/2006">
+            <mc:Choice xmlns:a14="http://schemas.microsoft.com/office/drawing/2010/main" Requires="a14">
+              <p:sp>
+                <p:nvSpPr>
+                  <p:cNvPr id="26" name="TextBox 25">
+                    <a:extLst>
+                      <a:ext uri="{FF2B5EF4-FFF2-40B4-BE49-F238E27FC236}">
+                        <a16:creationId xmlns:a16="http://schemas.microsoft.com/office/drawing/2014/main" id="{A6FDB8CC-51DF-64E7-383C-44191C979866}"/>
+                      </a:ext>
+                    </a:extLst>
+                  </p:cNvPr>
+                  <p:cNvSpPr txBox="1"/>
+                  <p:nvPr/>
+                </p:nvSpPr>
+                <p:spPr>
+                  <a:xfrm>
+                    <a:off x="4387991" y="3971355"/>
+                    <a:ext cx="766877" cy="492443"/>
+                  </a:xfrm>
+                  <a:prstGeom prst="rect">
+                    <a:avLst/>
+                  </a:prstGeom>
+                  <a:noFill/>
+                </p:spPr>
+                <p:txBody>
+                  <a:bodyPr wrap="none" lIns="0" tIns="0" rIns="0" bIns="0" rtlCol="0">
+                    <a:spAutoFit/>
+                  </a:bodyPr>
+                  <a:lstStyle/>
+                  <a:p>
+                    <a:pPr/>
+                    <a14:m>
+                      <m:oMathPara xmlns:m="http://schemas.openxmlformats.org/officeDocument/2006/math">
+                        <m:oMathParaPr>
+                          <m:jc m:val="centerGroup"/>
+                        </m:oMathParaPr>
+                        <m:oMath xmlns:m="http://schemas.openxmlformats.org/officeDocument/2006/math">
+                          <m:sSub>
+                            <m:sSubPr>
+                              <m:ctrlPr>
+                                <a:rPr lang="en-US" sz="3200" i="1" smtClean="0">
+                                  <a:latin typeface="Cambria Math" panose="02040503050406030204" pitchFamily="18" charset="0"/>
+                                </a:rPr>
+                              </m:ctrlPr>
+                            </m:sSubPr>
+                            <m:e>
+                              <m:r>
+                                <a:rPr lang="en-US" sz="3200" b="0" i="1" smtClean="0">
+                                  <a:latin typeface="Cambria Math" panose="02040503050406030204" pitchFamily="18" charset="0"/>
+                                </a:rPr>
+                                <m:t>𝐼</m:t>
+                              </m:r>
+                            </m:e>
+                            <m:sub>
+                              <m:r>
+                                <a:rPr lang="en-US" sz="3200" b="0" i="1" smtClean="0">
+                                  <a:latin typeface="Cambria Math" panose="02040503050406030204" pitchFamily="18" charset="0"/>
+                                  <a:ea typeface="Cambria Math" panose="02040503050406030204" pitchFamily="18" charset="0"/>
+                                </a:rPr>
+                                <m:t>𝑙𝑜𝑤</m:t>
+                              </m:r>
+                            </m:sub>
+                          </m:sSub>
+                        </m:oMath>
+                      </m:oMathPara>
+                    </a14:m>
+                    <a:endParaRPr lang="en-US" sz="3200" dirty="0"/>
+                  </a:p>
+                </p:txBody>
+              </p:sp>
+            </mc:Choice>
+            <mc:Fallback>
+              <p:sp>
+                <p:nvSpPr>
+                  <p:cNvPr id="26" name="TextBox 25">
+                    <a:extLst>
+                      <a:ext uri="{FF2B5EF4-FFF2-40B4-BE49-F238E27FC236}">
+                        <a16:creationId xmlns:a16="http://schemas.microsoft.com/office/drawing/2014/main" id="{A6FDB8CC-51DF-64E7-383C-44191C979866}"/>
+                      </a:ext>
+                    </a:extLst>
+                  </p:cNvPr>
+                  <p:cNvSpPr txBox="1">
+                    <a:spLocks noRot="1" noChangeAspect="1" noMove="1" noResize="1" noEditPoints="1" noAdjustHandles="1" noChangeArrowheads="1" noChangeShapeType="1" noTextEdit="1"/>
+                  </p:cNvSpPr>
+                  <p:nvPr/>
+                </p:nvSpPr>
+                <p:spPr>
+                  <a:xfrm>
+                    <a:off x="4387991" y="3971355"/>
+                    <a:ext cx="766877" cy="492443"/>
+                  </a:xfrm>
+                  <a:prstGeom prst="rect">
+                    <a:avLst/>
+                  </a:prstGeom>
+                  <a:blipFill>
+                    <a:blip r:embed="rId2"/>
+                    <a:stretch>
+                      <a:fillRect/>
+                    </a:stretch>
+                  </a:blipFill>
+                </p:spPr>
+                <p:txBody>
+                  <a:bodyPr/>
+                  <a:lstStyle/>
+                  <a:p>
+                    <a:r>
+                      <a:rPr lang="en-US">
+                        <a:noFill/>
+                      </a:rPr>
+                      <a:t> </a:t>
+                    </a:r>
+                  </a:p>
+                </p:txBody>
+              </p:sp>
+            </mc:Fallback>
+          </mc:AlternateContent>
+          <mc:AlternateContent xmlns:mc="http://schemas.openxmlformats.org/markup-compatibility/2006">
+            <mc:Choice xmlns:a14="http://schemas.microsoft.com/office/drawing/2010/main" Requires="a14">
+              <p:sp>
+                <p:nvSpPr>
+                  <p:cNvPr id="27" name="TextBox 26">
+                    <a:extLst>
+                      <a:ext uri="{FF2B5EF4-FFF2-40B4-BE49-F238E27FC236}">
+                        <a16:creationId xmlns:a16="http://schemas.microsoft.com/office/drawing/2014/main" id="{BBBF6E92-F350-F0BC-F82B-7BA6402843E9}"/>
+                      </a:ext>
+                    </a:extLst>
+                  </p:cNvPr>
+                  <p:cNvSpPr txBox="1"/>
+                  <p:nvPr/>
+                </p:nvSpPr>
+                <p:spPr>
+                  <a:xfrm>
+                    <a:off x="4326565" y="1250751"/>
+                    <a:ext cx="889731" cy="492443"/>
+                  </a:xfrm>
+                  <a:prstGeom prst="rect">
+                    <a:avLst/>
+                  </a:prstGeom>
+                  <a:noFill/>
+                </p:spPr>
+                <p:txBody>
+                  <a:bodyPr wrap="none" lIns="0" tIns="0" rIns="0" bIns="0" rtlCol="0">
+                    <a:spAutoFit/>
+                  </a:bodyPr>
+                  <a:lstStyle/>
+                  <a:p>
+                    <a:pPr/>
+                    <a14:m>
+                      <m:oMathPara xmlns:m="http://schemas.openxmlformats.org/officeDocument/2006/math">
+                        <m:oMathParaPr>
+                          <m:jc m:val="centerGroup"/>
+                        </m:oMathParaPr>
+                        <m:oMath xmlns:m="http://schemas.openxmlformats.org/officeDocument/2006/math">
+                          <m:sSub>
+                            <m:sSubPr>
+                              <m:ctrlPr>
+                                <a:rPr lang="en-US" sz="3200" i="1" smtClean="0">
+                                  <a:latin typeface="Cambria Math" panose="02040503050406030204" pitchFamily="18" charset="0"/>
+                                </a:rPr>
+                              </m:ctrlPr>
+                            </m:sSubPr>
+                            <m:e>
+                              <m:r>
+                                <a:rPr lang="en-US" sz="3200" b="0" i="1" smtClean="0">
+                                  <a:latin typeface="Cambria Math" panose="02040503050406030204" pitchFamily="18" charset="0"/>
+                                </a:rPr>
+                                <m:t>𝑅</m:t>
+                              </m:r>
+                            </m:e>
+                            <m:sub>
+                              <m:r>
+                                <a:rPr lang="en-US" sz="3200" b="0" i="1" smtClean="0">
+                                  <a:latin typeface="Cambria Math" panose="02040503050406030204" pitchFamily="18" charset="0"/>
+                                  <a:ea typeface="Cambria Math" panose="02040503050406030204" pitchFamily="18" charset="0"/>
+                                </a:rPr>
+                                <m:t>𝑙𝑜𝑤</m:t>
+                              </m:r>
+                            </m:sub>
+                          </m:sSub>
+                        </m:oMath>
+                      </m:oMathPara>
+                    </a14:m>
+                    <a:endParaRPr lang="en-US" sz="3200" dirty="0"/>
+                  </a:p>
+                </p:txBody>
+              </p:sp>
+            </mc:Choice>
+            <mc:Fallback>
+              <p:sp>
+                <p:nvSpPr>
+                  <p:cNvPr id="27" name="TextBox 26">
+                    <a:extLst>
+                      <a:ext uri="{FF2B5EF4-FFF2-40B4-BE49-F238E27FC236}">
+                        <a16:creationId xmlns:a16="http://schemas.microsoft.com/office/drawing/2014/main" id="{BBBF6E92-F350-F0BC-F82B-7BA6402843E9}"/>
+                      </a:ext>
+                    </a:extLst>
+                  </p:cNvPr>
+                  <p:cNvSpPr txBox="1">
+                    <a:spLocks noRot="1" noChangeAspect="1" noMove="1" noResize="1" noEditPoints="1" noAdjustHandles="1" noChangeArrowheads="1" noChangeShapeType="1" noTextEdit="1"/>
+                  </p:cNvSpPr>
+                  <p:nvPr/>
+                </p:nvSpPr>
+                <p:spPr>
+                  <a:xfrm>
+                    <a:off x="4326565" y="1250751"/>
+                    <a:ext cx="889731" cy="492443"/>
+                  </a:xfrm>
+                  <a:prstGeom prst="rect">
+                    <a:avLst/>
+                  </a:prstGeom>
+                  <a:blipFill>
+                    <a:blip r:embed="rId3"/>
+                    <a:stretch>
+                      <a:fillRect/>
+                    </a:stretch>
+                  </a:blipFill>
+                </p:spPr>
+                <p:txBody>
+                  <a:bodyPr/>
+                  <a:lstStyle/>
+                  <a:p>
+                    <a:r>
+                      <a:rPr lang="en-US">
+                        <a:noFill/>
+                      </a:rPr>
+                      <a:t> </a:t>
+                    </a:r>
+                  </a:p>
+                </p:txBody>
+              </p:sp>
+            </mc:Fallback>
+          </mc:AlternateContent>
+          <p:grpSp>
+            <p:nvGrpSpPr>
+              <p:cNvPr id="111" name="Group 110">
+                <a:extLst>
+                  <a:ext uri="{FF2B5EF4-FFF2-40B4-BE49-F238E27FC236}">
+                    <a16:creationId xmlns:a16="http://schemas.microsoft.com/office/drawing/2014/main" id="{8770A14F-0203-B4BB-39EC-FD48B42DD075}"/>
+                  </a:ext>
+                </a:extLst>
+              </p:cNvPr>
+              <p:cNvGrpSpPr/>
+              <p:nvPr/>
+            </p:nvGrpSpPr>
+            <p:grpSpPr>
+              <a:xfrm>
+                <a:off x="8406617" y="2058274"/>
+                <a:ext cx="907536" cy="1324440"/>
+                <a:chOff x="8406617" y="2037636"/>
+                <a:chExt cx="907536" cy="1324440"/>
+              </a:xfrm>
+            </p:grpSpPr>
+            <p:pic>
+              <p:nvPicPr>
+                <p:cNvPr id="30" name="Picture 29">
+                  <a:extLst>
+                    <a:ext uri="{FF2B5EF4-FFF2-40B4-BE49-F238E27FC236}">
+                      <a16:creationId xmlns:a16="http://schemas.microsoft.com/office/drawing/2014/main" id="{B2A52024-EFC1-C95E-EAEA-CBD6021137BF}"/>
+                    </a:ext>
+                  </a:extLst>
+                </p:cNvPr>
+                <p:cNvPicPr>
+                  <a:picLocks noChangeAspect="1"/>
+                </p:cNvPicPr>
+                <p:nvPr/>
+              </p:nvPicPr>
+              <p:blipFill>
+                <a:blip r:embed="rId4"/>
+                <a:stretch>
+                  <a:fillRect/>
+                </a:stretch>
+              </p:blipFill>
+              <p:spPr>
+                <a:xfrm>
+                  <a:off x="8406617" y="2667132"/>
+                  <a:ext cx="907536" cy="694944"/>
+                </a:xfrm>
+                <a:prstGeom prst="rect">
+                  <a:avLst/>
+                </a:prstGeom>
+              </p:spPr>
+            </p:pic>
+            <mc:AlternateContent xmlns:mc="http://schemas.openxmlformats.org/markup-compatibility/2006">
+              <mc:Choice xmlns:a14="http://schemas.microsoft.com/office/drawing/2010/main" Requires="a14">
+                <p:sp>
+                  <p:nvSpPr>
+                    <p:cNvPr id="31" name="TextBox 30">
+                      <a:extLst>
+                        <a:ext uri="{FF2B5EF4-FFF2-40B4-BE49-F238E27FC236}">
+                          <a16:creationId xmlns:a16="http://schemas.microsoft.com/office/drawing/2014/main" id="{2894BD9F-D702-273B-8192-FB59F692EDD9}"/>
+                        </a:ext>
+                      </a:extLst>
+                    </p:cNvPr>
+                    <p:cNvSpPr txBox="1"/>
+                    <p:nvPr/>
+                  </p:nvSpPr>
+                  <p:spPr>
+                    <a:xfrm>
+                      <a:off x="8637609" y="2037636"/>
+                      <a:ext cx="423065" cy="492443"/>
+                    </a:xfrm>
+                    <a:prstGeom prst="rect">
+                      <a:avLst/>
+                    </a:prstGeom>
+                    <a:noFill/>
+                  </p:spPr>
+                  <p:txBody>
+                    <a:bodyPr wrap="none" lIns="0" tIns="0" rIns="0" bIns="0" rtlCol="0">
+                      <a:spAutoFit/>
+                    </a:bodyPr>
+                    <a:lstStyle/>
+                    <a:p>
+                      <a:pPr/>
+                      <a14:m>
+                        <m:oMathPara xmlns:m="http://schemas.openxmlformats.org/officeDocument/2006/math">
+                          <m:oMathParaPr>
+                            <m:jc m:val="centerGroup"/>
+                          </m:oMathParaPr>
+                          <m:oMath xmlns:m="http://schemas.openxmlformats.org/officeDocument/2006/math">
+                            <m:sSub>
+                              <m:sSubPr>
+                                <m:ctrlPr>
+                                  <a:rPr lang="en-US" sz="3200" i="1" smtClean="0">
+                                    <a:latin typeface="Cambria Math" panose="02040503050406030204" pitchFamily="18" charset="0"/>
+                                  </a:rPr>
+                                </m:ctrlPr>
+                              </m:sSubPr>
+                              <m:e>
+                                <m:r>
+                                  <a:rPr lang="en-US" sz="3200" b="0" i="1" smtClean="0">
+                                    <a:latin typeface="Cambria Math" panose="02040503050406030204" pitchFamily="18" charset="0"/>
+                                  </a:rPr>
+                                  <m:t>𝐼</m:t>
+                                </m:r>
+                              </m:e>
+                              <m:sub>
+                                <m:r>
+                                  <a:rPr lang="en-US" sz="3200" i="1" smtClean="0">
+                                    <a:latin typeface="Cambria Math" panose="02040503050406030204" pitchFamily="18" charset="0"/>
+                                    <a:ea typeface="Cambria Math" panose="02040503050406030204" pitchFamily="18" charset="0"/>
+                                  </a:rPr>
+                                  <m:t>𝛿</m:t>
+                                </m:r>
+                              </m:sub>
+                            </m:sSub>
+                          </m:oMath>
+                        </m:oMathPara>
+                      </a14:m>
+                      <a:endParaRPr lang="en-US" sz="3200" dirty="0"/>
+                    </a:p>
+                  </p:txBody>
+                </p:sp>
+              </mc:Choice>
+              <mc:Fallback>
+                <p:sp>
+                  <p:nvSpPr>
+                    <p:cNvPr id="31" name="TextBox 30">
+                      <a:extLst>
+                        <a:ext uri="{FF2B5EF4-FFF2-40B4-BE49-F238E27FC236}">
+                          <a16:creationId xmlns:a16="http://schemas.microsoft.com/office/drawing/2014/main" id="{2894BD9F-D702-273B-8192-FB59F692EDD9}"/>
+                        </a:ext>
+                      </a:extLst>
+                    </p:cNvPr>
+                    <p:cNvSpPr txBox="1">
+                      <a:spLocks noRot="1" noChangeAspect="1" noMove="1" noResize="1" noEditPoints="1" noAdjustHandles="1" noChangeArrowheads="1" noChangeShapeType="1" noTextEdit="1"/>
+                    </p:cNvSpPr>
+                    <p:nvPr/>
+                  </p:nvSpPr>
+                  <p:spPr>
+                    <a:xfrm>
+                      <a:off x="8637609" y="2037636"/>
+                      <a:ext cx="423065" cy="492443"/>
+                    </a:xfrm>
+                    <a:prstGeom prst="rect">
+                      <a:avLst/>
+                    </a:prstGeom>
+                    <a:blipFill>
+                      <a:blip r:embed="rId5"/>
+                      <a:stretch>
+                        <a:fillRect/>
+                      </a:stretch>
+                    </a:blipFill>
+                  </p:spPr>
+                  <p:txBody>
+                    <a:bodyPr/>
+                    <a:lstStyle/>
+                    <a:p>
+                      <a:r>
+                        <a:rPr lang="en-US">
+                          <a:noFill/>
+                        </a:rPr>
+                        <a:t> </a:t>
+                      </a:r>
+                    </a:p>
+                  </p:txBody>
+                </p:sp>
+              </mc:Fallback>
+            </mc:AlternateContent>
+          </p:grpSp>
+          <p:cxnSp>
+            <p:nvCxnSpPr>
+              <p:cNvPr id="34" name="Connector: Elbow 33">
+                <a:extLst>
+                  <a:ext uri="{FF2B5EF4-FFF2-40B4-BE49-F238E27FC236}">
+                    <a16:creationId xmlns:a16="http://schemas.microsoft.com/office/drawing/2014/main" id="{4A895093-CD8C-43FD-7254-7405177ABCB9}"/>
+                  </a:ext>
+                </a:extLst>
+              </p:cNvPr>
+              <p:cNvCxnSpPr>
+                <a:cxnSpLocks/>
+                <a:endCxn id="7" idx="1"/>
+              </p:cNvCxnSpPr>
+              <p:nvPr/>
+            </p:nvCxnSpPr>
+            <p:spPr>
+              <a:xfrm>
+                <a:off x="1100106" y="3016352"/>
+                <a:ext cx="248556" cy="0"/>
+              </a:xfrm>
+              <a:prstGeom prst="straightConnector1">
+                <a:avLst/>
+              </a:prstGeom>
+              <a:ln w="3175">
+                <a:solidFill>
+                  <a:schemeClr val="tx1"/>
+                </a:solidFill>
+                <a:tailEnd type="triangle"/>
+              </a:ln>
+            </p:spPr>
+            <p:style>
+              <a:lnRef idx="2">
+                <a:schemeClr val="accent1"/>
+              </a:lnRef>
+              <a:fillRef idx="0">
+                <a:schemeClr val="accent1"/>
+              </a:fillRef>
+              <a:effectRef idx="1">
+                <a:schemeClr val="accent1"/>
+              </a:effectRef>
+              <a:fontRef idx="minor">
+                <a:schemeClr val="tx1"/>
+              </a:fontRef>
+            </p:style>
+          </p:cxnSp>
+          <p:cxnSp>
+            <p:nvCxnSpPr>
+              <p:cNvPr id="75" name="Connector: Elbow 33">
+                <a:extLst>
+                  <a:ext uri="{FF2B5EF4-FFF2-40B4-BE49-F238E27FC236}">
+                    <a16:creationId xmlns:a16="http://schemas.microsoft.com/office/drawing/2014/main" id="{9F360EC7-BF4E-AA35-5D19-89243E28D939}"/>
+                  </a:ext>
+                </a:extLst>
+              </p:cNvPr>
+              <p:cNvCxnSpPr>
+                <a:cxnSpLocks/>
+                <a:stCxn id="7" idx="3"/>
+                <a:endCxn id="23" idx="1"/>
+              </p:cNvCxnSpPr>
+              <p:nvPr/>
+            </p:nvCxnSpPr>
+            <p:spPr>
+              <a:xfrm flipV="1">
+                <a:off x="3748576" y="2586228"/>
+                <a:ext cx="517119" cy="430124"/>
+              </a:xfrm>
+              <a:prstGeom prst="bentConnector3">
+                <a:avLst>
+                  <a:gd name="adj1" fmla="val 50000"/>
+                </a:avLst>
+              </a:prstGeom>
+              <a:ln w="3175">
+                <a:solidFill>
+                  <a:schemeClr val="tx1"/>
+                </a:solidFill>
+                <a:tailEnd type="triangle"/>
+              </a:ln>
+            </p:spPr>
+            <p:style>
+              <a:lnRef idx="2">
+                <a:schemeClr val="accent1"/>
+              </a:lnRef>
+              <a:fillRef idx="0">
+                <a:schemeClr val="accent1"/>
+              </a:fillRef>
+              <a:effectRef idx="1">
+                <a:schemeClr val="accent1"/>
+              </a:effectRef>
+              <a:fontRef idx="minor">
+                <a:schemeClr val="tx1"/>
+              </a:fontRef>
+            </p:style>
+          </p:cxnSp>
+          <p:cxnSp>
+            <p:nvCxnSpPr>
+              <p:cNvPr id="80" name="Connector: Elbow 33">
+                <a:extLst>
+                  <a:ext uri="{FF2B5EF4-FFF2-40B4-BE49-F238E27FC236}">
+                    <a16:creationId xmlns:a16="http://schemas.microsoft.com/office/drawing/2014/main" id="{D8117B47-D982-6BA1-5340-3E33D04B4E02}"/>
+                  </a:ext>
+                </a:extLst>
+              </p:cNvPr>
+              <p:cNvCxnSpPr>
+                <a:cxnSpLocks/>
+                <a:stCxn id="7" idx="3"/>
+                <a:endCxn id="36" idx="1"/>
+              </p:cNvCxnSpPr>
+              <p:nvPr/>
+            </p:nvCxnSpPr>
+            <p:spPr>
+              <a:xfrm>
+                <a:off x="3748576" y="3016352"/>
+                <a:ext cx="517119" cy="473902"/>
+              </a:xfrm>
+              <a:prstGeom prst="bentConnector3">
+                <a:avLst>
+                  <a:gd name="adj1" fmla="val 50000"/>
+                </a:avLst>
+              </a:prstGeom>
+              <a:ln w="3175">
+                <a:solidFill>
+                  <a:schemeClr val="tx1"/>
+                </a:solidFill>
+                <a:tailEnd type="triangle"/>
+              </a:ln>
+            </p:spPr>
+            <p:style>
+              <a:lnRef idx="2">
+                <a:schemeClr val="accent1"/>
+              </a:lnRef>
+              <a:fillRef idx="0">
+                <a:schemeClr val="accent1"/>
+              </a:fillRef>
+              <a:effectRef idx="1">
+                <a:schemeClr val="accent1"/>
+              </a:effectRef>
+              <a:fontRef idx="minor">
+                <a:schemeClr val="tx1"/>
+              </a:fontRef>
+            </p:style>
+          </p:cxnSp>
+          <p:cxnSp>
+            <p:nvCxnSpPr>
+              <p:cNvPr id="92" name="Connector: Elbow 33">
+                <a:extLst>
+                  <a:ext uri="{FF2B5EF4-FFF2-40B4-BE49-F238E27FC236}">
+                    <a16:creationId xmlns:a16="http://schemas.microsoft.com/office/drawing/2014/main" id="{076A275F-F7B1-BBD0-0907-2C92520EFE15}"/>
+                  </a:ext>
+                </a:extLst>
+              </p:cNvPr>
+              <p:cNvCxnSpPr>
+                <a:cxnSpLocks/>
+                <a:stCxn id="36" idx="3"/>
+              </p:cNvCxnSpPr>
+              <p:nvPr/>
+            </p:nvCxnSpPr>
+            <p:spPr>
+              <a:xfrm flipV="1">
+                <a:off x="5180095" y="3220538"/>
+                <a:ext cx="509965" cy="269716"/>
+              </a:xfrm>
+              <a:prstGeom prst="bentConnector3">
+                <a:avLst>
+                  <a:gd name="adj1" fmla="val 50000"/>
+                </a:avLst>
+              </a:prstGeom>
+              <a:ln w="3175">
+                <a:solidFill>
+                  <a:schemeClr val="tx1"/>
+                </a:solidFill>
+                <a:tailEnd type="triangle"/>
+              </a:ln>
+            </p:spPr>
+            <p:style>
+              <a:lnRef idx="2">
+                <a:schemeClr val="accent1"/>
+              </a:lnRef>
+              <a:fillRef idx="0">
+                <a:schemeClr val="accent1"/>
+              </a:fillRef>
+              <a:effectRef idx="1">
+                <a:schemeClr val="accent1"/>
+              </a:effectRef>
+              <a:fontRef idx="minor">
+                <a:schemeClr val="tx1"/>
+              </a:fontRef>
+            </p:style>
+          </p:cxnSp>
+          <p:cxnSp>
+            <p:nvCxnSpPr>
+              <p:cNvPr id="112" name="Connector: Elbow 33">
+                <a:extLst>
+                  <a:ext uri="{FF2B5EF4-FFF2-40B4-BE49-F238E27FC236}">
+                    <a16:creationId xmlns:a16="http://schemas.microsoft.com/office/drawing/2014/main" id="{660E0017-3A9D-8A30-9DE9-08224C7D09C1}"/>
+                  </a:ext>
+                </a:extLst>
+              </p:cNvPr>
+              <p:cNvCxnSpPr>
+                <a:cxnSpLocks/>
+                <a:stCxn id="10" idx="3"/>
+                <a:endCxn id="30" idx="1"/>
+              </p:cNvCxnSpPr>
+              <p:nvPr/>
+            </p:nvCxnSpPr>
+            <p:spPr>
+              <a:xfrm>
+                <a:off x="7889168" y="3034973"/>
+                <a:ext cx="517449" cy="269"/>
+              </a:xfrm>
+              <a:prstGeom prst="straightConnector1">
+                <a:avLst/>
+              </a:prstGeom>
+              <a:ln w="3175">
+                <a:solidFill>
+                  <a:schemeClr val="tx1"/>
+                </a:solidFill>
+                <a:tailEnd type="triangle"/>
+              </a:ln>
+            </p:spPr>
+            <p:style>
+              <a:lnRef idx="2">
+                <a:schemeClr val="accent1"/>
+              </a:lnRef>
+              <a:fillRef idx="0">
+                <a:schemeClr val="accent1"/>
+              </a:fillRef>
+              <a:effectRef idx="1">
+                <a:schemeClr val="accent1"/>
+              </a:effectRef>
+              <a:fontRef idx="minor">
+                <a:schemeClr val="tx1"/>
+              </a:fontRef>
+            </p:style>
+          </p:cxnSp>
+          <p:sp>
+            <p:nvSpPr>
+              <p:cNvPr id="115" name="Flowchart: Or 114">
+                <a:extLst>
+                  <a:ext uri="{FF2B5EF4-FFF2-40B4-BE49-F238E27FC236}">
+                    <a16:creationId xmlns:a16="http://schemas.microsoft.com/office/drawing/2014/main" id="{0125BBC1-5D59-BEFE-F481-D03AC17B9DCE}"/>
+                  </a:ext>
+                </a:extLst>
+              </p:cNvPr>
+              <p:cNvSpPr/>
+              <p:nvPr/>
+            </p:nvSpPr>
+            <p:spPr>
+              <a:xfrm>
+                <a:off x="9694442" y="2896173"/>
+                <a:ext cx="274320" cy="274320"/>
+              </a:xfrm>
+              <a:prstGeom prst="flowChartOr">
+                <a:avLst/>
+              </a:prstGeom>
+              <a:noFill/>
+              <a:ln w="3175">
+                <a:solidFill>
+                  <a:schemeClr val="tx1"/>
+                </a:solidFill>
+              </a:ln>
+            </p:spPr>
+            <p:style>
+              <a:lnRef idx="2">
+                <a:schemeClr val="accent1">
+                  <a:shade val="15000"/>
+                </a:schemeClr>
+              </a:lnRef>
+              <a:fillRef idx="1">
+                <a:schemeClr val="accent1"/>
+              </a:fillRef>
+              <a:effectRef idx="0">
+                <a:schemeClr val="accent1"/>
+              </a:effectRef>
+              <a:fontRef idx="minor">
+                <a:schemeClr val="lt1"/>
+              </a:fontRef>
+            </p:style>
+            <p:txBody>
+              <a:bodyPr rtlCol="0" anchor="ctr"/>
+              <a:lstStyle/>
+              <a:p>
+                <a:pPr algn="ctr"/>
+                <a:endParaRPr lang="en-US"/>
+              </a:p>
+            </p:txBody>
+          </p:sp>
+          <p:cxnSp>
+            <p:nvCxnSpPr>
+              <p:cNvPr id="116" name="Connector: Elbow 33">
+                <a:extLst>
+                  <a:ext uri="{FF2B5EF4-FFF2-40B4-BE49-F238E27FC236}">
+                    <a16:creationId xmlns:a16="http://schemas.microsoft.com/office/drawing/2014/main" id="{0AA09753-5D41-CDAA-B50F-162165064BC3}"/>
+                  </a:ext>
+                </a:extLst>
+              </p:cNvPr>
+              <p:cNvCxnSpPr>
+                <a:cxnSpLocks/>
+                <a:stCxn id="36" idx="2"/>
+                <a:endCxn id="115" idx="4"/>
+              </p:cNvCxnSpPr>
+              <p:nvPr/>
+            </p:nvCxnSpPr>
+            <p:spPr>
+              <a:xfrm rot="5400000" flipH="1" flipV="1">
+                <a:off x="6944442" y="948945"/>
+                <a:ext cx="665612" cy="5108707"/>
+              </a:xfrm>
+              <a:prstGeom prst="bentConnector3">
+                <a:avLst>
+                  <a:gd name="adj1" fmla="val -34344"/>
+                </a:avLst>
+              </a:prstGeom>
+              <a:ln w="3175">
+                <a:solidFill>
+                  <a:schemeClr val="tx1"/>
+                </a:solidFill>
+                <a:tailEnd type="triangle"/>
+              </a:ln>
+            </p:spPr>
+            <p:style>
+              <a:lnRef idx="2">
+                <a:schemeClr val="accent1"/>
+              </a:lnRef>
+              <a:fillRef idx="0">
+                <a:schemeClr val="accent1"/>
+              </a:fillRef>
+              <a:effectRef idx="1">
+                <a:schemeClr val="accent1"/>
+              </a:effectRef>
+              <a:fontRef idx="minor">
+                <a:schemeClr val="tx1"/>
+              </a:fontRef>
+            </p:style>
+          </p:cxnSp>
+          <p:cxnSp>
+            <p:nvCxnSpPr>
+              <p:cNvPr id="119" name="Connector: Elbow 33">
+                <a:extLst>
+                  <a:ext uri="{FF2B5EF4-FFF2-40B4-BE49-F238E27FC236}">
+                    <a16:creationId xmlns:a16="http://schemas.microsoft.com/office/drawing/2014/main" id="{B3378E5D-7309-0434-03C8-6FDEB3A3BADC}"/>
+                  </a:ext>
+                </a:extLst>
+              </p:cNvPr>
+              <p:cNvCxnSpPr>
+                <a:cxnSpLocks/>
+                <a:stCxn id="30" idx="3"/>
+                <a:endCxn id="115" idx="2"/>
+              </p:cNvCxnSpPr>
+              <p:nvPr/>
+            </p:nvCxnSpPr>
+            <p:spPr>
+              <a:xfrm flipV="1">
+                <a:off x="9314153" y="3033333"/>
+                <a:ext cx="380289" cy="1909"/>
+              </a:xfrm>
+              <a:prstGeom prst="straightConnector1">
+                <a:avLst/>
+              </a:prstGeom>
+              <a:ln w="3175">
+                <a:solidFill>
+                  <a:schemeClr val="tx1"/>
+                </a:solidFill>
+                <a:tailEnd type="triangle"/>
+              </a:ln>
+            </p:spPr>
+            <p:style>
+              <a:lnRef idx="2">
+                <a:schemeClr val="accent1"/>
+              </a:lnRef>
+              <a:fillRef idx="0">
+                <a:schemeClr val="accent1"/>
+              </a:fillRef>
+              <a:effectRef idx="1">
+                <a:schemeClr val="accent1"/>
+              </a:effectRef>
+              <a:fontRef idx="minor">
+                <a:schemeClr val="tx1"/>
+              </a:fontRef>
+            </p:style>
+          </p:cxnSp>
+          <p:sp>
+            <p:nvSpPr>
+              <p:cNvPr id="126" name="Flowchart: Summing Junction 125">
+                <a:extLst>
+                  <a:ext uri="{FF2B5EF4-FFF2-40B4-BE49-F238E27FC236}">
+                    <a16:creationId xmlns:a16="http://schemas.microsoft.com/office/drawing/2014/main" id="{AF40F4D5-EEE7-79FB-9939-C865C8C01780}"/>
+                  </a:ext>
+                </a:extLst>
+              </p:cNvPr>
+              <p:cNvSpPr/>
+              <p:nvPr/>
+            </p:nvSpPr>
+            <p:spPr>
+              <a:xfrm>
+                <a:off x="10210119" y="2896387"/>
+                <a:ext cx="274320" cy="274320"/>
+              </a:xfrm>
+              <a:prstGeom prst="flowChartSummingJunction">
+                <a:avLst/>
+              </a:prstGeom>
+              <a:noFill/>
+              <a:ln w="3175">
+                <a:solidFill>
+                  <a:schemeClr val="tx1"/>
+                </a:solidFill>
+              </a:ln>
+            </p:spPr>
+            <p:style>
+              <a:lnRef idx="2">
+                <a:schemeClr val="accent1">
+                  <a:shade val="15000"/>
+                </a:schemeClr>
+              </a:lnRef>
+              <a:fillRef idx="1">
+                <a:schemeClr val="accent1"/>
+              </a:fillRef>
+              <a:effectRef idx="0">
+                <a:schemeClr val="accent1"/>
+              </a:effectRef>
+              <a:fontRef idx="minor">
+                <a:schemeClr val="lt1"/>
+              </a:fontRef>
+            </p:style>
+            <p:txBody>
+              <a:bodyPr rtlCol="0" anchor="ctr"/>
+              <a:lstStyle/>
+              <a:p>
+                <a:pPr algn="ctr"/>
+                <a:endParaRPr lang="en-US"/>
+              </a:p>
+            </p:txBody>
+          </p:sp>
+          <p:cxnSp>
+            <p:nvCxnSpPr>
+              <p:cNvPr id="128" name="Connector: Elbow 33">
+                <a:extLst>
+                  <a:ext uri="{FF2B5EF4-FFF2-40B4-BE49-F238E27FC236}">
+                    <a16:creationId xmlns:a16="http://schemas.microsoft.com/office/drawing/2014/main" id="{1B185F3F-CF41-76C6-C6B8-48FDC3460B3E}"/>
+                  </a:ext>
+                </a:extLst>
+              </p:cNvPr>
+              <p:cNvCxnSpPr>
+                <a:cxnSpLocks/>
+                <a:stCxn id="115" idx="6"/>
+                <a:endCxn id="126" idx="2"/>
+              </p:cNvCxnSpPr>
+              <p:nvPr/>
+            </p:nvCxnSpPr>
+            <p:spPr>
+              <a:xfrm>
+                <a:off x="9968762" y="3033333"/>
+                <a:ext cx="241357" cy="214"/>
+              </a:xfrm>
+              <a:prstGeom prst="straightConnector1">
+                <a:avLst/>
+              </a:prstGeom>
+              <a:ln w="3175">
+                <a:solidFill>
+                  <a:schemeClr val="tx1"/>
+                </a:solidFill>
+                <a:tailEnd type="triangle"/>
+              </a:ln>
+            </p:spPr>
+            <p:style>
+              <a:lnRef idx="2">
+                <a:schemeClr val="accent1"/>
+              </a:lnRef>
+              <a:fillRef idx="0">
+                <a:schemeClr val="accent1"/>
+              </a:fillRef>
+              <a:effectRef idx="1">
+                <a:schemeClr val="accent1"/>
+              </a:effectRef>
+              <a:fontRef idx="minor">
+                <a:schemeClr val="tx1"/>
+              </a:fontRef>
+            </p:style>
+          </p:cxnSp>
+          <p:cxnSp>
+            <p:nvCxnSpPr>
+              <p:cNvPr id="131" name="Connector: Elbow 33">
+                <a:extLst>
+                  <a:ext uri="{FF2B5EF4-FFF2-40B4-BE49-F238E27FC236}">
+                    <a16:creationId xmlns:a16="http://schemas.microsoft.com/office/drawing/2014/main" id="{6702EB0F-91ED-10C5-874E-C9FCEA4DECF0}"/>
+                  </a:ext>
+                </a:extLst>
+              </p:cNvPr>
+              <p:cNvCxnSpPr>
+                <a:cxnSpLocks/>
+                <a:stCxn id="18" idx="0"/>
+                <a:endCxn id="126" idx="0"/>
+              </p:cNvCxnSpPr>
+              <p:nvPr/>
+            </p:nvCxnSpPr>
+            <p:spPr>
+              <a:xfrm rot="16200000" flipH="1">
+                <a:off x="7194298" y="-256594"/>
+                <a:ext cx="813816" cy="5492146"/>
+              </a:xfrm>
+              <a:prstGeom prst="bentConnector3">
+                <a:avLst>
+                  <a:gd name="adj1" fmla="val -28090"/>
+                </a:avLst>
+              </a:prstGeom>
+              <a:ln w="3175">
+                <a:solidFill>
+                  <a:schemeClr val="tx1"/>
+                </a:solidFill>
+                <a:tailEnd type="triangle"/>
+              </a:ln>
+            </p:spPr>
+            <p:style>
+              <a:lnRef idx="2">
+                <a:schemeClr val="accent1"/>
+              </a:lnRef>
+              <a:fillRef idx="0">
+                <a:schemeClr val="accent1"/>
+              </a:fillRef>
+              <a:effectRef idx="1">
+                <a:schemeClr val="accent1"/>
+              </a:effectRef>
+              <a:fontRef idx="minor">
+                <a:schemeClr val="tx1"/>
+              </a:fontRef>
+            </p:style>
+          </p:cxnSp>
+          <p:cxnSp>
+            <p:nvCxnSpPr>
+              <p:cNvPr id="142" name="Connector: Elbow 33">
+                <a:extLst>
+                  <a:ext uri="{FF2B5EF4-FFF2-40B4-BE49-F238E27FC236}">
+                    <a16:creationId xmlns:a16="http://schemas.microsoft.com/office/drawing/2014/main" id="{1D0CB4DD-EF53-F633-FD91-98089F601D93}"/>
+                  </a:ext>
+                </a:extLst>
+              </p:cNvPr>
+              <p:cNvCxnSpPr>
+                <a:cxnSpLocks/>
+                <a:stCxn id="126" idx="6"/>
+                <a:endCxn id="15" idx="1"/>
+              </p:cNvCxnSpPr>
+              <p:nvPr/>
+            </p:nvCxnSpPr>
+            <p:spPr>
+              <a:xfrm flipV="1">
+                <a:off x="10484439" y="3030967"/>
+                <a:ext cx="426705" cy="2580"/>
+              </a:xfrm>
+              <a:prstGeom prst="straightConnector1">
+                <a:avLst/>
+              </a:prstGeom>
+              <a:ln w="3175">
+                <a:solidFill>
+                  <a:schemeClr val="tx1"/>
+                </a:solidFill>
+                <a:tailEnd type="triangle"/>
+              </a:ln>
+            </p:spPr>
+            <p:style>
+              <a:lnRef idx="2">
+                <a:schemeClr val="accent1"/>
+              </a:lnRef>
+              <a:fillRef idx="0">
+                <a:schemeClr val="accent1"/>
+              </a:fillRef>
+              <a:effectRef idx="1">
+                <a:schemeClr val="accent1"/>
+              </a:effectRef>
+              <a:fontRef idx="minor">
+                <a:schemeClr val="tx1"/>
+              </a:fontRef>
+            </p:style>
+          </p:cxnSp>
+          <mc:AlternateContent xmlns:mc="http://schemas.openxmlformats.org/markup-compatibility/2006">
+            <mc:Choice xmlns:a14="http://schemas.microsoft.com/office/drawing/2010/main" Requires="a14">
+              <p:sp>
+                <p:nvSpPr>
+                  <p:cNvPr id="145" name="TextBox 144">
+                    <a:extLst>
+                      <a:ext uri="{FF2B5EF4-FFF2-40B4-BE49-F238E27FC236}">
+                        <a16:creationId xmlns:a16="http://schemas.microsoft.com/office/drawing/2014/main" id="{496B0699-B6EF-5ED7-54FF-DE48A4EEE6C8}"/>
+                      </a:ext>
+                    </a:extLst>
+                  </p:cNvPr>
+                  <p:cNvSpPr txBox="1"/>
+                  <p:nvPr/>
+                </p:nvSpPr>
+                <p:spPr>
+                  <a:xfrm>
+                    <a:off x="11297185" y="2020715"/>
+                    <a:ext cx="286938" cy="508024"/>
+                  </a:xfrm>
+                  <a:prstGeom prst="rect">
+                    <a:avLst/>
+                  </a:prstGeom>
+                  <a:noFill/>
+                </p:spPr>
+                <p:txBody>
+                  <a:bodyPr wrap="none" lIns="0" tIns="0" rIns="0" bIns="0" rtlCol="0">
+                    <a:spAutoFit/>
+                  </a:bodyPr>
+                  <a:lstStyle/>
+                  <a:p>
+                    <a:pPr/>
+                    <a14:m>
+                      <m:oMathPara xmlns:m="http://schemas.openxmlformats.org/officeDocument/2006/math">
+                        <m:oMathParaPr>
+                          <m:jc m:val="centerGroup"/>
+                        </m:oMathParaPr>
+                        <m:oMath xmlns:m="http://schemas.openxmlformats.org/officeDocument/2006/math">
+                          <m:r>
+                            <a:rPr lang="en-US" sz="3200" b="0" i="1" smtClean="0">
+                              <a:latin typeface="Cambria Math" panose="02040503050406030204" pitchFamily="18" charset="0"/>
+                            </a:rPr>
+                            <m:t>Ŝ</m:t>
+                          </m:r>
+                        </m:oMath>
+                      </m:oMathPara>
+                    </a14:m>
+                    <a:endParaRPr lang="en-US" sz="3200" dirty="0"/>
+                  </a:p>
+                </p:txBody>
+              </p:sp>
+            </mc:Choice>
+            <mc:Fallback>
+              <p:sp>
+                <p:nvSpPr>
+                  <p:cNvPr id="145" name="TextBox 144">
+                    <a:extLst>
+                      <a:ext uri="{FF2B5EF4-FFF2-40B4-BE49-F238E27FC236}">
+                        <a16:creationId xmlns:a16="http://schemas.microsoft.com/office/drawing/2014/main" id="{496B0699-B6EF-5ED7-54FF-DE48A4EEE6C8}"/>
+                      </a:ext>
+                    </a:extLst>
+                  </p:cNvPr>
+                  <p:cNvSpPr txBox="1">
+                    <a:spLocks noRot="1" noChangeAspect="1" noMove="1" noResize="1" noEditPoints="1" noAdjustHandles="1" noChangeArrowheads="1" noChangeShapeType="1" noTextEdit="1"/>
+                  </p:cNvSpPr>
+                  <p:nvPr/>
+                </p:nvSpPr>
+                <p:spPr>
+                  <a:xfrm>
+                    <a:off x="11297185" y="2020715"/>
+                    <a:ext cx="286938" cy="508024"/>
+                  </a:xfrm>
+                  <a:prstGeom prst="rect">
+                    <a:avLst/>
+                  </a:prstGeom>
+                  <a:blipFill>
+                    <a:blip r:embed="rId6"/>
+                    <a:stretch>
+                      <a:fillRect/>
+                    </a:stretch>
+                  </a:blipFill>
+                </p:spPr>
+                <p:txBody>
+                  <a:bodyPr/>
+                  <a:lstStyle/>
+                  <a:p>
+                    <a:r>
+                      <a:rPr lang="en-US">
+                        <a:noFill/>
+                      </a:rPr>
+                      <a:t> </a:t>
+                    </a:r>
+                  </a:p>
+                </p:txBody>
+              </p:sp>
+            </mc:Fallback>
+          </mc:AlternateContent>
+        </p:grpSp>
+        <p:grpSp>
+          <p:nvGrpSpPr>
+            <p:cNvPr id="2" name="Group 1">
+              <a:extLst>
+                <a:ext uri="{FF2B5EF4-FFF2-40B4-BE49-F238E27FC236}">
+                  <a16:creationId xmlns:a16="http://schemas.microsoft.com/office/drawing/2014/main" id="{9E0A0CCF-3DDC-C3E6-D32E-FD04F08B4989}"/>
+                </a:ext>
+              </a:extLst>
+            </p:cNvPr>
+            <p:cNvGrpSpPr/>
+            <p:nvPr/>
+          </p:nvGrpSpPr>
+          <p:grpSpPr>
+            <a:xfrm>
+              <a:off x="43106" y="2116496"/>
+              <a:ext cx="1064198" cy="1335992"/>
+              <a:chOff x="603356" y="2640645"/>
+              <a:chExt cx="1064198" cy="1335992"/>
+            </a:xfrm>
+          </p:grpSpPr>
+          <p:pic>
+            <p:nvPicPr>
+              <p:cNvPr id="3" name="Picture 2">
+                <a:extLst>
+                  <a:ext uri="{FF2B5EF4-FFF2-40B4-BE49-F238E27FC236}">
+                    <a16:creationId xmlns:a16="http://schemas.microsoft.com/office/drawing/2014/main" id="{A0F19246-2507-EE17-C778-4A17D0C4CB49}"/>
+                  </a:ext>
+                </a:extLst>
+              </p:cNvPr>
+              <p:cNvPicPr>
+                <a:picLocks noChangeAspect="1"/>
+              </p:cNvPicPr>
+              <p:nvPr/>
+            </p:nvPicPr>
+            <p:blipFill>
+              <a:blip r:embed="rId7"/>
+              <a:stretch>
+                <a:fillRect/>
+              </a:stretch>
+            </p:blipFill>
+            <p:spPr>
+              <a:xfrm>
+                <a:off x="752306" y="3134571"/>
+                <a:ext cx="915248" cy="694944"/>
+              </a:xfrm>
+              <a:prstGeom prst="rect">
+                <a:avLst/>
+              </a:prstGeom>
+            </p:spPr>
+          </p:pic>
+          <p:pic>
+            <p:nvPicPr>
+              <p:cNvPr id="8" name="Picture 7">
+                <a:extLst>
+                  <a:ext uri="{FF2B5EF4-FFF2-40B4-BE49-F238E27FC236}">
+                    <a16:creationId xmlns:a16="http://schemas.microsoft.com/office/drawing/2014/main" id="{212C2110-070A-4826-4FB5-E858B5F9E58D}"/>
+                  </a:ext>
+                </a:extLst>
+              </p:cNvPr>
+              <p:cNvPicPr>
+                <a:picLocks noChangeAspect="1"/>
+              </p:cNvPicPr>
+              <p:nvPr/>
+            </p:nvPicPr>
+            <p:blipFill>
+              <a:blip r:embed="rId7"/>
+              <a:stretch>
+                <a:fillRect/>
+              </a:stretch>
+            </p:blipFill>
+            <p:spPr>
+              <a:xfrm>
+                <a:off x="685167" y="3200139"/>
+                <a:ext cx="915248" cy="694944"/>
+              </a:xfrm>
+              <a:prstGeom prst="rect">
+                <a:avLst/>
+              </a:prstGeom>
+            </p:spPr>
+          </p:pic>
+          <mc:AlternateContent xmlns:mc="http://schemas.openxmlformats.org/markup-compatibility/2006">
+            <mc:Choice xmlns:a14="http://schemas.microsoft.com/office/drawing/2010/main" Requires="a14">
+              <p:sp>
+                <p:nvSpPr>
+                  <p:cNvPr id="9" name="TextBox 8">
+                    <a:extLst>
+                      <a:ext uri="{FF2B5EF4-FFF2-40B4-BE49-F238E27FC236}">
+                        <a16:creationId xmlns:a16="http://schemas.microsoft.com/office/drawing/2014/main" id="{EAEE46F5-9DD0-4736-3C84-375D9B7F7895}"/>
+                      </a:ext>
+                    </a:extLst>
+                  </p:cNvPr>
+                  <p:cNvSpPr txBox="1"/>
+                  <p:nvPr/>
+                </p:nvSpPr>
+                <p:spPr>
+                  <a:xfrm>
+                    <a:off x="1040627" y="2640645"/>
+                    <a:ext cx="309379" cy="492443"/>
+                  </a:xfrm>
+                  <a:prstGeom prst="rect">
+                    <a:avLst/>
+                  </a:prstGeom>
+                  <a:noFill/>
+                </p:spPr>
+                <p:txBody>
+                  <a:bodyPr wrap="none" lIns="0" tIns="0" rIns="0" bIns="0" rtlCol="0">
+                    <a:spAutoFit/>
+                  </a:bodyPr>
+                  <a:lstStyle/>
+                  <a:p>
+                    <a:pPr/>
+                    <a14:m>
+                      <m:oMathPara xmlns:m="http://schemas.openxmlformats.org/officeDocument/2006/math">
+                        <m:oMathParaPr>
+                          <m:jc m:val="centerGroup"/>
+                        </m:oMathParaPr>
+                        <m:oMath xmlns:m="http://schemas.openxmlformats.org/officeDocument/2006/math">
+                          <m:r>
+                            <a:rPr lang="en-US" sz="3200" b="0" i="1" smtClean="0">
+                              <a:latin typeface="Cambria Math" panose="02040503050406030204" pitchFamily="18" charset="0"/>
+                            </a:rPr>
+                            <m:t>𝑆</m:t>
+                          </m:r>
+                        </m:oMath>
+                      </m:oMathPara>
+                    </a14:m>
+                    <a:endParaRPr lang="en-US" dirty="0"/>
+                  </a:p>
+                </p:txBody>
+              </p:sp>
+            </mc:Choice>
+            <mc:Fallback>
+              <p:sp>
+                <p:nvSpPr>
+                  <p:cNvPr id="9" name="TextBox 8">
+                    <a:extLst>
+                      <a:ext uri="{FF2B5EF4-FFF2-40B4-BE49-F238E27FC236}">
+                        <a16:creationId xmlns:a16="http://schemas.microsoft.com/office/drawing/2014/main" id="{EAEE46F5-9DD0-4736-3C84-375D9B7F7895}"/>
+                      </a:ext>
+                    </a:extLst>
+                  </p:cNvPr>
+                  <p:cNvSpPr txBox="1">
+                    <a:spLocks noRot="1" noChangeAspect="1" noMove="1" noResize="1" noEditPoints="1" noAdjustHandles="1" noChangeArrowheads="1" noChangeShapeType="1" noTextEdit="1"/>
+                  </p:cNvSpPr>
+                  <p:nvPr/>
+                </p:nvSpPr>
+                <p:spPr>
+                  <a:xfrm>
+                    <a:off x="1040627" y="2640645"/>
+                    <a:ext cx="309379" cy="492443"/>
+                  </a:xfrm>
+                  <a:prstGeom prst="rect">
+                    <a:avLst/>
+                  </a:prstGeom>
+                  <a:blipFill>
+                    <a:blip r:embed="rId8"/>
+                    <a:stretch>
+                      <a:fillRect/>
+                    </a:stretch>
+                  </a:blipFill>
+                </p:spPr>
+                <p:txBody>
+                  <a:bodyPr/>
+                  <a:lstStyle/>
+                  <a:p>
+                    <a:r>
+                      <a:rPr lang="en-US">
+                        <a:noFill/>
+                      </a:rPr>
+                      <a:t> </a:t>
+                    </a:r>
+                  </a:p>
+                </p:txBody>
+              </p:sp>
+            </mc:Fallback>
+          </mc:AlternateContent>
+          <p:pic>
+            <p:nvPicPr>
+              <p:cNvPr id="11" name="Picture 10">
+                <a:extLst>
+                  <a:ext uri="{FF2B5EF4-FFF2-40B4-BE49-F238E27FC236}">
+                    <a16:creationId xmlns:a16="http://schemas.microsoft.com/office/drawing/2014/main" id="{CBFDA5D0-8A8E-5004-E877-DA81734DDA46}"/>
+                  </a:ext>
+                </a:extLst>
+              </p:cNvPr>
+              <p:cNvPicPr>
+                <a:picLocks noChangeAspect="1"/>
+              </p:cNvPicPr>
+              <p:nvPr/>
+            </p:nvPicPr>
+            <p:blipFill>
+              <a:blip r:embed="rId9"/>
+              <a:srcRect l="415" t="959" r="840" b="713"/>
+              <a:stretch/>
+            </p:blipFill>
+            <p:spPr>
+              <a:xfrm>
+                <a:off x="603356" y="3283065"/>
+                <a:ext cx="914400" cy="693572"/>
+              </a:xfrm>
+              <a:prstGeom prst="rect">
+                <a:avLst/>
+              </a:prstGeom>
+            </p:spPr>
+          </p:pic>
+        </p:grpSp>
+        <p:grpSp>
+          <p:nvGrpSpPr>
+            <p:cNvPr id="17" name="Group 16">
+              <a:extLst>
+                <a:ext uri="{FF2B5EF4-FFF2-40B4-BE49-F238E27FC236}">
+                  <a16:creationId xmlns:a16="http://schemas.microsoft.com/office/drawing/2014/main" id="{C900507F-50F5-4A61-49C7-57B18483F8A7}"/>
+                </a:ext>
+              </a:extLst>
+            </p:cNvPr>
+            <p:cNvGrpSpPr/>
+            <p:nvPr/>
+          </p:nvGrpSpPr>
+          <p:grpSpPr>
+            <a:xfrm>
+              <a:off x="4265695" y="2082571"/>
+              <a:ext cx="1046638" cy="851699"/>
+              <a:chOff x="9651234" y="1522318"/>
+              <a:chExt cx="1046638" cy="851699"/>
+            </a:xfrm>
+          </p:grpSpPr>
+          <p:pic>
+            <p:nvPicPr>
+              <p:cNvPr id="18" name="Picture 17" descr="Several colorful shapes and numbers&#10;&#10;AI-generated content may be incorrect.">
+                <a:extLst>
+                  <a:ext uri="{FF2B5EF4-FFF2-40B4-BE49-F238E27FC236}">
+                    <a16:creationId xmlns:a16="http://schemas.microsoft.com/office/drawing/2014/main" id="{AE1BBF28-4A0A-1892-97EF-820A8AC147C2}"/>
+                  </a:ext>
+                </a:extLst>
+              </p:cNvPr>
+              <p:cNvPicPr>
+                <a:picLocks noChangeAspect="1"/>
+              </p:cNvPicPr>
+              <p:nvPr/>
+            </p:nvPicPr>
+            <p:blipFill>
+              <a:blip r:embed="rId10">
+                <a:extLst>
+                  <a:ext uri="{28A0092B-C50C-407E-A947-70E740481C1C}">
+                    <a14:useLocalDpi xmlns:a14="http://schemas.microsoft.com/office/drawing/2010/main" val="0"/>
+                  </a:ext>
+                </a:extLst>
+              </a:blip>
+              <a:srcRect l="800" t="724" r="950" b="1265"/>
+              <a:stretch/>
+            </p:blipFill>
+            <p:spPr>
+              <a:xfrm>
+                <a:off x="9783472" y="1522318"/>
+                <a:ext cx="914400" cy="696085"/>
+              </a:xfrm>
+              <a:prstGeom prst="rect">
+                <a:avLst/>
+              </a:prstGeom>
+            </p:spPr>
+          </p:pic>
+          <p:pic>
+            <p:nvPicPr>
+              <p:cNvPr id="20" name="Picture 19" descr="Several colorful shapes and numbers&#10;&#10;AI-generated content may be incorrect.">
+                <a:extLst>
+                  <a:ext uri="{FF2B5EF4-FFF2-40B4-BE49-F238E27FC236}">
+                    <a16:creationId xmlns:a16="http://schemas.microsoft.com/office/drawing/2014/main" id="{33BC7985-53CA-E75E-E680-9564C7E0E5C3}"/>
+                  </a:ext>
+                </a:extLst>
+              </p:cNvPr>
+              <p:cNvPicPr>
+                <a:picLocks noChangeAspect="1"/>
+              </p:cNvPicPr>
+              <p:nvPr/>
+            </p:nvPicPr>
+            <p:blipFill>
+              <a:blip r:embed="rId10">
+                <a:extLst>
+                  <a:ext uri="{28A0092B-C50C-407E-A947-70E740481C1C}">
+                    <a14:useLocalDpi xmlns:a14="http://schemas.microsoft.com/office/drawing/2010/main" val="0"/>
+                  </a:ext>
+                </a:extLst>
+              </a:blip>
+              <a:srcRect l="800" t="724" r="950" b="1265"/>
+              <a:stretch/>
+            </p:blipFill>
+            <p:spPr>
+              <a:xfrm>
+                <a:off x="9712104" y="1603184"/>
+                <a:ext cx="914400" cy="696085"/>
+              </a:xfrm>
+              <a:prstGeom prst="rect">
+                <a:avLst/>
+              </a:prstGeom>
+            </p:spPr>
+          </p:pic>
+          <p:pic>
+            <p:nvPicPr>
+              <p:cNvPr id="23" name="Picture 22" descr="Several colorful shapes and numbers&#10;&#10;AI-generated content may be incorrect.">
+                <a:extLst>
+                  <a:ext uri="{FF2B5EF4-FFF2-40B4-BE49-F238E27FC236}">
+                    <a16:creationId xmlns:a16="http://schemas.microsoft.com/office/drawing/2014/main" id="{4FDD6498-6102-F7A2-AAA6-B6418CAFEF1B}"/>
+                  </a:ext>
+                </a:extLst>
+              </p:cNvPr>
+              <p:cNvPicPr>
+                <a:picLocks noChangeAspect="1"/>
+              </p:cNvPicPr>
+              <p:nvPr/>
+            </p:nvPicPr>
+            <p:blipFill>
+              <a:blip r:embed="rId10">
+                <a:extLst>
+                  <a:ext uri="{28A0092B-C50C-407E-A947-70E740481C1C}">
+                    <a14:useLocalDpi xmlns:a14="http://schemas.microsoft.com/office/drawing/2010/main" val="0"/>
+                  </a:ext>
+                </a:extLst>
+              </a:blip>
+              <a:srcRect l="800" t="724" r="950" b="1265"/>
+              <a:stretch/>
+            </p:blipFill>
+            <p:spPr>
+              <a:xfrm>
+                <a:off x="9651234" y="1677932"/>
+                <a:ext cx="914400" cy="696085"/>
+              </a:xfrm>
+              <a:prstGeom prst="rect">
+                <a:avLst/>
+              </a:prstGeom>
+            </p:spPr>
+          </p:pic>
+        </p:grpSp>
+        <p:pic>
+          <p:nvPicPr>
+            <p:cNvPr id="36" name="Picture 35" descr="A group of white letters and numbers&#10;&#10;AI-generated content may be incorrect.">
+              <a:extLst>
+                <a:ext uri="{FF2B5EF4-FFF2-40B4-BE49-F238E27FC236}">
+                  <a16:creationId xmlns:a16="http://schemas.microsoft.com/office/drawing/2014/main" id="{22E2BF69-460D-BA9F-DB63-7517092505B0}"/>
+                </a:ext>
+              </a:extLst>
+            </p:cNvPr>
+            <p:cNvPicPr>
+              <a:picLocks noChangeAspect="1"/>
+            </p:cNvPicPr>
+            <p:nvPr/>
+          </p:nvPicPr>
+          <p:blipFill>
+            <a:blip r:embed="rId11">
+              <a:extLst>
+                <a:ext uri="{28A0092B-C50C-407E-A947-70E740481C1C}">
+                  <a14:useLocalDpi xmlns:a14="http://schemas.microsoft.com/office/drawing/2010/main" val="0"/>
+                </a:ext>
+              </a:extLst>
+            </a:blip>
+            <a:srcRect l="800" t="1359" r="875" b="1172"/>
+            <a:stretch/>
+          </p:blipFill>
+          <p:spPr>
+            <a:xfrm>
+              <a:off x="4265695" y="3144402"/>
+              <a:ext cx="914400" cy="691703"/>
+            </a:xfrm>
+            <a:prstGeom prst="rect">
+              <a:avLst/>
+            </a:prstGeom>
+          </p:spPr>
+        </p:pic>
+        <p:grpSp>
+          <p:nvGrpSpPr>
+            <p:cNvPr id="21" name="Group 20">
+              <a:extLst>
+                <a:ext uri="{FF2B5EF4-FFF2-40B4-BE49-F238E27FC236}">
+                  <a16:creationId xmlns:a16="http://schemas.microsoft.com/office/drawing/2014/main" id="{7A24751D-F3E7-17F3-3190-A94EB9EB1FDE}"/>
+                </a:ext>
+              </a:extLst>
+            </p:cNvPr>
+            <p:cNvGrpSpPr/>
+            <p:nvPr/>
+          </p:nvGrpSpPr>
+          <p:grpSpPr>
+            <a:xfrm>
+              <a:off x="10911144" y="2528739"/>
+              <a:ext cx="1059020" cy="846346"/>
+              <a:chOff x="10911144" y="2511594"/>
+              <a:chExt cx="1059020" cy="846346"/>
+            </a:xfrm>
+          </p:grpSpPr>
+          <p:pic>
+            <p:nvPicPr>
+              <p:cNvPr id="13" name="Picture 12">
+                <a:extLst>
+                  <a:ext uri="{FF2B5EF4-FFF2-40B4-BE49-F238E27FC236}">
+                    <a16:creationId xmlns:a16="http://schemas.microsoft.com/office/drawing/2014/main" id="{72D64226-1DA1-F9CE-956D-5419045C7D37}"/>
+                  </a:ext>
+                </a:extLst>
+              </p:cNvPr>
+              <p:cNvPicPr>
+                <a:picLocks noChangeAspect="1"/>
+              </p:cNvPicPr>
+              <p:nvPr/>
+            </p:nvPicPr>
+            <p:blipFill>
+              <a:blip r:embed="rId12"/>
+              <a:srcRect l="616" t="1379" r="1103" b="1509"/>
+              <a:stretch/>
+            </p:blipFill>
+            <p:spPr>
+              <a:xfrm>
+                <a:off x="11055764" y="2511594"/>
+                <a:ext cx="914400" cy="688236"/>
+              </a:xfrm>
+              <a:prstGeom prst="rect">
+                <a:avLst/>
+              </a:prstGeom>
+            </p:spPr>
+          </p:pic>
+          <p:pic>
+            <p:nvPicPr>
+              <p:cNvPr id="14" name="Picture 13">
+                <a:extLst>
+                  <a:ext uri="{FF2B5EF4-FFF2-40B4-BE49-F238E27FC236}">
+                    <a16:creationId xmlns:a16="http://schemas.microsoft.com/office/drawing/2014/main" id="{5ADC1E4A-75FA-8568-9123-E04A45D707A4}"/>
+                  </a:ext>
+                </a:extLst>
+              </p:cNvPr>
+              <p:cNvPicPr>
+                <a:picLocks noChangeAspect="1"/>
+              </p:cNvPicPr>
+              <p:nvPr/>
+            </p:nvPicPr>
+            <p:blipFill>
+              <a:blip r:embed="rId12"/>
+              <a:srcRect l="616" t="1379" r="1103" b="1509"/>
+              <a:stretch/>
+            </p:blipFill>
+            <p:spPr>
+              <a:xfrm>
+                <a:off x="10983454" y="2591794"/>
+                <a:ext cx="914400" cy="688236"/>
+              </a:xfrm>
+              <a:prstGeom prst="rect">
+                <a:avLst/>
+              </a:prstGeom>
+            </p:spPr>
+          </p:pic>
+          <p:pic>
+            <p:nvPicPr>
+              <p:cNvPr id="15" name="Picture 14">
+                <a:extLst>
+                  <a:ext uri="{FF2B5EF4-FFF2-40B4-BE49-F238E27FC236}">
+                    <a16:creationId xmlns:a16="http://schemas.microsoft.com/office/drawing/2014/main" id="{8AED1FEC-E0C0-4F68-AB89-FC5E05DFC82C}"/>
+                  </a:ext>
+                </a:extLst>
+              </p:cNvPr>
+              <p:cNvPicPr>
+                <a:picLocks noChangeAspect="1"/>
+              </p:cNvPicPr>
+              <p:nvPr/>
+            </p:nvPicPr>
+            <p:blipFill>
+              <a:blip r:embed="rId12"/>
+              <a:srcRect l="616" t="1379" r="1103" b="1509"/>
+              <a:stretch/>
+            </p:blipFill>
+            <p:spPr>
+              <a:xfrm>
+                <a:off x="10911144" y="2669704"/>
+                <a:ext cx="914400" cy="688236"/>
+              </a:xfrm>
+              <a:prstGeom prst="rect">
+                <a:avLst/>
+              </a:prstGeom>
+            </p:spPr>
+          </p:pic>
+        </p:grpSp>
+      </p:grpSp>
+    </p:spTree>
+    <p:extLst>
+      <p:ext uri="{BB962C8B-B14F-4D97-AF65-F5344CB8AC3E}">
+        <p14:creationId xmlns:p14="http://schemas.microsoft.com/office/powerpoint/2010/main" val="3198221361"/>
       </p:ext>
     </p:extLst>
   </p:cSld>

--- a/network.pptx
+++ b/network.pptx
@@ -262,7 +262,7 @@
           <a:p>
             <a:fld id="{75D70393-DF08-4715-BB1D-4361A5C8FF0F}" type="datetimeFigureOut">
               <a:rPr lang="en-US" smtClean="0"/>
-              <a:t>10/6/2025</a:t>
+              <a:t>27/11/2025</a:t>
             </a:fld>
             <a:endParaRPr lang="en-US"/>
           </a:p>
@@ -460,7 +460,7 @@
           <a:p>
             <a:fld id="{75D70393-DF08-4715-BB1D-4361A5C8FF0F}" type="datetimeFigureOut">
               <a:rPr lang="en-US" smtClean="0"/>
-              <a:t>10/6/2025</a:t>
+              <a:t>27/11/2025</a:t>
             </a:fld>
             <a:endParaRPr lang="en-US"/>
           </a:p>
@@ -668,7 +668,7 @@
           <a:p>
             <a:fld id="{75D70393-DF08-4715-BB1D-4361A5C8FF0F}" type="datetimeFigureOut">
               <a:rPr lang="en-US" smtClean="0"/>
-              <a:t>10/6/2025</a:t>
+              <a:t>27/11/2025</a:t>
             </a:fld>
             <a:endParaRPr lang="en-US"/>
           </a:p>
@@ -866,7 +866,7 @@
           <a:p>
             <a:fld id="{75D70393-DF08-4715-BB1D-4361A5C8FF0F}" type="datetimeFigureOut">
               <a:rPr lang="en-US" smtClean="0"/>
-              <a:t>10/6/2025</a:t>
+              <a:t>27/11/2025</a:t>
             </a:fld>
             <a:endParaRPr lang="en-US"/>
           </a:p>
@@ -1141,7 +1141,7 @@
           <a:p>
             <a:fld id="{75D70393-DF08-4715-BB1D-4361A5C8FF0F}" type="datetimeFigureOut">
               <a:rPr lang="en-US" smtClean="0"/>
-              <a:t>10/6/2025</a:t>
+              <a:t>27/11/2025</a:t>
             </a:fld>
             <a:endParaRPr lang="en-US"/>
           </a:p>
@@ -1406,7 +1406,7 @@
           <a:p>
             <a:fld id="{75D70393-DF08-4715-BB1D-4361A5C8FF0F}" type="datetimeFigureOut">
               <a:rPr lang="en-US" smtClean="0"/>
-              <a:t>10/6/2025</a:t>
+              <a:t>27/11/2025</a:t>
             </a:fld>
             <a:endParaRPr lang="en-US"/>
           </a:p>
@@ -1818,7 +1818,7 @@
           <a:p>
             <a:fld id="{75D70393-DF08-4715-BB1D-4361A5C8FF0F}" type="datetimeFigureOut">
               <a:rPr lang="en-US" smtClean="0"/>
-              <a:t>10/6/2025</a:t>
+              <a:t>27/11/2025</a:t>
             </a:fld>
             <a:endParaRPr lang="en-US"/>
           </a:p>
@@ -1959,7 +1959,7 @@
           <a:p>
             <a:fld id="{75D70393-DF08-4715-BB1D-4361A5C8FF0F}" type="datetimeFigureOut">
               <a:rPr lang="en-US" smtClean="0"/>
-              <a:t>10/6/2025</a:t>
+              <a:t>27/11/2025</a:t>
             </a:fld>
             <a:endParaRPr lang="en-US"/>
           </a:p>
@@ -2072,7 +2072,7 @@
           <a:p>
             <a:fld id="{75D70393-DF08-4715-BB1D-4361A5C8FF0F}" type="datetimeFigureOut">
               <a:rPr lang="en-US" smtClean="0"/>
-              <a:t>10/6/2025</a:t>
+              <a:t>27/11/2025</a:t>
             </a:fld>
             <a:endParaRPr lang="en-US"/>
           </a:p>
@@ -2383,7 +2383,7 @@
           <a:p>
             <a:fld id="{75D70393-DF08-4715-BB1D-4361A5C8FF0F}" type="datetimeFigureOut">
               <a:rPr lang="en-US" smtClean="0"/>
-              <a:t>10/6/2025</a:t>
+              <a:t>27/11/2025</a:t>
             </a:fld>
             <a:endParaRPr lang="en-US"/>
           </a:p>
@@ -2671,7 +2671,7 @@
           <a:p>
             <a:fld id="{75D70393-DF08-4715-BB1D-4361A5C8FF0F}" type="datetimeFigureOut">
               <a:rPr lang="en-US" smtClean="0"/>
-              <a:t>10/6/2025</a:t>
+              <a:t>27/11/2025</a:t>
             </a:fld>
             <a:endParaRPr lang="en-US"/>
           </a:p>
@@ -2912,7 +2912,7 @@
           <a:p>
             <a:fld id="{75D70393-DF08-4715-BB1D-4361A5C8FF0F}" type="datetimeFigureOut">
               <a:rPr lang="en-US" smtClean="0"/>
-              <a:t>10/6/2025</a:t>
+              <a:t>27/11/2025</a:t>
             </a:fld>
             <a:endParaRPr lang="en-US"/>
           </a:p>
@@ -11555,7 +11555,7 @@
                     <a:latin typeface="Arial" panose="020B0604020202020204" pitchFamily="34" charset="0"/>
                     <a:cs typeface="Arial" panose="020B0604020202020204" pitchFamily="34" charset="0"/>
                   </a:rPr>
-                  <a:t>Dekompozisyon</a:t>
+                  <a:t>Ayrıştırma</a:t>
                 </a:r>
                 <a:endParaRPr lang="en-US" sz="2300" dirty="0">
                   <a:solidFill>
@@ -11700,8 +11700,8 @@
               </a:p>
             </p:txBody>
           </p:sp>
-          <mc:AlternateContent xmlns:mc="http://schemas.openxmlformats.org/markup-compatibility/2006">
-            <mc:Choice xmlns:a14="http://schemas.microsoft.com/office/drawing/2010/main" Requires="a14">
+          <mc:AlternateContent xmlns:mc="http://schemas.openxmlformats.org/markup-compatibility/2006" xmlns:a14="http://schemas.microsoft.com/office/drawing/2010/main">
+            <mc:Choice Requires="a14">
               <p:sp>
                 <p:nvSpPr>
                   <p:cNvPr id="26" name="TextBox 25">
@@ -11771,7 +11771,7 @@
                 </p:txBody>
               </p:sp>
             </mc:Choice>
-            <mc:Fallback>
+            <mc:Fallback xmlns="">
               <p:sp>
                 <p:nvSpPr>
                   <p:cNvPr id="26" name="TextBox 25">
@@ -11816,8 +11816,8 @@
               </p:sp>
             </mc:Fallback>
           </mc:AlternateContent>
-          <mc:AlternateContent xmlns:mc="http://schemas.openxmlformats.org/markup-compatibility/2006">
-            <mc:Choice xmlns:a14="http://schemas.microsoft.com/office/drawing/2010/main" Requires="a14">
+          <mc:AlternateContent xmlns:mc="http://schemas.openxmlformats.org/markup-compatibility/2006" xmlns:a14="http://schemas.microsoft.com/office/drawing/2010/main">
+            <mc:Choice Requires="a14">
               <p:sp>
                 <p:nvSpPr>
                   <p:cNvPr id="27" name="TextBox 26">
@@ -11887,7 +11887,7 @@
                 </p:txBody>
               </p:sp>
             </mc:Choice>
-            <mc:Fallback>
+            <mc:Fallback xmlns="">
               <p:sp>
                 <p:nvSpPr>
                   <p:cNvPr id="27" name="TextBox 26">
@@ -11982,8 +11982,8 @@
                 </a:prstGeom>
               </p:spPr>
             </p:pic>
-            <mc:AlternateContent xmlns:mc="http://schemas.openxmlformats.org/markup-compatibility/2006">
-              <mc:Choice xmlns:a14="http://schemas.microsoft.com/office/drawing/2010/main" Requires="a14">
+            <mc:AlternateContent xmlns:mc="http://schemas.openxmlformats.org/markup-compatibility/2006" xmlns:a14="http://schemas.microsoft.com/office/drawing/2010/main">
+              <mc:Choice Requires="a14">
                 <p:sp>
                   <p:nvSpPr>
                     <p:cNvPr id="31" name="TextBox 30">
@@ -12053,7 +12053,7 @@
                   </p:txBody>
                 </p:sp>
               </mc:Choice>
-              <mc:Fallback>
+              <mc:Fallback xmlns="">
                 <p:sp>
                   <p:nvSpPr>
                     <p:cNvPr id="31" name="TextBox 30">
@@ -12479,58 +12479,6 @@
               </a:fontRef>
             </p:style>
           </p:cxnSp>
-          <p:sp>
-            <p:nvSpPr>
-              <p:cNvPr id="126" name="Flowchart: Summing Junction 125">
-                <a:extLst>
-                  <a:ext uri="{FF2B5EF4-FFF2-40B4-BE49-F238E27FC236}">
-                    <a16:creationId xmlns:a16="http://schemas.microsoft.com/office/drawing/2014/main" id="{AF40F4D5-EEE7-79FB-9939-C865C8C01780}"/>
-                  </a:ext>
-                </a:extLst>
-              </p:cNvPr>
-              <p:cNvSpPr/>
-              <p:nvPr/>
-            </p:nvSpPr>
-            <p:spPr>
-              <a:xfrm>
-                <a:off x="10210119" y="2896387"/>
-                <a:ext cx="274320" cy="274320"/>
-              </a:xfrm>
-              <a:prstGeom prst="flowChartSummingJunction">
-                <a:avLst/>
-              </a:prstGeom>
-              <a:noFill/>
-              <a:ln w="3175">
-                <a:solidFill>
-                  <a:schemeClr val="tx1"/>
-                </a:solidFill>
-              </a:ln>
-            </p:spPr>
-            <p:style>
-              <a:lnRef idx="2">
-                <a:schemeClr val="accent1">
-                  <a:shade val="15000"/>
-                </a:schemeClr>
-              </a:lnRef>
-              <a:fillRef idx="1">
-                <a:schemeClr val="accent1"/>
-              </a:fillRef>
-              <a:effectRef idx="0">
-                <a:schemeClr val="accent1"/>
-              </a:effectRef>
-              <a:fontRef idx="minor">
-                <a:schemeClr val="lt1"/>
-              </a:fontRef>
-            </p:style>
-            <p:txBody>
-              <a:bodyPr rtlCol="0" anchor="ctr"/>
-              <a:lstStyle/>
-              <a:p>
-                <a:pPr algn="ctr"/>
-                <a:endParaRPr lang="en-US"/>
-              </a:p>
-            </p:txBody>
-          </p:sp>
           <p:cxnSp>
             <p:nvCxnSpPr>
               <p:cNvPr id="128" name="Connector: Elbow 33">
@@ -12543,7 +12491,6 @@
               <p:cNvCxnSpPr>
                 <a:cxnSpLocks/>
                 <a:stCxn id="115" idx="6"/>
-                <a:endCxn id="126" idx="2"/>
               </p:cNvCxnSpPr>
               <p:nvPr/>
             </p:nvCxnSpPr>
@@ -12589,7 +12536,6 @@
               <p:cNvCxnSpPr>
                 <a:cxnSpLocks/>
                 <a:stCxn id="18" idx="0"/>
-                <a:endCxn id="126" idx="0"/>
               </p:cNvCxnSpPr>
               <p:nvPr/>
             </p:nvCxnSpPr>
@@ -12636,7 +12582,6 @@
               </p:cNvPr>
               <p:cNvCxnSpPr>
                 <a:cxnSpLocks/>
-                <a:stCxn id="126" idx="6"/>
                 <a:endCxn id="15" idx="1"/>
               </p:cNvCxnSpPr>
               <p:nvPr/>
@@ -12671,8 +12616,8 @@
               </a:fontRef>
             </p:style>
           </p:cxnSp>
-          <mc:AlternateContent xmlns:mc="http://schemas.openxmlformats.org/markup-compatibility/2006">
-            <mc:Choice xmlns:a14="http://schemas.microsoft.com/office/drawing/2010/main" Requires="a14">
+          <mc:AlternateContent xmlns:mc="http://schemas.openxmlformats.org/markup-compatibility/2006" xmlns:a14="http://schemas.microsoft.com/office/drawing/2010/main">
+            <mc:Choice Requires="a14">
               <p:sp>
                 <p:nvSpPr>
                   <p:cNvPr id="145" name="TextBox 144">
@@ -12722,7 +12667,7 @@
                 </p:txBody>
               </p:sp>
             </mc:Choice>
-            <mc:Fallback>
+            <mc:Fallback xmlns="">
               <p:sp>
                 <p:nvSpPr>
                   <p:cNvPr id="145" name="TextBox 144">
@@ -12848,8 +12793,8 @@
               </a:prstGeom>
             </p:spPr>
           </p:pic>
-          <mc:AlternateContent xmlns:mc="http://schemas.openxmlformats.org/markup-compatibility/2006">
-            <mc:Choice xmlns:a14="http://schemas.microsoft.com/office/drawing/2010/main" Requires="a14">
+          <mc:AlternateContent xmlns:mc="http://schemas.openxmlformats.org/markup-compatibility/2006" xmlns:a14="http://schemas.microsoft.com/office/drawing/2010/main">
+            <mc:Choice Requires="a14">
               <p:sp>
                 <p:nvSpPr>
                   <p:cNvPr id="9" name="TextBox 8">
@@ -12899,7 +12844,7 @@
                 </p:txBody>
               </p:sp>
             </mc:Choice>
-            <mc:Fallback>
+            <mc:Fallback xmlns="">
               <p:sp>
                 <p:nvSpPr>
                   <p:cNvPr id="9" name="TextBox 8">
@@ -13243,6 +13188,131 @@
             </p:spPr>
           </p:pic>
         </p:grpSp>
+      </p:grpSp>
+      <p:grpSp>
+        <p:nvGrpSpPr>
+          <p:cNvPr id="12" name="Group 11">
+            <a:extLst>
+              <a:ext uri="{FF2B5EF4-FFF2-40B4-BE49-F238E27FC236}">
+                <a16:creationId xmlns:a16="http://schemas.microsoft.com/office/drawing/2014/main" id="{6E56F311-D279-913D-911D-1CE678AAA7CF}"/>
+              </a:ext>
+            </a:extLst>
+          </p:cNvPr>
+          <p:cNvGrpSpPr/>
+          <p:nvPr/>
+        </p:nvGrpSpPr>
+        <p:grpSpPr>
+          <a:xfrm>
+            <a:off x="10217732" y="2903228"/>
+            <a:ext cx="274320" cy="274320"/>
+            <a:chOff x="10210118" y="3585210"/>
+            <a:chExt cx="274320" cy="274320"/>
+          </a:xfrm>
+        </p:grpSpPr>
+        <p:sp>
+          <p:nvSpPr>
+            <p:cNvPr id="5" name="Oval 4">
+              <a:extLst>
+                <a:ext uri="{FF2B5EF4-FFF2-40B4-BE49-F238E27FC236}">
+                  <a16:creationId xmlns:a16="http://schemas.microsoft.com/office/drawing/2014/main" id="{E2DDF963-BD44-12DC-500B-C96397D69D75}"/>
+                </a:ext>
+              </a:extLst>
+            </p:cNvPr>
+            <p:cNvSpPr/>
+            <p:nvPr/>
+          </p:nvSpPr>
+          <p:spPr>
+            <a:xfrm>
+              <a:off x="10210118" y="3585210"/>
+              <a:ext cx="274320" cy="274320"/>
+            </a:xfrm>
+            <a:prstGeom prst="ellipse">
+              <a:avLst/>
+            </a:prstGeom>
+            <a:noFill/>
+            <a:ln w="3175">
+              <a:solidFill>
+                <a:schemeClr val="tx1"/>
+              </a:solidFill>
+            </a:ln>
+          </p:spPr>
+          <p:style>
+            <a:lnRef idx="2">
+              <a:schemeClr val="accent1">
+                <a:shade val="15000"/>
+              </a:schemeClr>
+            </a:lnRef>
+            <a:fillRef idx="1">
+              <a:schemeClr val="accent1"/>
+            </a:fillRef>
+            <a:effectRef idx="0">
+              <a:schemeClr val="accent1"/>
+            </a:effectRef>
+            <a:fontRef idx="minor">
+              <a:schemeClr val="lt1"/>
+            </a:fontRef>
+          </p:style>
+          <p:txBody>
+            <a:bodyPr rtlCol="0" anchor="ctr"/>
+            <a:lstStyle/>
+            <a:p>
+              <a:pPr algn="ctr"/>
+              <a:endParaRPr lang="en-US"/>
+            </a:p>
+          </p:txBody>
+        </p:sp>
+        <p:sp>
+          <p:nvSpPr>
+            <p:cNvPr id="6" name="Oval 5">
+              <a:extLst>
+                <a:ext uri="{FF2B5EF4-FFF2-40B4-BE49-F238E27FC236}">
+                  <a16:creationId xmlns:a16="http://schemas.microsoft.com/office/drawing/2014/main" id="{7D7356F5-23D5-823E-117A-1629547AD56A}"/>
+                </a:ext>
+              </a:extLst>
+            </p:cNvPr>
+            <p:cNvSpPr/>
+            <p:nvPr/>
+          </p:nvSpPr>
+          <p:spPr>
+            <a:xfrm>
+              <a:off x="10310702" y="3678845"/>
+              <a:ext cx="73152" cy="73152"/>
+            </a:xfrm>
+            <a:prstGeom prst="ellipse">
+              <a:avLst/>
+            </a:prstGeom>
+            <a:noFill/>
+            <a:ln w="3175">
+              <a:solidFill>
+                <a:schemeClr val="tx1"/>
+              </a:solidFill>
+            </a:ln>
+          </p:spPr>
+          <p:style>
+            <a:lnRef idx="2">
+              <a:schemeClr val="accent1">
+                <a:shade val="15000"/>
+              </a:schemeClr>
+            </a:lnRef>
+            <a:fillRef idx="1">
+              <a:schemeClr val="accent1"/>
+            </a:fillRef>
+            <a:effectRef idx="0">
+              <a:schemeClr val="accent1"/>
+            </a:effectRef>
+            <a:fontRef idx="minor">
+              <a:schemeClr val="lt1"/>
+            </a:fontRef>
+          </p:style>
+          <p:txBody>
+            <a:bodyPr rtlCol="0" anchor="ctr"/>
+            <a:lstStyle/>
+            <a:p>
+              <a:pPr algn="ctr"/>
+              <a:endParaRPr lang="en-US"/>
+            </a:p>
+          </p:txBody>
+        </p:sp>
       </p:grpSp>
     </p:spTree>
     <p:extLst>
